--- a/docs/Rust_WASM_KPI_2026.pptx
+++ b/docs/Rust_WASM_KPI_2026.pptx
@@ -4,23 +4,26 @@
   <p:sldMasterIdLst>
     <p:sldMasterId id="2147483648" r:id="rId1"/>
   </p:sldMasterIdLst>
+  <p:notesMasterIdLst>
+    <p:notesMasterId r:id="rId15"/>
+  </p:notesMasterIdLst>
   <p:sldIdLst>
-    <p:sldId id="256" r:id="rId7"/>
-    <p:sldId id="257" r:id="rId9"/>
-    <p:sldId id="258" r:id="rId10"/>
-    <p:sldId id="259" r:id="rId11"/>
-    <p:sldId id="260" r:id="rId12"/>
-    <p:sldId id="261" r:id="rId13"/>
-    <p:sldId id="262" r:id="rId14"/>
-    <p:sldId id="263" r:id="rId15"/>
-    <p:sldId id="264" r:id="rId16"/>
-    <p:sldId id="265" r:id="rId17"/>
-    <p:sldId id="266" r:id="rId18"/>
-    <p:sldId id="267" r:id="rId19"/>
-    <p:sldId id="268" r:id="rId20"/>
-    <p:sldId id="269" r:id="rId21"/>
+    <p:sldId id="256" r:id="rId2"/>
+    <p:sldId id="270" r:id="rId20"/>
+    <p:sldId id="258" r:id="rId3"/>
+    <p:sldId id="259" r:id="rId4"/>
+    <p:sldId id="260" r:id="rId5"/>
+    <p:sldId id="261" r:id="rId6"/>
+    <p:sldId id="262" r:id="rId7"/>
+    <p:sldId id="263" r:id="rId8"/>
+    <p:sldId id="264" r:id="rId9"/>
+    <p:sldId id="265" r:id="rId10"/>
+    <p:sldId id="266" r:id="rId11"/>
+    <p:sldId id="267" r:id="rId12"/>
+    <p:sldId id="268" r:id="rId13"/>
+    <p:sldId id="269" r:id="rId14"/>
   </p:sldIdLst>
-  <p:sldSz cx="12191695" cy="6858000" type="screen4x3"/>
+  <p:sldSz cx="12192000" cy="6858000"/>
   <p:notesSz cx="6858000" cy="9144000"/>
   <p:defaultTextStyle>
     <a:defPPr>
@@ -117,18 +120,39 @@
       </a:defRPr>
     </a:lvl9pPr>
   </p:defaultTextStyle>
+  <p:extLst>
+    <p:ext uri="{EFAFB233-063F-42B5-8137-9DF3F51BA10A}">
+      <p15:sldGuideLst xmlns:p15="http://schemas.microsoft.com/office/powerpoint/2012/main">
+        <p15:guide id="1" orient="horz" pos="2160">
+          <p15:clr>
+            <a:srgbClr val="A4A3A4"/>
+          </p15:clr>
+        </p15:guide>
+        <p15:guide id="2" pos="2880">
+          <p15:clr>
+            <a:srgbClr val="A4A3A4"/>
+          </p15:clr>
+        </p15:guide>
+      </p15:sldGuideLst>
+    </p:ext>
+  </p:extLst>
 </p:presentation>
 </file>
 
 <file path=ppt/charts/chart1.xml><?xml version="1.0" encoding="utf-8"?>
-<c:chartSpace xmlns:c="http://schemas.openxmlformats.org/drawingml/2006/chart" xmlns:a="http://schemas.openxmlformats.org/drawingml/2006/main" xmlns:r="http://schemas.openxmlformats.org/officeDocument/2006/relationships">
+<c:chartSpace xmlns:c="http://schemas.openxmlformats.org/drawingml/2006/chart" xmlns:a="http://schemas.openxmlformats.org/drawingml/2006/main" xmlns:r="http://schemas.openxmlformats.org/officeDocument/2006/relationships" xmlns:c16r2="http://schemas.microsoft.com/office/drawing/2015/06/chart">
   <c:date1904 val="0"/>
+  <c:lang val="en-US"/>
+  <c:roundedCorners val="1"/>
+  <c:style val="2"/>
   <c:chart>
     <c:autoTitleDeleted val="1"/>
     <c:plotArea>
+      <c:layout/>
       <c:barChart>
         <c:barDir val="bar"/>
         <c:grouping val="clustered"/>
+        <c:varyColors val="1"/>
         <c:ser>
           <c:idx val="0"/>
           <c:order val="0"/>
@@ -148,6 +172,42 @@
               <a:srgbClr val="2F9E6F"/>
             </a:solidFill>
           </c:spPr>
+          <c:invertIfNegative val="1"/>
+          <c:dLbls>
+            <c:numFmt formatCode="0.0&quot;×&quot;" sourceLinked="0"/>
+            <c:spPr>
+              <a:noFill/>
+              <a:ln>
+                <a:noFill/>
+              </a:ln>
+              <a:effectLst/>
+            </c:spPr>
+            <c:txPr>
+              <a:bodyPr/>
+              <a:lstStyle/>
+              <a:p>
+                <a:pPr>
+                  <a:defRPr sz="1400" b="1">
+                    <a:latin typeface="Segoe UI"/>
+                  </a:defRPr>
+                </a:pPr>
+                <a:endParaRPr lang="en-US"/>
+              </a:p>
+            </c:txPr>
+            <c:dLblPos val="outEnd"/>
+            <c:showLegendKey val="0"/>
+            <c:showVal val="1"/>
+            <c:showCatName val="0"/>
+            <c:showSerName val="0"/>
+            <c:showPercent val="0"/>
+            <c:showBubbleSize val="0"/>
+            <c:showLeaderLines val="0"/>
+            <c:extLst>
+              <c:ext xmlns:c15="http://schemas.microsoft.com/office/drawing/2012/chart" uri="{CE6537A1-D6FC-4f65-9D91-7224C49458BB}">
+                <c15:showLeaderLines val="0"/>
+              </c:ext>
+            </c:extLst>
+          </c:dLbls>
           <c:cat>
             <c:strRef>
               <c:f>Sheet1!$A$2:$A$6</c:f>
@@ -178,7 +238,7 @@
                 <c:formatCode>General</c:formatCode>
                 <c:ptCount val="5"/>
                 <c:pt idx="0">
-                  <c:v>1.11</c:v>
+                  <c:v>1.1100000000000001</c:v>
                 </c:pt>
                 <c:pt idx="1">
                   <c:v>2.21</c:v>
@@ -195,20 +255,22 @@
               </c:numCache>
             </c:numRef>
           </c:val>
+          <c:extLst>
+            <c:ext xmlns:c14="http://schemas.microsoft.com/office/drawing/2007/8/2/chart" uri="{6F2FDCE9-48DA-4B69-8628-5D25D57E5C99}">
+              <c14:invertSolidFillFmt>
+                <c14:spPr xmlns:c14="http://schemas.microsoft.com/office/drawing/2007/8/2/chart">
+                  <a:solidFill>
+                    <a:srgbClr val="FFFFFF"/>
+                  </a:solidFill>
+                </c14:spPr>
+              </c14:invertSolidFillFmt>
+            </c:ext>
+            <c:ext xmlns:c16="http://schemas.microsoft.com/office/drawing/2014/chart" uri="{C3380CC4-5D6E-409C-BE32-E72D297353CC}">
+              <c16:uniqueId val="{00000000-DEC1-4D9B-A050-B382F32E4BFD}"/>
+            </c:ext>
+          </c:extLst>
         </c:ser>
         <c:dLbls>
-          <c:numFmt formatCode="0.0&quot;×&quot;" sourceLinked="0"/>
-          <c:txPr>
-            <a:bodyPr/>
-            <a:lstStyle/>
-            <a:p>
-              <a:pPr>
-                <a:defRPr sz="1400" b="1">
-                  <a:latin typeface="Segoe UI"/>
-                </a:defRPr>
-              </a:pPr>
-            </a:p>
-          </c:txPr>
           <c:dLblPos val="outEnd"/>
           <c:showLegendKey val="0"/>
           <c:showVal val="1"/>
@@ -216,7 +278,6 @@
           <c:showSerName val="0"/>
           <c:showPercent val="0"/>
           <c:showBubbleSize val="0"/>
-          <c:showLeaderLines val="1"/>
         </c:dLbls>
         <c:gapWidth val="55"/>
         <c:axId val="-2068027336"/>
@@ -229,6 +290,7 @@
         </c:scaling>
         <c:delete val="0"/>
         <c:axPos val="l"/>
+        <c:numFmt formatCode="General" sourceLinked="0"/>
         <c:majorTickMark val="out"/>
         <c:minorTickMark val="none"/>
         <c:tickLblPos val="nextTo"/>
@@ -241,6 +303,7 @@
                 <a:latin typeface="Segoe UI"/>
               </a:defRPr>
             </a:pPr>
+            <a:endParaRPr lang="en-US"/>
           </a:p>
         </c:txPr>
         <c:crossAx val="-2113994440"/>
@@ -253,18 +316,23 @@
       <c:valAx>
         <c:axId val="-2113994440"/>
         <c:scaling>
-          <c:min val="0.0"/>
+          <c:orientation val="minMax"/>
+          <c:min val="0"/>
         </c:scaling>
-        <c:delete/>
-        <c:axPos val="b"/>
+        <c:delete val="1"/>
+        <c:axPos val="t"/>
+        <c:numFmt formatCode="General" sourceLinked="1"/>
         <c:majorTickMark val="out"/>
         <c:minorTickMark val="none"/>
         <c:tickLblPos val="nextTo"/>
         <c:crossAx val="-2068027336"/>
         <c:crosses val="autoZero"/>
+        <c:crossBetween val="between"/>
       </c:valAx>
     </c:plotArea>
+    <c:plotVisOnly val="1"/>
     <c:dispBlanksAs val="gap"/>
+    <c:showDLblsOverMax val="1"/>
   </c:chart>
   <c:txPr>
     <a:bodyPr/>
@@ -283,7 +351,7 @@
 </file>
 
 <file path=ppt/notesMasters/notesMaster1.xml><?xml version="1.0" encoding="utf-8"?>
-<p:notesMaster xmlns:a="http://schemas.openxmlformats.org/drawingml/2006/main" xmlns:p="http://schemas.openxmlformats.org/presentationml/2006/main" xmlns:r="http://schemas.openxmlformats.org/officeDocument/2006/relationships">
+<p:notesMaster xmlns:a="http://schemas.openxmlformats.org/drawingml/2006/main" xmlns:r="http://schemas.openxmlformats.org/officeDocument/2006/relationships" xmlns:p="http://schemas.openxmlformats.org/presentationml/2006/main">
   <p:cSld>
     <p:bg>
       <p:bgRef idx="1001">
@@ -304,241 +372,16 @@
           <a:chExt cx="0" cy="0"/>
         </a:xfrm>
       </p:grpSpPr>
-      <p:sp>
-        <p:nvSpPr>
-          <p:cNvPr id="2" name="Header Placeholder 1"/>
-          <p:cNvSpPr>
-            <a:spLocks noGrp="1"/>
-          </p:cNvSpPr>
-          <p:nvPr>
-            <p:ph type="hdr" sz="quarter"/>
-          </p:nvPr>
-        </p:nvSpPr>
-        <p:spPr>
-          <a:xfrm>
-            <a:off x="0" y="0"/>
-            <a:ext cx="2971800" cy="457200"/>
-          </a:xfrm>
-          <a:prstGeom prst="rect">
-            <a:avLst/>
-          </a:prstGeom>
-        </p:spPr>
-        <p:txBody>
-          <a:bodyPr vert="horz" lIns="91440" tIns="45720" rIns="91440" bIns="45720" rtlCol="0"/>
-          <a:lstStyle>
-            <a:lvl1pPr algn="l">
-              <a:defRPr sz="1200"/>
-            </a:lvl1pPr>
-          </a:lstStyle>
-          <a:p>
-            <a:endParaRPr lang="en-US"/>
-          </a:p>
-        </p:txBody>
-      </p:sp>
-      <p:sp>
-        <p:nvSpPr>
-          <p:cNvPr id="3" name="Date Placeholder 2"/>
-          <p:cNvSpPr>
-            <a:spLocks noGrp="1"/>
-          </p:cNvSpPr>
-          <p:nvPr>
-            <p:ph type="dt" idx="1"/>
-          </p:nvPr>
-        </p:nvSpPr>
-        <p:spPr>
-          <a:xfrm>
-            <a:off x="3884613" y="0"/>
-            <a:ext cx="2971800" cy="457200"/>
-          </a:xfrm>
-          <a:prstGeom prst="rect">
-            <a:avLst/>
-          </a:prstGeom>
-        </p:spPr>
-        <p:txBody>
-          <a:bodyPr vert="horz" lIns="91440" tIns="45720" rIns="91440" bIns="45720" rtlCol="0"/>
-          <a:lstStyle>
-            <a:lvl1pPr algn="r">
-              <a:defRPr sz="1200"/>
-            </a:lvl1pPr>
-          </a:lstStyle>
-          <a:p>
-            <a:fld id="{0F89C1C7-3DCD-1040-A9CF-14679D8B5DDD}" type="datetimeFigureOut">
-              <a:rPr lang="en-US" smtClean="0"/>
-              <a:t>10/17/16</a:t>
-            </a:fld>
-            <a:endParaRPr lang="en-US"/>
-          </a:p>
-        </p:txBody>
-      </p:sp>
-      <p:sp>
-        <p:nvSpPr>
-          <p:cNvPr id="4" name="Slide Image Placeholder 3"/>
-          <p:cNvSpPr>
-            <a:spLocks noGrp="1" noRot="1" noChangeAspect="1"/>
-          </p:cNvSpPr>
-          <p:nvPr>
-            <p:ph type="sldImg" idx="2"/>
-          </p:nvPr>
-        </p:nvSpPr>
-        <p:spPr>
-          <a:xfrm>
-            <a:off x="1143000" y="685800"/>
-            <a:ext cx="4572000" cy="3429000"/>
-          </a:xfrm>
-          <a:prstGeom prst="rect">
-            <a:avLst/>
-          </a:prstGeom>
-          <a:noFill/>
-          <a:ln w="12700">
-            <a:solidFill>
-              <a:prstClr val="black"/>
-            </a:solidFill>
-          </a:ln>
-        </p:spPr>
-        <p:txBody>
-          <a:bodyPr vert="horz" lIns="91440" tIns="45720" rIns="91440" bIns="45720" rtlCol="0" anchor="ctr"/>
-          <a:lstStyle/>
-          <a:p>
-            <a:endParaRPr lang="en-US"/>
-          </a:p>
-        </p:txBody>
-      </p:sp>
-      <p:sp>
-        <p:nvSpPr>
-          <p:cNvPr id="5" name="Notes Placeholder 4"/>
-          <p:cNvSpPr>
-            <a:spLocks noGrp="1"/>
-          </p:cNvSpPr>
-          <p:nvPr>
-            <p:ph type="body" sz="quarter" idx="3"/>
-          </p:nvPr>
-        </p:nvSpPr>
-        <p:spPr>
-          <a:xfrm>
-            <a:off x="685800" y="4343400"/>
-            <a:ext cx="5486400" cy="4114800"/>
-          </a:xfrm>
-          <a:prstGeom prst="rect">
-            <a:avLst/>
-          </a:prstGeom>
-        </p:spPr>
-        <p:txBody>
-          <a:bodyPr vert="horz" lIns="91440" tIns="45720" rIns="91440" bIns="45720" rtlCol="0"/>
-          <a:lstStyle/>
-          <a:p>
-            <a:pPr lvl="0"/>
-            <a:r>
-              <a:rPr lang="en-US" smtClean="0"/>
-              <a:t>Click to edit Master text styles</a:t>
-            </a:r>
-          </a:p>
-          <a:p>
-            <a:pPr lvl="1"/>
-            <a:r>
-              <a:rPr lang="en-US" smtClean="0"/>
-              <a:t>Second level</a:t>
-            </a:r>
-          </a:p>
-          <a:p>
-            <a:pPr lvl="2"/>
-            <a:r>
-              <a:rPr lang="en-US" smtClean="0"/>
-              <a:t>Third level</a:t>
-            </a:r>
-          </a:p>
-          <a:p>
-            <a:pPr lvl="3"/>
-            <a:r>
-              <a:rPr lang="en-US" smtClean="0"/>
-              <a:t>Fourth level</a:t>
-            </a:r>
-          </a:p>
-          <a:p>
-            <a:pPr lvl="4"/>
-            <a:r>
-              <a:rPr lang="en-US" smtClean="0"/>
-              <a:t>Fifth level</a:t>
-            </a:r>
-            <a:endParaRPr lang="en-US"/>
-          </a:p>
-        </p:txBody>
-      </p:sp>
-      <p:sp>
-        <p:nvSpPr>
-          <p:cNvPr id="6" name="Footer Placeholder 5"/>
-          <p:cNvSpPr>
-            <a:spLocks noGrp="1"/>
-          </p:cNvSpPr>
-          <p:nvPr>
-            <p:ph type="ftr" sz="quarter" idx="4"/>
-          </p:nvPr>
-        </p:nvSpPr>
-        <p:spPr>
-          <a:xfrm>
-            <a:off x="0" y="8685213"/>
-            <a:ext cx="2971800" cy="457200"/>
-          </a:xfrm>
-          <a:prstGeom prst="rect">
-            <a:avLst/>
-          </a:prstGeom>
-        </p:spPr>
-        <p:txBody>
-          <a:bodyPr vert="horz" lIns="91440" tIns="45720" rIns="91440" bIns="45720" rtlCol="0" anchor="b"/>
-          <a:lstStyle>
-            <a:lvl1pPr algn="l">
-              <a:defRPr sz="1200"/>
-            </a:lvl1pPr>
-          </a:lstStyle>
-          <a:p>
-            <a:endParaRPr lang="en-US"/>
-          </a:p>
-        </p:txBody>
-      </p:sp>
-      <p:sp>
-        <p:nvSpPr>
-          <p:cNvPr id="7" name="Slide Number Placeholder 6"/>
-          <p:cNvSpPr>
-            <a:spLocks noGrp="1"/>
-          </p:cNvSpPr>
-          <p:nvPr>
-            <p:ph type="sldNum" sz="quarter" idx="5"/>
-          </p:nvPr>
-        </p:nvSpPr>
-        <p:spPr>
-          <a:xfrm>
-            <a:off x="3884613" y="8685213"/>
-            <a:ext cx="2971800" cy="457200"/>
-          </a:xfrm>
-          <a:prstGeom prst="rect">
-            <a:avLst/>
-          </a:prstGeom>
-        </p:spPr>
-        <p:txBody>
-          <a:bodyPr vert="horz" lIns="91440" tIns="45720" rIns="91440" bIns="45720" rtlCol="0" anchor="b"/>
-          <a:lstStyle>
-            <a:lvl1pPr algn="r">
-              <a:defRPr sz="1200"/>
-            </a:lvl1pPr>
-          </a:lstStyle>
-          <a:p>
-            <a:fld id="{BB5E49A5-4136-284D-997B-48E1D791AD67}" type="slidenum">
-              <a:rPr lang="en-US" smtClean="0"/>
-              <a:t>‹#›</a:t>
-            </a:fld>
-            <a:endParaRPr lang="en-US"/>
-          </a:p>
-        </p:txBody>
-      </p:sp>
     </p:spTree>
     <p:extLst>
       <p:ext uri="{BB962C8B-B14F-4D97-AF65-F5344CB8AC3E}">
-        <p14:creationId xmlns:p14="http://schemas.microsoft.com/office/powerpoint/2010/main" val="2623252185"/>
+        <p14:creationId xmlns:p14="http://schemas.microsoft.com/office/powerpoint/2010/main" val="1033085709"/>
       </p:ext>
     </p:extLst>
   </p:cSld>
   <p:clrMap bg1="lt1" tx1="dk1" bg2="lt2" tx2="dk2" accent1="accent1" accent2="accent2" accent3="accent3" accent4="accent4" accent5="accent5" accent6="accent6" hlink="hlink" folHlink="folHlink"/>
   <p:notesStyle>
-    <a:lvl1pPr marL="0" algn="l" defTabSz="457200" rtl="0" eaLnBrk="1" latinLnBrk="0" hangingPunct="1">
+    <a:lvl1pPr marL="0" algn="l" defTabSz="914400" rtl="0" eaLnBrk="1" latinLnBrk="0" hangingPunct="1">
       <a:defRPr sz="1200" kern="1200">
         <a:solidFill>
           <a:schemeClr val="tx1"/>
@@ -548,7 +391,7 @@
         <a:cs typeface="+mn-cs"/>
       </a:defRPr>
     </a:lvl1pPr>
-    <a:lvl2pPr marL="457200" algn="l" defTabSz="457200" rtl="0" eaLnBrk="1" latinLnBrk="0" hangingPunct="1">
+    <a:lvl2pPr marL="457200" algn="l" defTabSz="914400" rtl="0" eaLnBrk="1" latinLnBrk="0" hangingPunct="1">
       <a:defRPr sz="1200" kern="1200">
         <a:solidFill>
           <a:schemeClr val="tx1"/>
@@ -558,7 +401,7 @@
         <a:cs typeface="+mn-cs"/>
       </a:defRPr>
     </a:lvl2pPr>
-    <a:lvl3pPr marL="914400" algn="l" defTabSz="457200" rtl="0" eaLnBrk="1" latinLnBrk="0" hangingPunct="1">
+    <a:lvl3pPr marL="914400" algn="l" defTabSz="914400" rtl="0" eaLnBrk="1" latinLnBrk="0" hangingPunct="1">
       <a:defRPr sz="1200" kern="1200">
         <a:solidFill>
           <a:schemeClr val="tx1"/>
@@ -568,7 +411,7 @@
         <a:cs typeface="+mn-cs"/>
       </a:defRPr>
     </a:lvl3pPr>
-    <a:lvl4pPr marL="1371600" algn="l" defTabSz="457200" rtl="0" eaLnBrk="1" latinLnBrk="0" hangingPunct="1">
+    <a:lvl4pPr marL="1371600" algn="l" defTabSz="914400" rtl="0" eaLnBrk="1" latinLnBrk="0" hangingPunct="1">
       <a:defRPr sz="1200" kern="1200">
         <a:solidFill>
           <a:schemeClr val="tx1"/>
@@ -578,7 +421,7 @@
         <a:cs typeface="+mn-cs"/>
       </a:defRPr>
     </a:lvl4pPr>
-    <a:lvl5pPr marL="1828800" algn="l" defTabSz="457200" rtl="0" eaLnBrk="1" latinLnBrk="0" hangingPunct="1">
+    <a:lvl5pPr marL="1828800" algn="l" defTabSz="914400" rtl="0" eaLnBrk="1" latinLnBrk="0" hangingPunct="1">
       <a:defRPr sz="1200" kern="1200">
         <a:solidFill>
           <a:schemeClr val="tx1"/>
@@ -588,7 +431,7 @@
         <a:cs typeface="+mn-cs"/>
       </a:defRPr>
     </a:lvl5pPr>
-    <a:lvl6pPr marL="2286000" algn="l" defTabSz="457200" rtl="0" eaLnBrk="1" latinLnBrk="0" hangingPunct="1">
+    <a:lvl6pPr marL="2286000" algn="l" defTabSz="914400" rtl="0" eaLnBrk="1" latinLnBrk="0" hangingPunct="1">
       <a:defRPr sz="1200" kern="1200">
         <a:solidFill>
           <a:schemeClr val="tx1"/>
@@ -598,7 +441,7 @@
         <a:cs typeface="+mn-cs"/>
       </a:defRPr>
     </a:lvl6pPr>
-    <a:lvl7pPr marL="2743200" algn="l" defTabSz="457200" rtl="0" eaLnBrk="1" latinLnBrk="0" hangingPunct="1">
+    <a:lvl7pPr marL="2743200" algn="l" defTabSz="914400" rtl="0" eaLnBrk="1" latinLnBrk="0" hangingPunct="1">
       <a:defRPr sz="1200" kern="1200">
         <a:solidFill>
           <a:schemeClr val="tx1"/>
@@ -608,7 +451,7 @@
         <a:cs typeface="+mn-cs"/>
       </a:defRPr>
     </a:lvl7pPr>
-    <a:lvl8pPr marL="3200400" algn="l" defTabSz="457200" rtl="0" eaLnBrk="1" latinLnBrk="0" hangingPunct="1">
+    <a:lvl8pPr marL="3200400" algn="l" defTabSz="914400" rtl="0" eaLnBrk="1" latinLnBrk="0" hangingPunct="1">
       <a:defRPr sz="1200" kern="1200">
         <a:solidFill>
           <a:schemeClr val="tx1"/>
@@ -618,7 +461,7 @@
         <a:cs typeface="+mn-cs"/>
       </a:defRPr>
     </a:lvl8pPr>
-    <a:lvl9pPr marL="3657600" algn="l" defTabSz="457200" rtl="0" eaLnBrk="1" latinLnBrk="0" hangingPunct="1">
+    <a:lvl9pPr marL="3657600" algn="l" defTabSz="914400" rtl="0" eaLnBrk="1" latinLnBrk="0" hangingPunct="1">
       <a:defRPr sz="1200" kern="1200">
         <a:solidFill>
           <a:schemeClr val="tx1"/>
@@ -633,7 +476,7 @@
 </file>
 
 <file path=ppt/notesSlides/notesSlide1.xml><?xml version="1.0" encoding="utf-8"?>
-<p:notes xmlns:a="http://schemas.openxmlformats.org/drawingml/2006/main" xmlns:p="http://schemas.openxmlformats.org/presentationml/2006/main" xmlns:r="http://schemas.openxmlformats.org/officeDocument/2006/relationships">
+<p:notes xmlns:a="http://schemas.openxmlformats.org/drawingml/2006/main" xmlns:r="http://schemas.openxmlformats.org/officeDocument/2006/relationships" xmlns:p="http://schemas.openxmlformats.org/presentationml/2006/main">
   <p:cSld>
     <p:spTree>
       <p:nvGrpSpPr>
@@ -653,7 +496,7 @@
         <p:nvSpPr>
           <p:cNvPr id="2" name="Slide Image Placeholder 1"/>
           <p:cNvSpPr>
-            <a:spLocks noGrp="1"/>
+            <a:spLocks noGrp="1" noRot="1" noChangeAspect="1"/>
           </p:cNvSpPr>
           <p:nvPr>
             <p:ph type="sldImg" idx="2"/>
@@ -668,7 +511,7 @@
             <a:spLocks noGrp="1"/>
           </p:cNvSpPr>
           <p:nvPr>
-            <p:ph type="body" idx="3" sz="quarter"/>
+            <p:ph type="body" sz="quarter" idx="3"/>
           </p:nvPr>
         </p:nvSpPr>
         <p:spPr/>
@@ -689,7 +532,7 @@
             <a:spLocks noGrp="1"/>
           </p:cNvSpPr>
           <p:nvPr>
-            <p:ph type="sldNum" idx="5" sz="quarter"/>
+            <p:ph type="sldNum" sz="quarter" idx="5"/>
           </p:nvPr>
         </p:nvSpPr>
         <p:spPr/>
@@ -703,7 +546,7 @@
 </file>
 
 <file path=ppt/notesSlides/notesSlide10.xml><?xml version="1.0" encoding="utf-8"?>
-<p:notes xmlns:a="http://schemas.openxmlformats.org/drawingml/2006/main" xmlns:p="http://schemas.openxmlformats.org/presentationml/2006/main" xmlns:r="http://schemas.openxmlformats.org/officeDocument/2006/relationships">
+<p:notes xmlns:a="http://schemas.openxmlformats.org/drawingml/2006/main" xmlns:r="http://schemas.openxmlformats.org/officeDocument/2006/relationships" xmlns:p="http://schemas.openxmlformats.org/presentationml/2006/main">
   <p:cSld>
     <p:spTree>
       <p:nvGrpSpPr>
@@ -723,7 +566,7 @@
         <p:nvSpPr>
           <p:cNvPr id="2" name="Slide Image Placeholder 1"/>
           <p:cNvSpPr>
-            <a:spLocks noGrp="1"/>
+            <a:spLocks noGrp="1" noRot="1" noChangeAspect="1"/>
           </p:cNvSpPr>
           <p:nvPr>
             <p:ph type="sldImg" idx="2"/>
@@ -738,7 +581,7 @@
             <a:spLocks noGrp="1"/>
           </p:cNvSpPr>
           <p:nvPr>
-            <p:ph type="body" idx="3" sz="quarter"/>
+            <p:ph type="body" sz="quarter" idx="3"/>
           </p:nvPr>
         </p:nvSpPr>
         <p:spPr/>
@@ -747,7 +590,7 @@
           <a:lstStyle/>
           <a:p>
             <a:r>
-              <a:t>Lead with the advantages that are measurable (speed) and architectural (privacy, cost, offline).</a:t>
+              <a:t>Be candid. Other demo-specific limits: JS has no xlsx parser, hand-rolled CSV split ignores newlines in quoted fields, performance.memory is Chrome-only, and image decode time is not included in any engine's timing.</a:t>
             </a:r>
           </a:p>
         </p:txBody>
@@ -759,7 +602,7 @@
             <a:spLocks noGrp="1"/>
           </p:cNvSpPr>
           <p:nvPr>
-            <p:ph type="sldNum" idx="5" sz="quarter"/>
+            <p:ph type="sldNum" sz="quarter" idx="5"/>
           </p:nvPr>
         </p:nvSpPr>
         <p:spPr/>
@@ -773,7 +616,7 @@
 </file>
 
 <file path=ppt/notesSlides/notesSlide11.xml><?xml version="1.0" encoding="utf-8"?>
-<p:notes xmlns:a="http://schemas.openxmlformats.org/drawingml/2006/main" xmlns:p="http://schemas.openxmlformats.org/presentationml/2006/main" xmlns:r="http://schemas.openxmlformats.org/officeDocument/2006/relationships">
+<p:notes xmlns:a="http://schemas.openxmlformats.org/drawingml/2006/main" xmlns:r="http://schemas.openxmlformats.org/officeDocument/2006/relationships" xmlns:p="http://schemas.openxmlformats.org/presentationml/2006/main">
   <p:cSld>
     <p:spTree>
       <p:nvGrpSpPr>
@@ -793,7 +636,7 @@
         <p:nvSpPr>
           <p:cNvPr id="2" name="Slide Image Placeholder 1"/>
           <p:cNvSpPr>
-            <a:spLocks noGrp="1"/>
+            <a:spLocks noGrp="1" noRot="1" noChangeAspect="1"/>
           </p:cNvSpPr>
           <p:nvPr>
             <p:ph type="sldImg" idx="2"/>
@@ -808,7 +651,7 @@
             <a:spLocks noGrp="1"/>
           </p:cNvSpPr>
           <p:nvPr>
-            <p:ph type="body" idx="3" sz="quarter"/>
+            <p:ph type="body" sz="quarter" idx="3"/>
           </p:nvPr>
         </p:nvSpPr>
         <p:spPr/>
@@ -817,7 +660,7 @@
           <a:lstStyle/>
           <a:p>
             <a:r>
-              <a:t>Be candid. Other demo-specific limits: JS has no xlsx parser, hand-rolled CSV split ignores newlines in quoted fields, performance.memory is Chrome-only, and image decode time is not included in any engine's timing.</a:t>
+              <a:t>My recommendation: use WASM for isolated, CPU-heavy, data-local tasks, and keep everything else in JavaScript or on the server.</a:t>
             </a:r>
           </a:p>
         </p:txBody>
@@ -829,7 +672,7 @@
             <a:spLocks noGrp="1"/>
           </p:cNvSpPr>
           <p:nvPr>
-            <p:ph type="sldNum" idx="5" sz="quarter"/>
+            <p:ph type="sldNum" sz="quarter" idx="5"/>
           </p:nvPr>
         </p:nvSpPr>
         <p:spPr/>
@@ -843,7 +686,7 @@
 </file>
 
 <file path=ppt/notesSlides/notesSlide12.xml><?xml version="1.0" encoding="utf-8"?>
-<p:notes xmlns:a="http://schemas.openxmlformats.org/drawingml/2006/main" xmlns:p="http://schemas.openxmlformats.org/presentationml/2006/main" xmlns:r="http://schemas.openxmlformats.org/officeDocument/2006/relationships">
+<p:notes xmlns:a="http://schemas.openxmlformats.org/drawingml/2006/main" xmlns:r="http://schemas.openxmlformats.org/officeDocument/2006/relationships" xmlns:p="http://schemas.openxmlformats.org/presentationml/2006/main">
   <p:cSld>
     <p:spTree>
       <p:nvGrpSpPr>
@@ -863,7 +706,7 @@
         <p:nvSpPr>
           <p:cNvPr id="2" name="Slide Image Placeholder 1"/>
           <p:cNvSpPr>
-            <a:spLocks noGrp="1"/>
+            <a:spLocks noGrp="1" noRot="1" noChangeAspect="1"/>
           </p:cNvSpPr>
           <p:nvPr>
             <p:ph type="sldImg" idx="2"/>
@@ -878,7 +721,7 @@
             <a:spLocks noGrp="1"/>
           </p:cNvSpPr>
           <p:nvPr>
-            <p:ph type="body" idx="3" sz="quarter"/>
+            <p:ph type="body" sz="quarter" idx="3"/>
           </p:nvPr>
         </p:nvSpPr>
         <p:spPr/>
@@ -887,7 +730,7 @@
           <a:lstStyle/>
           <a:p>
             <a:r>
-              <a:t>My recommendation: use WASM for isolated, CPU-heavy, data-local tasks, and keep everything else in JavaScript or on the server.</a:t>
+              <a:t>Close the loop to the KPI: list the skills gained and the evidence produced.</a:t>
             </a:r>
           </a:p>
         </p:txBody>
@@ -899,7 +742,7 @@
             <a:spLocks noGrp="1"/>
           </p:cNvSpPr>
           <p:nvPr>
-            <p:ph type="sldNum" idx="5" sz="quarter"/>
+            <p:ph type="sldNum" sz="quarter" idx="5"/>
           </p:nvPr>
         </p:nvSpPr>
         <p:spPr/>
@@ -913,7 +756,7 @@
 </file>
 
 <file path=ppt/notesSlides/notesSlide13.xml><?xml version="1.0" encoding="utf-8"?>
-<p:notes xmlns:a="http://schemas.openxmlformats.org/drawingml/2006/main" xmlns:p="http://schemas.openxmlformats.org/presentationml/2006/main" xmlns:r="http://schemas.openxmlformats.org/officeDocument/2006/relationships">
+<p:notes xmlns:a="http://schemas.openxmlformats.org/drawingml/2006/main" xmlns:r="http://schemas.openxmlformats.org/officeDocument/2006/relationships" xmlns:p="http://schemas.openxmlformats.org/presentationml/2006/main">
   <p:cSld>
     <p:spTree>
       <p:nvGrpSpPr>
@@ -933,7 +776,7 @@
         <p:nvSpPr>
           <p:cNvPr id="2" name="Slide Image Placeholder 1"/>
           <p:cNvSpPr>
-            <a:spLocks noGrp="1"/>
+            <a:spLocks noGrp="1" noRot="1" noChangeAspect="1"/>
           </p:cNvSpPr>
           <p:nvPr>
             <p:ph type="sldImg" idx="2"/>
@@ -948,7 +791,7 @@
             <a:spLocks noGrp="1"/>
           </p:cNvSpPr>
           <p:nvPr>
-            <p:ph type="body" idx="3" sz="quarter"/>
+            <p:ph type="body" sz="quarter" idx="3"/>
           </p:nvPr>
         </p:nvSpPr>
         <p:spPr/>
@@ -957,7 +800,7 @@
           <a:lstStyle/>
           <a:p>
             <a:r>
-              <a:t>Close the loop to the KPI: list the skills gained and the evidence produced.</a:t>
+              <a:t>Close with the follow-up plan and open for questions.</a:t>
             </a:r>
           </a:p>
         </p:txBody>
@@ -969,7 +812,7 @@
             <a:spLocks noGrp="1"/>
           </p:cNvSpPr>
           <p:nvPr>
-            <p:ph type="sldNum" idx="5" sz="quarter"/>
+            <p:ph type="sldNum" sz="quarter" idx="5"/>
           </p:nvPr>
         </p:nvSpPr>
         <p:spPr/>
@@ -1003,7 +846,7 @@
         <p:nvSpPr>
           <p:cNvPr id="2" name="Slide Image Placeholder 1"/>
           <p:cNvSpPr>
-            <a:spLocks noGrp="1"/>
+            <a:spLocks noGrp="1" noRot="1" noChangeAspect="1"/>
           </p:cNvSpPr>
           <p:nvPr>
             <p:ph type="sldImg" idx="2"/>
@@ -1018,7 +861,7 @@
             <a:spLocks noGrp="1"/>
           </p:cNvSpPr>
           <p:nvPr>
-            <p:ph type="body" idx="3" sz="quarter"/>
+            <p:ph type="body" sz="quarter" idx="3"/>
           </p:nvPr>
         </p:nvSpPr>
         <p:spPr/>
@@ -1027,7 +870,7 @@
           <a:lstStyle/>
           <a:p>
             <a:r>
-              <a:t>Close with the follow-up plan and open for questions.</a:t>
+              <a:t>Context before the technology. Today, heavy work such as image processing or validating a 100,000-row CSV or Excel file is usually sent to a server: upload, process, download. That costs waiting time, server capacity and, for sensitive files, privacy. Plain JavaScript in the browser avoids the trip but is slower for CPU-heavy loops and lacks good parsers for some formats. This is why I looked at Rust compiled to WebAssembly, which the next slide explains. The rest of the deck measures whether it helps.</a:t>
             </a:r>
           </a:p>
         </p:txBody>
@@ -1039,7 +882,7 @@
             <a:spLocks noGrp="1"/>
           </p:cNvSpPr>
           <p:nvPr>
-            <p:ph type="sldNum" idx="5" sz="quarter"/>
+            <p:ph type="sldNum" sz="quarter" idx="5"/>
           </p:nvPr>
         </p:nvSpPr>
         <p:spPr/>
@@ -1053,7 +896,7 @@
 </file>
 
 <file path=ppt/notesSlides/notesSlide2.xml><?xml version="1.0" encoding="utf-8"?>
-<p:notes xmlns:a="http://schemas.openxmlformats.org/drawingml/2006/main" xmlns:p="http://schemas.openxmlformats.org/presentationml/2006/main" xmlns:r="http://schemas.openxmlformats.org/officeDocument/2006/relationships">
+<p:notes xmlns:a="http://schemas.openxmlformats.org/drawingml/2006/main" xmlns:r="http://schemas.openxmlformats.org/officeDocument/2006/relationships" xmlns:p="http://schemas.openxmlformats.org/presentationml/2006/main">
   <p:cSld>
     <p:spTree>
       <p:nvGrpSpPr>
@@ -1073,7 +916,7 @@
         <p:nvSpPr>
           <p:cNvPr id="2" name="Slide Image Placeholder 1"/>
           <p:cNvSpPr>
-            <a:spLocks noGrp="1"/>
+            <a:spLocks noGrp="1" noRot="1" noChangeAspect="1"/>
           </p:cNvSpPr>
           <p:nvPr>
             <p:ph type="sldImg" idx="2"/>
@@ -1088,7 +931,7 @@
             <a:spLocks noGrp="1"/>
           </p:cNvSpPr>
           <p:nvPr>
-            <p:ph type="body" idx="3" sz="quarter"/>
+            <p:ph type="body" sz="quarter" idx="3"/>
           </p:nvPr>
         </p:nvSpPr>
         <p:spPr/>
@@ -1097,7 +940,7 @@
           <a:lstStyle/>
           <a:p>
             <a:r>
-              <a:t>Map each KPI expectation to a deliverable. Blog post is the remaining item and is honest to call out as planned.</a:t>
+              <a:t>Keep it simple. Rust is a fast, memory-safe programming language. WebAssembly is a compact binary format that every modern browser can run safely next to JavaScript. Together: write the heavy logic once in Rust, compile it to a .wasm file (539 KB here, about 235 lines of Rust), load it in a Web Worker so the page never freezes, and call it from JavaScript. Tie it back to the previous slide: the work stays on the user's device, so there is no upload or download. Tooling names (wasm-pack, wasm-bindgen) can be mentioned verbally if asked.</a:t>
             </a:r>
           </a:p>
         </p:txBody>
@@ -1109,7 +952,7 @@
             <a:spLocks noGrp="1"/>
           </p:cNvSpPr>
           <p:nvPr>
-            <p:ph type="sldNum" idx="5" sz="quarter"/>
+            <p:ph type="sldNum" sz="quarter" idx="5"/>
           </p:nvPr>
         </p:nvSpPr>
         <p:spPr/>
@@ -1123,7 +966,7 @@
 </file>
 
 <file path=ppt/notesSlides/notesSlide3.xml><?xml version="1.0" encoding="utf-8"?>
-<p:notes xmlns:a="http://schemas.openxmlformats.org/drawingml/2006/main" xmlns:p="http://schemas.openxmlformats.org/presentationml/2006/main" xmlns:r="http://schemas.openxmlformats.org/officeDocument/2006/relationships">
+<p:notes xmlns:a="http://schemas.openxmlformats.org/drawingml/2006/main" xmlns:r="http://schemas.openxmlformats.org/officeDocument/2006/relationships" xmlns:p="http://schemas.openxmlformats.org/presentationml/2006/main">
   <p:cSld>
     <p:spTree>
       <p:nvGrpSpPr>
@@ -1143,7 +986,7 @@
         <p:nvSpPr>
           <p:cNvPr id="2" name="Slide Image Placeholder 1"/>
           <p:cNvSpPr>
-            <a:spLocks noGrp="1"/>
+            <a:spLocks noGrp="1" noRot="1" noChangeAspect="1"/>
           </p:cNvSpPr>
           <p:nvPr>
             <p:ph type="sldImg" idx="2"/>
@@ -1158,7 +1001,7 @@
             <a:spLocks noGrp="1"/>
           </p:cNvSpPr>
           <p:nvPr>
-            <p:ph type="body" idx="3" sz="quarter"/>
+            <p:ph type="body" sz="quarter" idx="3"/>
           </p:nvPr>
         </p:nvSpPr>
         <p:spPr/>
@@ -1167,7 +1010,7 @@
           <a:lstStyle/>
           <a:p>
             <a:r>
-              <a:t>Explain the toolchain once: Rust compiles to a .wasm binary, wasm-bindgen creates the JavaScript bindings, and we call it from a Web Worker so the UI never freezes.</a:t>
+              <a:t>Three engines, same inputs. JS and WASM both run in Web Workers. The server path includes upload and download, which is the real cost a user waits for.</a:t>
             </a:r>
           </a:p>
         </p:txBody>
@@ -1179,7 +1022,7 @@
             <a:spLocks noGrp="1"/>
           </p:cNvSpPr>
           <p:nvPr>
-            <p:ph type="sldNum" idx="5" sz="quarter"/>
+            <p:ph type="sldNum" sz="quarter" idx="5"/>
           </p:nvPr>
         </p:nvSpPr>
         <p:spPr/>
@@ -1193,7 +1036,7 @@
 </file>
 
 <file path=ppt/notesSlides/notesSlide4.xml><?xml version="1.0" encoding="utf-8"?>
-<p:notes xmlns:a="http://schemas.openxmlformats.org/drawingml/2006/main" xmlns:p="http://schemas.openxmlformats.org/presentationml/2006/main" xmlns:r="http://schemas.openxmlformats.org/officeDocument/2006/relationships">
+<p:notes xmlns:a="http://schemas.openxmlformats.org/drawingml/2006/main" xmlns:r="http://schemas.openxmlformats.org/officeDocument/2006/relationships" xmlns:p="http://schemas.openxmlformats.org/presentationml/2006/main">
   <p:cSld>
     <p:spTree>
       <p:nvGrpSpPr>
@@ -1213,7 +1056,7 @@
         <p:nvSpPr>
           <p:cNvPr id="2" name="Slide Image Placeholder 1"/>
           <p:cNvSpPr>
-            <a:spLocks noGrp="1"/>
+            <a:spLocks noGrp="1" noRot="1" noChangeAspect="1"/>
           </p:cNvSpPr>
           <p:nvPr>
             <p:ph type="sldImg" idx="2"/>
@@ -1228,7 +1071,7 @@
             <a:spLocks noGrp="1"/>
           </p:cNvSpPr>
           <p:nvPr>
-            <p:ph type="body" idx="3" sz="quarter"/>
+            <p:ph type="body" sz="quarter" idx="3"/>
           </p:nvPr>
         </p:nvSpPr>
         <p:spPr/>
@@ -1237,7 +1080,7 @@
           <a:lstStyle/>
           <a:p>
             <a:r>
-              <a:t>Three engines, same inputs. JS and WASM both run in Web Workers. The server path includes upload and download, which is the real cost a user waits for.</a:t>
+              <a:t>Be upfront about methodology and its limits. Numbers will vary by machine, so I record them by script rather than by hand.</a:t>
             </a:r>
           </a:p>
         </p:txBody>
@@ -1249,7 +1092,7 @@
             <a:spLocks noGrp="1"/>
           </p:cNvSpPr>
           <p:nvPr>
-            <p:ph type="sldNum" idx="5" sz="quarter"/>
+            <p:ph type="sldNum" sz="quarter" idx="5"/>
           </p:nvPr>
         </p:nvSpPr>
         <p:spPr/>
@@ -1263,7 +1106,7 @@
 </file>
 
 <file path=ppt/notesSlides/notesSlide5.xml><?xml version="1.0" encoding="utf-8"?>
-<p:notes xmlns:a="http://schemas.openxmlformats.org/drawingml/2006/main" xmlns:p="http://schemas.openxmlformats.org/presentationml/2006/main" xmlns:r="http://schemas.openxmlformats.org/officeDocument/2006/relationships">
+<p:notes xmlns:a="http://schemas.openxmlformats.org/drawingml/2006/main" xmlns:r="http://schemas.openxmlformats.org/officeDocument/2006/relationships" xmlns:p="http://schemas.openxmlformats.org/presentationml/2006/main">
   <p:cSld>
     <p:spTree>
       <p:nvGrpSpPr>
@@ -1283,7 +1126,7 @@
         <p:nvSpPr>
           <p:cNvPr id="2" name="Slide Image Placeholder 1"/>
           <p:cNvSpPr>
-            <a:spLocks noGrp="1"/>
+            <a:spLocks noGrp="1" noRot="1" noChangeAspect="1"/>
           </p:cNvSpPr>
           <p:nvPr>
             <p:ph type="sldImg" idx="2"/>
@@ -1298,7 +1141,7 @@
             <a:spLocks noGrp="1"/>
           </p:cNvSpPr>
           <p:nvPr>
-            <p:ph type="body" idx="3" sz="quarter"/>
+            <p:ph type="body" sz="quarter" idx="3"/>
           </p:nvPr>
         </p:nvSpPr>
         <p:spPr/>
@@ -1307,7 +1150,7 @@
           <a:lstStyle/>
           <a:p>
             <a:r>
-              <a:t>Be upfront about methodology and its limits. Numbers will vary by machine, so I record them by script rather than by hand.</a:t>
+              <a:t>Read the table honestly: WASM wins everywhere, but the margin ranges widely. Against JavaScript on image blur the gain is modest; against the server, where upload and download count, the gain is largest.</a:t>
             </a:r>
           </a:p>
         </p:txBody>
@@ -1319,7 +1162,7 @@
             <a:spLocks noGrp="1"/>
           </p:cNvSpPr>
           <p:nvPr>
-            <p:ph type="sldNum" idx="5" sz="quarter"/>
+            <p:ph type="sldNum" sz="quarter" idx="5"/>
           </p:nvPr>
         </p:nvSpPr>
         <p:spPr/>
@@ -1333,7 +1176,7 @@
 </file>
 
 <file path=ppt/notesSlides/notesSlide6.xml><?xml version="1.0" encoding="utf-8"?>
-<p:notes xmlns:a="http://schemas.openxmlformats.org/drawingml/2006/main" xmlns:p="http://schemas.openxmlformats.org/presentationml/2006/main" xmlns:r="http://schemas.openxmlformats.org/officeDocument/2006/relationships">
+<p:notes xmlns:a="http://schemas.openxmlformats.org/drawingml/2006/main" xmlns:r="http://schemas.openxmlformats.org/officeDocument/2006/relationships" xmlns:p="http://schemas.openxmlformats.org/presentationml/2006/main">
   <p:cSld>
     <p:spTree>
       <p:nvGrpSpPr>
@@ -1353,7 +1196,7 @@
         <p:nvSpPr>
           <p:cNvPr id="2" name="Slide Image Placeholder 1"/>
           <p:cNvSpPr>
-            <a:spLocks noGrp="1"/>
+            <a:spLocks noGrp="1" noRot="1" noChangeAspect="1"/>
           </p:cNvSpPr>
           <p:nvPr>
             <p:ph type="sldImg" idx="2"/>
@@ -1368,7 +1211,7 @@
             <a:spLocks noGrp="1"/>
           </p:cNvSpPr>
           <p:nvPr>
-            <p:ph type="body" idx="3" sz="quarter"/>
+            <p:ph type="body" sz="quarter" idx="3"/>
           </p:nvPr>
         </p:nvSpPr>
         <p:spPr/>
@@ -1377,7 +1220,7 @@
           <a:lstStyle/>
           <a:p>
             <a:r>
-              <a:t>Read the table honestly: WASM wins everywhere, but the margin ranges widely. Against JavaScript on image blur the gain is modest; against the server, where upload and download count, the gain is largest.</a:t>
+              <a:t>The honest story: WASM is faster in every scenario, but the biggest wins come from removing the network, not just from the faster compute.</a:t>
             </a:r>
           </a:p>
         </p:txBody>
@@ -1389,7 +1232,7 @@
             <a:spLocks noGrp="1"/>
           </p:cNvSpPr>
           <p:nvPr>
-            <p:ph type="sldNum" idx="5" sz="quarter"/>
+            <p:ph type="sldNum" sz="quarter" idx="5"/>
           </p:nvPr>
         </p:nvSpPr>
         <p:spPr/>
@@ -1403,7 +1246,7 @@
 </file>
 
 <file path=ppt/notesSlides/notesSlide7.xml><?xml version="1.0" encoding="utf-8"?>
-<p:notes xmlns:a="http://schemas.openxmlformats.org/drawingml/2006/main" xmlns:p="http://schemas.openxmlformats.org/presentationml/2006/main" xmlns:r="http://schemas.openxmlformats.org/officeDocument/2006/relationships">
+<p:notes xmlns:a="http://schemas.openxmlformats.org/drawingml/2006/main" xmlns:r="http://schemas.openxmlformats.org/officeDocument/2006/relationships" xmlns:p="http://schemas.openxmlformats.org/presentationml/2006/main">
   <p:cSld>
     <p:spTree>
       <p:nvGrpSpPr>
@@ -1423,7 +1266,7 @@
         <p:nvSpPr>
           <p:cNvPr id="2" name="Slide Image Placeholder 1"/>
           <p:cNvSpPr>
-            <a:spLocks noGrp="1"/>
+            <a:spLocks noGrp="1" noRot="1" noChangeAspect="1"/>
           </p:cNvSpPr>
           <p:nvPr>
             <p:ph type="sldImg" idx="2"/>
@@ -1438,7 +1281,7 @@
             <a:spLocks noGrp="1"/>
           </p:cNvSpPr>
           <p:nvPr>
-            <p:ph type="body" idx="3" sz="quarter"/>
+            <p:ph type="body" sz="quarter" idx="3"/>
           </p:nvPr>
         </p:nvSpPr>
         <p:spPr/>
@@ -1447,7 +1290,7 @@
           <a:lstStyle/>
           <a:p>
             <a:r>
-              <a:t>The honest story: WASM is faster in every scenario, but the biggest wins come from removing the network, not just from the faster compute.</a:t>
+              <a:t>Walk through the screen: left panel is the traditional approach, right panel is Rust/WASM. The banner states the speed-up and the match check proves the answers are identical.</a:t>
             </a:r>
           </a:p>
         </p:txBody>
@@ -1459,7 +1302,7 @@
             <a:spLocks noGrp="1"/>
           </p:cNvSpPr>
           <p:nvPr>
-            <p:ph type="sldNum" idx="5" sz="quarter"/>
+            <p:ph type="sldNum" sz="quarter" idx="5"/>
           </p:nvPr>
         </p:nvSpPr>
         <p:spPr/>
@@ -1473,7 +1316,7 @@
 </file>
 
 <file path=ppt/notesSlides/notesSlide8.xml><?xml version="1.0" encoding="utf-8"?>
-<p:notes xmlns:a="http://schemas.openxmlformats.org/drawingml/2006/main" xmlns:p="http://schemas.openxmlformats.org/presentationml/2006/main" xmlns:r="http://schemas.openxmlformats.org/officeDocument/2006/relationships">
+<p:notes xmlns:a="http://schemas.openxmlformats.org/drawingml/2006/main" xmlns:r="http://schemas.openxmlformats.org/officeDocument/2006/relationships" xmlns:p="http://schemas.openxmlformats.org/presentationml/2006/main">
   <p:cSld>
     <p:spTree>
       <p:nvGrpSpPr>
@@ -1493,7 +1336,7 @@
         <p:nvSpPr>
           <p:cNvPr id="2" name="Slide Image Placeholder 1"/>
           <p:cNvSpPr>
-            <a:spLocks noGrp="1"/>
+            <a:spLocks noGrp="1" noRot="1" noChangeAspect="1"/>
           </p:cNvSpPr>
           <p:nvPr>
             <p:ph type="sldImg" idx="2"/>
@@ -1508,7 +1351,7 @@
             <a:spLocks noGrp="1"/>
           </p:cNvSpPr>
           <p:nvPr>
-            <p:ph type="body" idx="3" sz="quarter"/>
+            <p:ph type="body" sz="quarter" idx="3"/>
           </p:nvPr>
         </p:nvSpPr>
         <p:spPr/>
@@ -1517,7 +1360,7 @@
           <a:lstStyle/>
           <a:p>
             <a:r>
-              <a:t>Walk through the screen: left panel is the traditional approach, right panel is Rust/WASM. The banner states the speed-up and the match check proves the answers are identical.</a:t>
+              <a:t>Play the recorded demo. It was captured by a script so the run is repeatable.</a:t>
             </a:r>
           </a:p>
         </p:txBody>
@@ -1529,7 +1372,7 @@
             <a:spLocks noGrp="1"/>
           </p:cNvSpPr>
           <p:nvPr>
-            <p:ph type="sldNum" idx="5" sz="quarter"/>
+            <p:ph type="sldNum" sz="quarter" idx="5"/>
           </p:nvPr>
         </p:nvSpPr>
         <p:spPr/>
@@ -1543,7 +1386,7 @@
 </file>
 
 <file path=ppt/notesSlides/notesSlide9.xml><?xml version="1.0" encoding="utf-8"?>
-<p:notes xmlns:a="http://schemas.openxmlformats.org/drawingml/2006/main" xmlns:p="http://schemas.openxmlformats.org/presentationml/2006/main" xmlns:r="http://schemas.openxmlformats.org/officeDocument/2006/relationships">
+<p:notes xmlns:a="http://schemas.openxmlformats.org/drawingml/2006/main" xmlns:r="http://schemas.openxmlformats.org/officeDocument/2006/relationships" xmlns:p="http://schemas.openxmlformats.org/presentationml/2006/main">
   <p:cSld>
     <p:spTree>
       <p:nvGrpSpPr>
@@ -1563,7 +1406,7 @@
         <p:nvSpPr>
           <p:cNvPr id="2" name="Slide Image Placeholder 1"/>
           <p:cNvSpPr>
-            <a:spLocks noGrp="1"/>
+            <a:spLocks noGrp="1" noRot="1" noChangeAspect="1"/>
           </p:cNvSpPr>
           <p:nvPr>
             <p:ph type="sldImg" idx="2"/>
@@ -1578,7 +1421,7 @@
             <a:spLocks noGrp="1"/>
           </p:cNvSpPr>
           <p:nvPr>
-            <p:ph type="body" idx="3" sz="quarter"/>
+            <p:ph type="body" sz="quarter" idx="3"/>
           </p:nvPr>
         </p:nvSpPr>
         <p:spPr/>
@@ -1587,7 +1430,7 @@
           <a:lstStyle/>
           <a:p>
             <a:r>
-              <a:t>Play the recorded demo. It was captured by a script so the run is repeatable.</a:t>
+              <a:t>Lead with the advantages that are measurable (speed) and architectural (privacy, cost, offline).</a:t>
             </a:r>
           </a:p>
         </p:txBody>
@@ -1599,7 +1442,7 @@
             <a:spLocks noGrp="1"/>
           </p:cNvSpPr>
           <p:nvPr>
-            <p:ph type="sldNum" idx="5" sz="quarter"/>
+            <p:ph type="sldNum" sz="quarter" idx="5"/>
           </p:nvPr>
         </p:nvSpPr>
         <p:spPr/>
@@ -1650,10 +1493,9 @@
           <a:lstStyle/>
           <a:p>
             <a:r>
-              <a:rPr lang="en-US" smtClean="0"/>
+              <a:rPr lang="en-US"/>
               <a:t>Click to edit Master title style</a:t>
             </a:r>
-            <a:endParaRPr lang="en-US"/>
           </a:p>
         </p:txBody>
       </p:sp>
@@ -1769,10 +1611,9 @@
           </a:lstStyle>
           <a:p>
             <a:r>
-              <a:rPr lang="en-US" smtClean="0"/>
+              <a:rPr lang="en-US"/>
               <a:t>Click to edit Master subtitle style</a:t>
             </a:r>
-            <a:endParaRPr lang="en-US"/>
           </a:p>
         </p:txBody>
       </p:sp>
@@ -1793,7 +1634,7 @@
           <a:p>
             <a:fld id="{5BCAD085-E8A6-8845-BD4E-CB4CCA059FC4}" type="datetimeFigureOut">
               <a:rPr lang="en-US" smtClean="0"/>
-              <a:t>1/27/13</a:t>
+              <a:t>10/13/2026</a:t>
             </a:fld>
             <a:endParaRPr lang="en-US"/>
           </a:p>
@@ -1887,10 +1728,9 @@
           <a:lstStyle/>
           <a:p>
             <a:r>
-              <a:rPr lang="en-US" smtClean="0"/>
+              <a:rPr lang="en-US"/>
               <a:t>Click to edit Master title style</a:t>
             </a:r>
-            <a:endParaRPr lang="en-US"/>
           </a:p>
         </p:txBody>
       </p:sp>
@@ -1911,38 +1751,37 @@
           <a:p>
             <a:pPr lvl="0"/>
             <a:r>
-              <a:rPr lang="en-US" smtClean="0"/>
+              <a:rPr lang="en-US"/>
               <a:t>Click to edit Master text styles</a:t>
             </a:r>
           </a:p>
           <a:p>
             <a:pPr lvl="1"/>
             <a:r>
-              <a:rPr lang="en-US" smtClean="0"/>
+              <a:rPr lang="en-US"/>
               <a:t>Second level</a:t>
             </a:r>
           </a:p>
           <a:p>
             <a:pPr lvl="2"/>
             <a:r>
-              <a:rPr lang="en-US" smtClean="0"/>
+              <a:rPr lang="en-US"/>
               <a:t>Third level</a:t>
             </a:r>
           </a:p>
           <a:p>
             <a:pPr lvl="3"/>
             <a:r>
-              <a:rPr lang="en-US" smtClean="0"/>
+              <a:rPr lang="en-US"/>
               <a:t>Fourth level</a:t>
             </a:r>
           </a:p>
           <a:p>
             <a:pPr lvl="4"/>
             <a:r>
-              <a:rPr lang="en-US" smtClean="0"/>
+              <a:rPr lang="en-US"/>
               <a:t>Fifth level</a:t>
             </a:r>
-            <a:endParaRPr lang="en-US"/>
           </a:p>
         </p:txBody>
       </p:sp>
@@ -1963,7 +1802,7 @@
           <a:p>
             <a:fld id="{5BCAD085-E8A6-8845-BD4E-CB4CCA059FC4}" type="datetimeFigureOut">
               <a:rPr lang="en-US" smtClean="0"/>
-              <a:t>1/27/13</a:t>
+              <a:t>10/13/2026</a:t>
             </a:fld>
             <a:endParaRPr lang="en-US"/>
           </a:p>
@@ -2062,10 +1901,9 @@
           <a:lstStyle/>
           <a:p>
             <a:r>
-              <a:rPr lang="en-US" smtClean="0"/>
+              <a:rPr lang="en-US"/>
               <a:t>Click to edit Master title style</a:t>
             </a:r>
-            <a:endParaRPr lang="en-US"/>
           </a:p>
         </p:txBody>
       </p:sp>
@@ -2091,38 +1929,37 @@
           <a:p>
             <a:pPr lvl="0"/>
             <a:r>
-              <a:rPr lang="en-US" smtClean="0"/>
+              <a:rPr lang="en-US"/>
               <a:t>Click to edit Master text styles</a:t>
             </a:r>
           </a:p>
           <a:p>
             <a:pPr lvl="1"/>
             <a:r>
-              <a:rPr lang="en-US" smtClean="0"/>
+              <a:rPr lang="en-US"/>
               <a:t>Second level</a:t>
             </a:r>
           </a:p>
           <a:p>
             <a:pPr lvl="2"/>
             <a:r>
-              <a:rPr lang="en-US" smtClean="0"/>
+              <a:rPr lang="en-US"/>
               <a:t>Third level</a:t>
             </a:r>
           </a:p>
           <a:p>
             <a:pPr lvl="3"/>
             <a:r>
-              <a:rPr lang="en-US" smtClean="0"/>
+              <a:rPr lang="en-US"/>
               <a:t>Fourth level</a:t>
             </a:r>
           </a:p>
           <a:p>
             <a:pPr lvl="4"/>
             <a:r>
-              <a:rPr lang="en-US" smtClean="0"/>
+              <a:rPr lang="en-US"/>
               <a:t>Fifth level</a:t>
             </a:r>
-            <a:endParaRPr lang="en-US"/>
           </a:p>
         </p:txBody>
       </p:sp>
@@ -2143,7 +1980,7 @@
           <a:p>
             <a:fld id="{5BCAD085-E8A6-8845-BD4E-CB4CCA059FC4}" type="datetimeFigureOut">
               <a:rPr lang="en-US" smtClean="0"/>
-              <a:t>1/27/13</a:t>
+              <a:t>10/13/2026</a:t>
             </a:fld>
             <a:endParaRPr lang="en-US"/>
           </a:p>
@@ -2237,10 +2074,9 @@
           <a:lstStyle/>
           <a:p>
             <a:r>
-              <a:rPr lang="en-US" smtClean="0"/>
+              <a:rPr lang="en-US"/>
               <a:t>Click to edit Master title style</a:t>
             </a:r>
-            <a:endParaRPr lang="en-US"/>
           </a:p>
         </p:txBody>
       </p:sp>
@@ -2261,38 +2097,37 @@
           <a:p>
             <a:pPr lvl="0"/>
             <a:r>
-              <a:rPr lang="en-US" smtClean="0"/>
+              <a:rPr lang="en-US"/>
               <a:t>Click to edit Master text styles</a:t>
             </a:r>
           </a:p>
           <a:p>
             <a:pPr lvl="1"/>
             <a:r>
-              <a:rPr lang="en-US" smtClean="0"/>
+              <a:rPr lang="en-US"/>
               <a:t>Second level</a:t>
             </a:r>
           </a:p>
           <a:p>
             <a:pPr lvl="2"/>
             <a:r>
-              <a:rPr lang="en-US" smtClean="0"/>
+              <a:rPr lang="en-US"/>
               <a:t>Third level</a:t>
             </a:r>
           </a:p>
           <a:p>
             <a:pPr lvl="3"/>
             <a:r>
-              <a:rPr lang="en-US" smtClean="0"/>
+              <a:rPr lang="en-US"/>
               <a:t>Fourth level</a:t>
             </a:r>
           </a:p>
           <a:p>
             <a:pPr lvl="4"/>
             <a:r>
-              <a:rPr lang="en-US" smtClean="0"/>
+              <a:rPr lang="en-US"/>
               <a:t>Fifth level</a:t>
             </a:r>
-            <a:endParaRPr lang="en-US"/>
           </a:p>
         </p:txBody>
       </p:sp>
@@ -2313,7 +2148,7 @@
           <a:p>
             <a:fld id="{5BCAD085-E8A6-8845-BD4E-CB4CCA059FC4}" type="datetimeFigureOut">
               <a:rPr lang="en-US" smtClean="0"/>
-              <a:t>1/27/13</a:t>
+              <a:t>10/13/2026</a:t>
             </a:fld>
             <a:endParaRPr lang="en-US"/>
           </a:p>
@@ -2416,10 +2251,9 @@
           </a:lstStyle>
           <a:p>
             <a:r>
-              <a:rPr lang="en-US" smtClean="0"/>
+              <a:rPr lang="en-US"/>
               <a:t>Click to edit Master title style</a:t>
             </a:r>
-            <a:endParaRPr lang="en-US"/>
           </a:p>
         </p:txBody>
       </p:sp>
@@ -2536,7 +2370,7 @@
           <a:p>
             <a:pPr lvl="0"/>
             <a:r>
-              <a:rPr lang="en-US" smtClean="0"/>
+              <a:rPr lang="en-US"/>
               <a:t>Click to edit Master text styles</a:t>
             </a:r>
           </a:p>
@@ -2559,7 +2393,7 @@
           <a:p>
             <a:fld id="{5BCAD085-E8A6-8845-BD4E-CB4CCA059FC4}" type="datetimeFigureOut">
               <a:rPr lang="en-US" smtClean="0"/>
-              <a:t>1/27/13</a:t>
+              <a:t>10/13/2026</a:t>
             </a:fld>
             <a:endParaRPr lang="en-US"/>
           </a:p>
@@ -2653,10 +2487,9 @@
           <a:lstStyle/>
           <a:p>
             <a:r>
-              <a:rPr lang="en-US" smtClean="0"/>
+              <a:rPr lang="en-US"/>
               <a:t>Click to edit Master title style</a:t>
             </a:r>
-            <a:endParaRPr lang="en-US"/>
           </a:p>
         </p:txBody>
       </p:sp>
@@ -2710,38 +2543,37 @@
           <a:p>
             <a:pPr lvl="0"/>
             <a:r>
-              <a:rPr lang="en-US" smtClean="0"/>
+              <a:rPr lang="en-US"/>
               <a:t>Click to edit Master text styles</a:t>
             </a:r>
           </a:p>
           <a:p>
             <a:pPr lvl="1"/>
             <a:r>
-              <a:rPr lang="en-US" smtClean="0"/>
+              <a:rPr lang="en-US"/>
               <a:t>Second level</a:t>
             </a:r>
           </a:p>
           <a:p>
             <a:pPr lvl="2"/>
             <a:r>
-              <a:rPr lang="en-US" smtClean="0"/>
+              <a:rPr lang="en-US"/>
               <a:t>Third level</a:t>
             </a:r>
           </a:p>
           <a:p>
             <a:pPr lvl="3"/>
             <a:r>
-              <a:rPr lang="en-US" smtClean="0"/>
+              <a:rPr lang="en-US"/>
               <a:t>Fourth level</a:t>
             </a:r>
           </a:p>
           <a:p>
             <a:pPr lvl="4"/>
             <a:r>
-              <a:rPr lang="en-US" smtClean="0"/>
+              <a:rPr lang="en-US"/>
               <a:t>Fifth level</a:t>
             </a:r>
-            <a:endParaRPr lang="en-US"/>
           </a:p>
         </p:txBody>
       </p:sp>
@@ -2795,38 +2627,37 @@
           <a:p>
             <a:pPr lvl="0"/>
             <a:r>
-              <a:rPr lang="en-US" smtClean="0"/>
+              <a:rPr lang="en-US"/>
               <a:t>Click to edit Master text styles</a:t>
             </a:r>
           </a:p>
           <a:p>
             <a:pPr lvl="1"/>
             <a:r>
-              <a:rPr lang="en-US" smtClean="0"/>
+              <a:rPr lang="en-US"/>
               <a:t>Second level</a:t>
             </a:r>
           </a:p>
           <a:p>
             <a:pPr lvl="2"/>
             <a:r>
-              <a:rPr lang="en-US" smtClean="0"/>
+              <a:rPr lang="en-US"/>
               <a:t>Third level</a:t>
             </a:r>
           </a:p>
           <a:p>
             <a:pPr lvl="3"/>
             <a:r>
-              <a:rPr lang="en-US" smtClean="0"/>
+              <a:rPr lang="en-US"/>
               <a:t>Fourth level</a:t>
             </a:r>
           </a:p>
           <a:p>
             <a:pPr lvl="4"/>
             <a:r>
-              <a:rPr lang="en-US" smtClean="0"/>
+              <a:rPr lang="en-US"/>
               <a:t>Fifth level</a:t>
             </a:r>
-            <a:endParaRPr lang="en-US"/>
           </a:p>
         </p:txBody>
       </p:sp>
@@ -2847,7 +2678,7 @@
           <a:p>
             <a:fld id="{5BCAD085-E8A6-8845-BD4E-CB4CCA059FC4}" type="datetimeFigureOut">
               <a:rPr lang="en-US" smtClean="0"/>
-              <a:t>1/27/13</a:t>
+              <a:t>10/13/2026</a:t>
             </a:fld>
             <a:endParaRPr lang="en-US"/>
           </a:p>
@@ -2945,10 +2776,9 @@
           </a:lstStyle>
           <a:p>
             <a:r>
-              <a:rPr lang="en-US" smtClean="0"/>
+              <a:rPr lang="en-US"/>
               <a:t>Click to edit Master title style</a:t>
             </a:r>
-            <a:endParaRPr lang="en-US"/>
           </a:p>
         </p:txBody>
       </p:sp>
@@ -3011,7 +2841,7 @@
           <a:p>
             <a:pPr lvl="0"/>
             <a:r>
-              <a:rPr lang="en-US" smtClean="0"/>
+              <a:rPr lang="en-US"/>
               <a:t>Click to edit Master text styles</a:t>
             </a:r>
           </a:p>
@@ -3067,38 +2897,37 @@
           <a:p>
             <a:pPr lvl="0"/>
             <a:r>
-              <a:rPr lang="en-US" smtClean="0"/>
+              <a:rPr lang="en-US"/>
               <a:t>Click to edit Master text styles</a:t>
             </a:r>
           </a:p>
           <a:p>
             <a:pPr lvl="1"/>
             <a:r>
-              <a:rPr lang="en-US" smtClean="0"/>
+              <a:rPr lang="en-US"/>
               <a:t>Second level</a:t>
             </a:r>
           </a:p>
           <a:p>
             <a:pPr lvl="2"/>
             <a:r>
-              <a:rPr lang="en-US" smtClean="0"/>
+              <a:rPr lang="en-US"/>
               <a:t>Third level</a:t>
             </a:r>
           </a:p>
           <a:p>
             <a:pPr lvl="3"/>
             <a:r>
-              <a:rPr lang="en-US" smtClean="0"/>
+              <a:rPr lang="en-US"/>
               <a:t>Fourth level</a:t>
             </a:r>
           </a:p>
           <a:p>
             <a:pPr lvl="4"/>
             <a:r>
-              <a:rPr lang="en-US" smtClean="0"/>
+              <a:rPr lang="en-US"/>
               <a:t>Fifth level</a:t>
             </a:r>
-            <a:endParaRPr lang="en-US"/>
           </a:p>
         </p:txBody>
       </p:sp>
@@ -3161,7 +2990,7 @@
           <a:p>
             <a:pPr lvl="0"/>
             <a:r>
-              <a:rPr lang="en-US" smtClean="0"/>
+              <a:rPr lang="en-US"/>
               <a:t>Click to edit Master text styles</a:t>
             </a:r>
           </a:p>
@@ -3217,38 +3046,37 @@
           <a:p>
             <a:pPr lvl="0"/>
             <a:r>
-              <a:rPr lang="en-US" smtClean="0"/>
+              <a:rPr lang="en-US"/>
               <a:t>Click to edit Master text styles</a:t>
             </a:r>
           </a:p>
           <a:p>
             <a:pPr lvl="1"/>
             <a:r>
-              <a:rPr lang="en-US" smtClean="0"/>
+              <a:rPr lang="en-US"/>
               <a:t>Second level</a:t>
             </a:r>
           </a:p>
           <a:p>
             <a:pPr lvl="2"/>
             <a:r>
-              <a:rPr lang="en-US" smtClean="0"/>
+              <a:rPr lang="en-US"/>
               <a:t>Third level</a:t>
             </a:r>
           </a:p>
           <a:p>
             <a:pPr lvl="3"/>
             <a:r>
-              <a:rPr lang="en-US" smtClean="0"/>
+              <a:rPr lang="en-US"/>
               <a:t>Fourth level</a:t>
             </a:r>
           </a:p>
           <a:p>
             <a:pPr lvl="4"/>
             <a:r>
-              <a:rPr lang="en-US" smtClean="0"/>
+              <a:rPr lang="en-US"/>
               <a:t>Fifth level</a:t>
             </a:r>
-            <a:endParaRPr lang="en-US"/>
           </a:p>
         </p:txBody>
       </p:sp>
@@ -3269,7 +3097,7 @@
           <a:p>
             <a:fld id="{5BCAD085-E8A6-8845-BD4E-CB4CCA059FC4}" type="datetimeFigureOut">
               <a:rPr lang="en-US" smtClean="0"/>
-              <a:t>1/27/13</a:t>
+              <a:t>10/13/2026</a:t>
             </a:fld>
             <a:endParaRPr lang="en-US"/>
           </a:p>
@@ -3363,10 +3191,9 @@
           <a:lstStyle/>
           <a:p>
             <a:r>
-              <a:rPr lang="en-US" smtClean="0"/>
+              <a:rPr lang="en-US"/>
               <a:t>Click to edit Master title style</a:t>
             </a:r>
-            <a:endParaRPr lang="en-US"/>
           </a:p>
         </p:txBody>
       </p:sp>
@@ -3387,7 +3214,7 @@
           <a:p>
             <a:fld id="{5BCAD085-E8A6-8845-BD4E-CB4CCA059FC4}" type="datetimeFigureOut">
               <a:rPr lang="en-US" smtClean="0"/>
-              <a:t>1/27/13</a:t>
+              <a:t>10/13/2026</a:t>
             </a:fld>
             <a:endParaRPr lang="en-US"/>
           </a:p>
@@ -3482,7 +3309,7 @@
           <a:p>
             <a:fld id="{5BCAD085-E8A6-8845-BD4E-CB4CCA059FC4}" type="datetimeFigureOut">
               <a:rPr lang="en-US" smtClean="0"/>
-              <a:t>1/27/13</a:t>
+              <a:t>10/13/2026</a:t>
             </a:fld>
             <a:endParaRPr lang="en-US"/>
           </a:p>
@@ -3585,10 +3412,9 @@
           </a:lstStyle>
           <a:p>
             <a:r>
-              <a:rPr lang="en-US" smtClean="0"/>
+              <a:rPr lang="en-US"/>
               <a:t>Click to edit Master title style</a:t>
             </a:r>
-            <a:endParaRPr lang="en-US"/>
           </a:p>
         </p:txBody>
       </p:sp>
@@ -3642,38 +3468,37 @@
           <a:p>
             <a:pPr lvl="0"/>
             <a:r>
-              <a:rPr lang="en-US" smtClean="0"/>
+              <a:rPr lang="en-US"/>
               <a:t>Click to edit Master text styles</a:t>
             </a:r>
           </a:p>
           <a:p>
             <a:pPr lvl="1"/>
             <a:r>
-              <a:rPr lang="en-US" smtClean="0"/>
+              <a:rPr lang="en-US"/>
               <a:t>Second level</a:t>
             </a:r>
           </a:p>
           <a:p>
             <a:pPr lvl="2"/>
             <a:r>
-              <a:rPr lang="en-US" smtClean="0"/>
+              <a:rPr lang="en-US"/>
               <a:t>Third level</a:t>
             </a:r>
           </a:p>
           <a:p>
             <a:pPr lvl="3"/>
             <a:r>
-              <a:rPr lang="en-US" smtClean="0"/>
+              <a:rPr lang="en-US"/>
               <a:t>Fourth level</a:t>
             </a:r>
           </a:p>
           <a:p>
             <a:pPr lvl="4"/>
             <a:r>
-              <a:rPr lang="en-US" smtClean="0"/>
+              <a:rPr lang="en-US"/>
               <a:t>Fifth level</a:t>
             </a:r>
-            <a:endParaRPr lang="en-US"/>
           </a:p>
         </p:txBody>
       </p:sp>
@@ -3736,7 +3561,7 @@
           <a:p>
             <a:pPr lvl="0"/>
             <a:r>
-              <a:rPr lang="en-US" smtClean="0"/>
+              <a:rPr lang="en-US"/>
               <a:t>Click to edit Master text styles</a:t>
             </a:r>
           </a:p>
@@ -3759,7 +3584,7 @@
           <a:p>
             <a:fld id="{5BCAD085-E8A6-8845-BD4E-CB4CCA059FC4}" type="datetimeFigureOut">
               <a:rPr lang="en-US" smtClean="0"/>
-              <a:t>1/27/13</a:t>
+              <a:t>10/13/2026</a:t>
             </a:fld>
             <a:endParaRPr lang="en-US"/>
           </a:p>
@@ -3862,10 +3687,9 @@
           </a:lstStyle>
           <a:p>
             <a:r>
-              <a:rPr lang="en-US" smtClean="0"/>
+              <a:rPr lang="en-US"/>
               <a:t>Click to edit Master title style</a:t>
             </a:r>
-            <a:endParaRPr lang="en-US"/>
           </a:p>
         </p:txBody>
       </p:sp>
@@ -3989,7 +3813,7 @@
           <a:p>
             <a:pPr lvl="0"/>
             <a:r>
-              <a:rPr lang="en-US" smtClean="0"/>
+              <a:rPr lang="en-US"/>
               <a:t>Click to edit Master text styles</a:t>
             </a:r>
           </a:p>
@@ -4012,7 +3836,7 @@
           <a:p>
             <a:fld id="{5BCAD085-E8A6-8845-BD4E-CB4CCA059FC4}" type="datetimeFigureOut">
               <a:rPr lang="en-US" smtClean="0"/>
-              <a:t>1/27/13</a:t>
+              <a:t>10/13/2026</a:t>
             </a:fld>
             <a:endParaRPr lang="en-US"/>
           </a:p>
@@ -4121,10 +3945,9 @@
           <a:lstStyle/>
           <a:p>
             <a:r>
-              <a:rPr lang="en-US" smtClean="0"/>
+              <a:rPr lang="en-US"/>
               <a:t>Click to edit Master title style</a:t>
             </a:r>
-            <a:endParaRPr lang="en-US"/>
           </a:p>
         </p:txBody>
       </p:sp>
@@ -4155,38 +3978,37 @@
           <a:p>
             <a:pPr lvl="0"/>
             <a:r>
-              <a:rPr lang="en-US" smtClean="0"/>
+              <a:rPr lang="en-US"/>
               <a:t>Click to edit Master text styles</a:t>
             </a:r>
           </a:p>
           <a:p>
             <a:pPr lvl="1"/>
             <a:r>
-              <a:rPr lang="en-US" smtClean="0"/>
+              <a:rPr lang="en-US"/>
               <a:t>Second level</a:t>
             </a:r>
           </a:p>
           <a:p>
             <a:pPr lvl="2"/>
             <a:r>
-              <a:rPr lang="en-US" smtClean="0"/>
+              <a:rPr lang="en-US"/>
               <a:t>Third level</a:t>
             </a:r>
           </a:p>
           <a:p>
             <a:pPr lvl="3"/>
             <a:r>
-              <a:rPr lang="en-US" smtClean="0"/>
+              <a:rPr lang="en-US"/>
               <a:t>Fourth level</a:t>
             </a:r>
           </a:p>
           <a:p>
             <a:pPr lvl="4"/>
             <a:r>
-              <a:rPr lang="en-US" smtClean="0"/>
+              <a:rPr lang="en-US"/>
               <a:t>Fifth level</a:t>
             </a:r>
-            <a:endParaRPr lang="en-US"/>
           </a:p>
         </p:txBody>
       </p:sp>
@@ -4225,7 +4047,7 @@
           <a:p>
             <a:fld id="{5BCAD085-E8A6-8845-BD4E-CB4CCA059FC4}" type="datetimeFigureOut">
               <a:rPr lang="en-US" smtClean="0"/>
-              <a:t>1/27/13</a:t>
+              <a:t>10/13/2026</a:t>
             </a:fld>
             <a:endParaRPr lang="en-US"/>
           </a:p>
@@ -4584,7 +4406,7 @@
 </file>
 
 <file path=ppt/slides/slide1.xml><?xml version="1.0" encoding="utf-8"?>
-<p:sld xmlns:a="http://schemas.openxmlformats.org/drawingml/2006/main" xmlns:p="http://schemas.openxmlformats.org/presentationml/2006/main" xmlns:r="http://schemas.openxmlformats.org/officeDocument/2006/relationships">
+<p:sld xmlns:a="http://schemas.openxmlformats.org/drawingml/2006/main" xmlns:r="http://schemas.openxmlformats.org/officeDocument/2006/relationships" xmlns:p="http://schemas.openxmlformats.org/presentationml/2006/main">
   <p:cSld>
     <p:bg>
       <p:bgPr>
@@ -4600,7 +4422,14 @@
         <p:cNvGrpSpPr/>
         <p:nvPr/>
       </p:nvGrpSpPr>
-      <p:grpSpPr/>
+      <p:grpSpPr>
+        <a:xfrm>
+          <a:off x="0" y="0"/>
+          <a:ext cx="0" cy="0"/>
+          <a:chOff x="0" y="0"/>
+          <a:chExt cx="0" cy="0"/>
+        </a:xfrm>
+      </p:grpSpPr>
       <p:sp>
         <p:nvSpPr>
           <p:cNvPr id="2" name="Rectangle 1"/>
@@ -4642,6 +4471,7 @@
           <a:lstStyle/>
           <a:p>
             <a:pPr algn="ctr"/>
+            <a:endParaRPr/>
           </a:p>
         </p:txBody>
       </p:sp>
@@ -4662,7 +4492,7 @@
           <a:noFill/>
         </p:spPr>
         <p:txBody>
-          <a:bodyPr wrap="square" anchor="t" lIns="45720" rIns="45720">
+          <a:bodyPr wrap="square" lIns="45720" rIns="45720" anchor="t">
             <a:spAutoFit/>
           </a:bodyPr>
           <a:lstStyle/>
@@ -4701,7 +4531,7 @@
           <a:noFill/>
         </p:spPr>
         <p:txBody>
-          <a:bodyPr wrap="square" anchor="t" lIns="45720" rIns="45720">
+          <a:bodyPr wrap="square" lIns="45720" rIns="45720" anchor="t">
             <a:spAutoFit/>
           </a:bodyPr>
           <a:lstStyle/>
@@ -4740,7 +4570,7 @@
           <a:noFill/>
         </p:spPr>
         <p:txBody>
-          <a:bodyPr wrap="square" anchor="t" lIns="45720" rIns="45720">
+          <a:bodyPr wrap="square" lIns="45720" rIns="45720" anchor="t">
             <a:spAutoFit/>
           </a:bodyPr>
           <a:lstStyle/>
@@ -4803,6 +4633,7 @@
           <a:lstStyle/>
           <a:p>
             <a:pPr algn="ctr"/>
+            <a:endParaRPr/>
           </a:p>
         </p:txBody>
       </p:sp>
@@ -4823,7 +4654,7 @@
           <a:noFill/>
         </p:spPr>
         <p:txBody>
-          <a:bodyPr wrap="square" anchor="t" lIns="45720" rIns="45720">
+          <a:bodyPr wrap="square" lIns="45720" rIns="45720" anchor="t">
             <a:spAutoFit/>
           </a:bodyPr>
           <a:lstStyle/>
@@ -4854,7 +4685,7 @@
 </file>
 
 <file path=ppt/slides/slide10.xml><?xml version="1.0" encoding="utf-8"?>
-<p:sld xmlns:a="http://schemas.openxmlformats.org/drawingml/2006/main" xmlns:p="http://schemas.openxmlformats.org/presentationml/2006/main" xmlns:r="http://schemas.openxmlformats.org/officeDocument/2006/relationships">
+<p:sld xmlns:a="http://schemas.openxmlformats.org/drawingml/2006/main" xmlns:r="http://schemas.openxmlformats.org/officeDocument/2006/relationships" xmlns:p="http://schemas.openxmlformats.org/presentationml/2006/main">
   <p:cSld>
     <p:bg>
       <p:bgPr>
@@ -4870,7 +4701,14 @@
         <p:cNvGrpSpPr/>
         <p:nvPr/>
       </p:nvGrpSpPr>
-      <p:grpSpPr/>
+      <p:grpSpPr>
+        <a:xfrm>
+          <a:off x="0" y="0"/>
+          <a:ext cx="0" cy="0"/>
+          <a:chOff x="0" y="0"/>
+          <a:chExt cx="0" cy="0"/>
+        </a:xfrm>
+      </p:grpSpPr>
       <p:sp>
         <p:nvSpPr>
           <p:cNvPr id="2" name="Rectangle 1"/>
@@ -4912,6 +4750,7 @@
           <a:lstStyle/>
           <a:p>
             <a:pPr algn="ctr"/>
+            <a:endParaRPr/>
           </a:p>
         </p:txBody>
       </p:sp>
@@ -4956,6 +4795,7 @@
           <a:lstStyle/>
           <a:p>
             <a:pPr algn="ctr"/>
+            <a:endParaRPr/>
           </a:p>
         </p:txBody>
       </p:sp>
@@ -4976,7 +4816,7 @@
           <a:noFill/>
         </p:spPr>
         <p:txBody>
-          <a:bodyPr wrap="square" anchor="ctr" lIns="45720" rIns="45720">
+          <a:bodyPr wrap="square" lIns="45720" rIns="45720" anchor="ctr">
             <a:spAutoFit/>
           </a:bodyPr>
           <a:lstStyle/>
@@ -5015,7 +4855,7 @@
           <a:noFill/>
         </p:spPr>
         <p:txBody>
-          <a:bodyPr wrap="square" anchor="t" lIns="45720" rIns="45720">
+          <a:bodyPr wrap="square" lIns="45720" rIns="45720" anchor="t">
             <a:spAutoFit/>
           </a:bodyPr>
           <a:lstStyle/>
@@ -5046,7 +4886,7 @@
         <p:spPr>
           <a:xfrm>
             <a:off x="548640" y="6446520"/>
-            <a:ext cx="7315200" cy="274320"/>
+            <a:ext cx="7315200" cy="261610"/>
           </a:xfrm>
           <a:prstGeom prst="rect">
             <a:avLst/>
@@ -5054,7 +4894,7 @@
           <a:noFill/>
         </p:spPr>
         <p:txBody>
-          <a:bodyPr wrap="square" anchor="t" lIns="45720" rIns="45720">
+          <a:bodyPr wrap="square" lIns="45720" rIns="45720" anchor="t">
             <a:spAutoFit/>
           </a:bodyPr>
           <a:lstStyle/>
@@ -5065,13 +4905,31 @@
               </a:spcAft>
             </a:pPr>
             <a:r>
-              <a:rPr sz="1100" b="0">
+              <a:rPr sz="1100" b="0" dirty="0">
                 <a:solidFill>
                   <a:srgbClr val="64748B"/>
                 </a:solidFill>
                 <a:latin typeface="Segoe UI"/>
               </a:rPr>
-              <a:t>Rust → WebAssembly  |  Annual new-technology KPI 2026</a:t>
+              <a:t>Rust → </a:t>
+            </a:r>
+            <a:r>
+              <a:rPr sz="1100" b="0" dirty="0" err="1">
+                <a:solidFill>
+                  <a:srgbClr val="64748B"/>
+                </a:solidFill>
+                <a:latin typeface="Segoe UI"/>
+              </a:rPr>
+              <a:t>WebAssembly</a:t>
+            </a:r>
+            <a:r>
+              <a:rPr sz="1100" b="0" dirty="0">
+                <a:solidFill>
+                  <a:srgbClr val="64748B"/>
+                </a:solidFill>
+                <a:latin typeface="Segoe UI"/>
+              </a:rPr>
+              <a:t> </a:t>
             </a:r>
           </a:p>
         </p:txBody>
@@ -5093,7 +4951,7 @@
           <a:noFill/>
         </p:spPr>
         <p:txBody>
-          <a:bodyPr wrap="square" anchor="t" lIns="45720" rIns="45720">
+          <a:bodyPr wrap="square" lIns="45720" rIns="45720" anchor="t">
             <a:spAutoFit/>
           </a:bodyPr>
           <a:lstStyle/>
@@ -5156,6 +5014,7 @@
           <a:lstStyle/>
           <a:p>
             <a:pPr algn="ctr"/>
+            <a:endParaRPr/>
           </a:p>
         </p:txBody>
       </p:sp>
@@ -5200,6 +5059,7 @@
           <a:lstStyle/>
           <a:p>
             <a:pPr algn="ctr"/>
+            <a:endParaRPr/>
           </a:p>
         </p:txBody>
       </p:sp>
@@ -5220,7 +5080,7 @@
           <a:noFill/>
         </p:spPr>
         <p:txBody>
-          <a:bodyPr wrap="square" anchor="t" lIns="45720" rIns="45720">
+          <a:bodyPr wrap="square" lIns="45720" rIns="45720" anchor="t">
             <a:spAutoFit/>
           </a:bodyPr>
           <a:lstStyle/>
@@ -5259,7 +5119,7 @@
           <a:noFill/>
         </p:spPr>
         <p:txBody>
-          <a:bodyPr wrap="square" anchor="t" lIns="45720" rIns="45720">
+          <a:bodyPr wrap="square" lIns="45720" rIns="45720" anchor="t">
             <a:spAutoFit/>
           </a:bodyPr>
           <a:lstStyle/>
@@ -5322,6 +5182,7 @@
           <a:lstStyle/>
           <a:p>
             <a:pPr algn="ctr"/>
+            <a:endParaRPr/>
           </a:p>
         </p:txBody>
       </p:sp>
@@ -5366,6 +5227,7 @@
           <a:lstStyle/>
           <a:p>
             <a:pPr algn="ctr"/>
+            <a:endParaRPr/>
           </a:p>
         </p:txBody>
       </p:sp>
@@ -5386,7 +5248,7 @@
           <a:noFill/>
         </p:spPr>
         <p:txBody>
-          <a:bodyPr wrap="square" anchor="t" lIns="45720" rIns="45720">
+          <a:bodyPr wrap="square" lIns="45720" rIns="45720" anchor="t">
             <a:spAutoFit/>
           </a:bodyPr>
           <a:lstStyle/>
@@ -5425,7 +5287,7 @@
           <a:noFill/>
         </p:spPr>
         <p:txBody>
-          <a:bodyPr wrap="square" anchor="t" lIns="45720" rIns="45720">
+          <a:bodyPr wrap="square" lIns="45720" rIns="45720" anchor="t">
             <a:spAutoFit/>
           </a:bodyPr>
           <a:lstStyle/>
@@ -5488,6 +5350,7 @@
           <a:lstStyle/>
           <a:p>
             <a:pPr algn="ctr"/>
+            <a:endParaRPr/>
           </a:p>
         </p:txBody>
       </p:sp>
@@ -5532,6 +5395,7 @@
           <a:lstStyle/>
           <a:p>
             <a:pPr algn="ctr"/>
+            <a:endParaRPr/>
           </a:p>
         </p:txBody>
       </p:sp>
@@ -5552,7 +5416,7 @@
           <a:noFill/>
         </p:spPr>
         <p:txBody>
-          <a:bodyPr wrap="square" anchor="t" lIns="45720" rIns="45720">
+          <a:bodyPr wrap="square" lIns="45720" rIns="45720" anchor="t">
             <a:spAutoFit/>
           </a:bodyPr>
           <a:lstStyle/>
@@ -5591,7 +5455,7 @@
           <a:noFill/>
         </p:spPr>
         <p:txBody>
-          <a:bodyPr wrap="square" anchor="t" lIns="45720" rIns="45720">
+          <a:bodyPr wrap="square" lIns="45720" rIns="45720" anchor="t">
             <a:spAutoFit/>
           </a:bodyPr>
           <a:lstStyle/>
@@ -5654,6 +5518,7 @@
           <a:lstStyle/>
           <a:p>
             <a:pPr algn="ctr"/>
+            <a:endParaRPr/>
           </a:p>
         </p:txBody>
       </p:sp>
@@ -5698,6 +5563,7 @@
           <a:lstStyle/>
           <a:p>
             <a:pPr algn="ctr"/>
+            <a:endParaRPr/>
           </a:p>
         </p:txBody>
       </p:sp>
@@ -5718,7 +5584,7 @@
           <a:noFill/>
         </p:spPr>
         <p:txBody>
-          <a:bodyPr wrap="square" anchor="t" lIns="45720" rIns="45720">
+          <a:bodyPr wrap="square" lIns="45720" rIns="45720" anchor="t">
             <a:spAutoFit/>
           </a:bodyPr>
           <a:lstStyle/>
@@ -5757,7 +5623,7 @@
           <a:noFill/>
         </p:spPr>
         <p:txBody>
-          <a:bodyPr wrap="square" anchor="t" lIns="45720" rIns="45720">
+          <a:bodyPr wrap="square" lIns="45720" rIns="45720" anchor="t">
             <a:spAutoFit/>
           </a:bodyPr>
           <a:lstStyle/>
@@ -5820,6 +5686,7 @@
           <a:lstStyle/>
           <a:p>
             <a:pPr algn="ctr"/>
+            <a:endParaRPr/>
           </a:p>
         </p:txBody>
       </p:sp>
@@ -5864,6 +5731,7 @@
           <a:lstStyle/>
           <a:p>
             <a:pPr algn="ctr"/>
+            <a:endParaRPr/>
           </a:p>
         </p:txBody>
       </p:sp>
@@ -5884,7 +5752,7 @@
           <a:noFill/>
         </p:spPr>
         <p:txBody>
-          <a:bodyPr wrap="square" anchor="t" lIns="45720" rIns="45720">
+          <a:bodyPr wrap="square" lIns="45720" rIns="45720" anchor="t">
             <a:spAutoFit/>
           </a:bodyPr>
           <a:lstStyle/>
@@ -5923,7 +5791,7 @@
           <a:noFill/>
         </p:spPr>
         <p:txBody>
-          <a:bodyPr wrap="square" anchor="t" lIns="45720" rIns="45720">
+          <a:bodyPr wrap="square" lIns="45720" rIns="45720" anchor="t">
             <a:spAutoFit/>
           </a:bodyPr>
           <a:lstStyle/>
@@ -5986,6 +5854,7 @@
           <a:lstStyle/>
           <a:p>
             <a:pPr algn="ctr"/>
+            <a:endParaRPr/>
           </a:p>
         </p:txBody>
       </p:sp>
@@ -6030,6 +5899,7 @@
           <a:lstStyle/>
           <a:p>
             <a:pPr algn="ctr"/>
+            <a:endParaRPr/>
           </a:p>
         </p:txBody>
       </p:sp>
@@ -6050,7 +5920,7 @@
           <a:noFill/>
         </p:spPr>
         <p:txBody>
-          <a:bodyPr wrap="square" anchor="t" lIns="45720" rIns="45720">
+          <a:bodyPr wrap="square" lIns="45720" rIns="45720" anchor="t">
             <a:spAutoFit/>
           </a:bodyPr>
           <a:lstStyle/>
@@ -6089,7 +5959,7 @@
           <a:noFill/>
         </p:spPr>
         <p:txBody>
-          <a:bodyPr wrap="square" anchor="t" lIns="45720" rIns="45720">
+          <a:bodyPr wrap="square" lIns="45720" rIns="45720" anchor="t">
             <a:spAutoFit/>
           </a:bodyPr>
           <a:lstStyle/>
@@ -6120,7 +5990,7 @@
 </file>
 
 <file path=ppt/slides/slide11.xml><?xml version="1.0" encoding="utf-8"?>
-<p:sld xmlns:a="http://schemas.openxmlformats.org/drawingml/2006/main" xmlns:p="http://schemas.openxmlformats.org/presentationml/2006/main" xmlns:r="http://schemas.openxmlformats.org/officeDocument/2006/relationships">
+<p:sld xmlns:a="http://schemas.openxmlformats.org/drawingml/2006/main" xmlns:r="http://schemas.openxmlformats.org/officeDocument/2006/relationships" xmlns:p="http://schemas.openxmlformats.org/presentationml/2006/main">
   <p:cSld>
     <p:bg>
       <p:bgPr>
@@ -6136,7 +6006,14 @@
         <p:cNvGrpSpPr/>
         <p:nvPr/>
       </p:nvGrpSpPr>
-      <p:grpSpPr/>
+      <p:grpSpPr>
+        <a:xfrm>
+          <a:off x="0" y="0"/>
+          <a:ext cx="0" cy="0"/>
+          <a:chOff x="0" y="0"/>
+          <a:chExt cx="0" cy="0"/>
+        </a:xfrm>
+      </p:grpSpPr>
       <p:sp>
         <p:nvSpPr>
           <p:cNvPr id="2" name="Rectangle 1"/>
@@ -6178,6 +6055,7 @@
           <a:lstStyle/>
           <a:p>
             <a:pPr algn="ctr"/>
+            <a:endParaRPr/>
           </a:p>
         </p:txBody>
       </p:sp>
@@ -6222,6 +6100,7 @@
           <a:lstStyle/>
           <a:p>
             <a:pPr algn="ctr"/>
+            <a:endParaRPr/>
           </a:p>
         </p:txBody>
       </p:sp>
@@ -6242,7 +6121,7 @@
           <a:noFill/>
         </p:spPr>
         <p:txBody>
-          <a:bodyPr wrap="square" anchor="ctr" lIns="45720" rIns="45720">
+          <a:bodyPr wrap="square" lIns="45720" rIns="45720" anchor="ctr">
             <a:spAutoFit/>
           </a:bodyPr>
           <a:lstStyle/>
@@ -6281,7 +6160,7 @@
           <a:noFill/>
         </p:spPr>
         <p:txBody>
-          <a:bodyPr wrap="square" anchor="t" lIns="45720" rIns="45720">
+          <a:bodyPr wrap="square" lIns="45720" rIns="45720" anchor="t">
             <a:spAutoFit/>
           </a:bodyPr>
           <a:lstStyle/>
@@ -6312,7 +6191,7 @@
         <p:spPr>
           <a:xfrm>
             <a:off x="548640" y="6446520"/>
-            <a:ext cx="7315200" cy="274320"/>
+            <a:ext cx="7315200" cy="261610"/>
           </a:xfrm>
           <a:prstGeom prst="rect">
             <a:avLst/>
@@ -6320,7 +6199,7 @@
           <a:noFill/>
         </p:spPr>
         <p:txBody>
-          <a:bodyPr wrap="square" anchor="t" lIns="45720" rIns="45720">
+          <a:bodyPr wrap="square" lIns="45720" rIns="45720" anchor="t">
             <a:spAutoFit/>
           </a:bodyPr>
           <a:lstStyle/>
@@ -6331,13 +6210,31 @@
               </a:spcAft>
             </a:pPr>
             <a:r>
-              <a:rPr sz="1100" b="0">
+              <a:rPr sz="1100" b="0" dirty="0">
                 <a:solidFill>
                   <a:srgbClr val="64748B"/>
                 </a:solidFill>
                 <a:latin typeface="Segoe UI"/>
               </a:rPr>
-              <a:t>Rust → WebAssembly  |  Annual new-technology KPI 2026</a:t>
+              <a:t>Rust → </a:t>
+            </a:r>
+            <a:r>
+              <a:rPr sz="1100" b="0" dirty="0" err="1">
+                <a:solidFill>
+                  <a:srgbClr val="64748B"/>
+                </a:solidFill>
+                <a:latin typeface="Segoe UI"/>
+              </a:rPr>
+              <a:t>WebAssembly</a:t>
+            </a:r>
+            <a:r>
+              <a:rPr sz="1100" b="0" dirty="0">
+                <a:solidFill>
+                  <a:srgbClr val="64748B"/>
+                </a:solidFill>
+                <a:latin typeface="Segoe UI"/>
+              </a:rPr>
+              <a:t> </a:t>
             </a:r>
           </a:p>
         </p:txBody>
@@ -6359,7 +6256,7 @@
           <a:noFill/>
         </p:spPr>
         <p:txBody>
-          <a:bodyPr wrap="square" anchor="t" lIns="45720" rIns="45720">
+          <a:bodyPr wrap="square" lIns="45720" rIns="45720" anchor="t">
             <a:spAutoFit/>
           </a:bodyPr>
           <a:lstStyle/>
@@ -6422,6 +6319,7 @@
           <a:lstStyle/>
           <a:p>
             <a:pPr algn="ctr"/>
+            <a:endParaRPr/>
           </a:p>
         </p:txBody>
       </p:sp>
@@ -6466,6 +6364,7 @@
           <a:lstStyle/>
           <a:p>
             <a:pPr algn="ctr"/>
+            <a:endParaRPr/>
           </a:p>
         </p:txBody>
       </p:sp>
@@ -6486,7 +6385,7 @@
           <a:noFill/>
         </p:spPr>
         <p:txBody>
-          <a:bodyPr wrap="square" anchor="t" lIns="45720" rIns="45720">
+          <a:bodyPr wrap="square" lIns="45720" rIns="45720" anchor="t">
             <a:spAutoFit/>
           </a:bodyPr>
           <a:lstStyle/>
@@ -6525,7 +6424,7 @@
           <a:noFill/>
         </p:spPr>
         <p:txBody>
-          <a:bodyPr wrap="square" anchor="t" lIns="45720" rIns="45720">
+          <a:bodyPr wrap="square" lIns="45720" rIns="45720" anchor="t">
             <a:spAutoFit/>
           </a:bodyPr>
           <a:lstStyle/>
@@ -6588,6 +6487,7 @@
           <a:lstStyle/>
           <a:p>
             <a:pPr algn="ctr"/>
+            <a:endParaRPr/>
           </a:p>
         </p:txBody>
       </p:sp>
@@ -6632,6 +6532,7 @@
           <a:lstStyle/>
           <a:p>
             <a:pPr algn="ctr"/>
+            <a:endParaRPr/>
           </a:p>
         </p:txBody>
       </p:sp>
@@ -6652,7 +6553,7 @@
           <a:noFill/>
         </p:spPr>
         <p:txBody>
-          <a:bodyPr wrap="square" anchor="t" lIns="45720" rIns="45720">
+          <a:bodyPr wrap="square" lIns="45720" rIns="45720" anchor="t">
             <a:spAutoFit/>
           </a:bodyPr>
           <a:lstStyle/>
@@ -6691,7 +6592,7 @@
           <a:noFill/>
         </p:spPr>
         <p:txBody>
-          <a:bodyPr wrap="square" anchor="t" lIns="45720" rIns="45720">
+          <a:bodyPr wrap="square" lIns="45720" rIns="45720" anchor="t">
             <a:spAutoFit/>
           </a:bodyPr>
           <a:lstStyle/>
@@ -6754,6 +6655,7 @@
           <a:lstStyle/>
           <a:p>
             <a:pPr algn="ctr"/>
+            <a:endParaRPr/>
           </a:p>
         </p:txBody>
       </p:sp>
@@ -6798,6 +6700,7 @@
           <a:lstStyle/>
           <a:p>
             <a:pPr algn="ctr"/>
+            <a:endParaRPr/>
           </a:p>
         </p:txBody>
       </p:sp>
@@ -6818,7 +6721,7 @@
           <a:noFill/>
         </p:spPr>
         <p:txBody>
-          <a:bodyPr wrap="square" anchor="t" lIns="45720" rIns="45720">
+          <a:bodyPr wrap="square" lIns="45720" rIns="45720" anchor="t">
             <a:spAutoFit/>
           </a:bodyPr>
           <a:lstStyle/>
@@ -6857,7 +6760,7 @@
           <a:noFill/>
         </p:spPr>
         <p:txBody>
-          <a:bodyPr wrap="square" anchor="t" lIns="45720" rIns="45720">
+          <a:bodyPr wrap="square" lIns="45720" rIns="45720" anchor="t">
             <a:spAutoFit/>
           </a:bodyPr>
           <a:lstStyle/>
@@ -6920,6 +6823,7 @@
           <a:lstStyle/>
           <a:p>
             <a:pPr algn="ctr"/>
+            <a:endParaRPr/>
           </a:p>
         </p:txBody>
       </p:sp>
@@ -6964,6 +6868,7 @@
           <a:lstStyle/>
           <a:p>
             <a:pPr algn="ctr"/>
+            <a:endParaRPr/>
           </a:p>
         </p:txBody>
       </p:sp>
@@ -6984,7 +6889,7 @@
           <a:noFill/>
         </p:spPr>
         <p:txBody>
-          <a:bodyPr wrap="square" anchor="t" lIns="45720" rIns="45720">
+          <a:bodyPr wrap="square" lIns="45720" rIns="45720" anchor="t">
             <a:spAutoFit/>
           </a:bodyPr>
           <a:lstStyle/>
@@ -7023,7 +6928,7 @@
           <a:noFill/>
         </p:spPr>
         <p:txBody>
-          <a:bodyPr wrap="square" anchor="t" lIns="45720" rIns="45720">
+          <a:bodyPr wrap="square" lIns="45720" rIns="45720" anchor="t">
             <a:spAutoFit/>
           </a:bodyPr>
           <a:lstStyle/>
@@ -7086,6 +6991,7 @@
           <a:lstStyle/>
           <a:p>
             <a:pPr algn="ctr"/>
+            <a:endParaRPr/>
           </a:p>
         </p:txBody>
       </p:sp>
@@ -7130,6 +7036,7 @@
           <a:lstStyle/>
           <a:p>
             <a:pPr algn="ctr"/>
+            <a:endParaRPr/>
           </a:p>
         </p:txBody>
       </p:sp>
@@ -7150,7 +7057,7 @@
           <a:noFill/>
         </p:spPr>
         <p:txBody>
-          <a:bodyPr wrap="square" anchor="t" lIns="45720" rIns="45720">
+          <a:bodyPr wrap="square" lIns="45720" rIns="45720" anchor="t">
             <a:spAutoFit/>
           </a:bodyPr>
           <a:lstStyle/>
@@ -7189,7 +7096,7 @@
           <a:noFill/>
         </p:spPr>
         <p:txBody>
-          <a:bodyPr wrap="square" anchor="t" lIns="45720" rIns="45720">
+          <a:bodyPr wrap="square" lIns="45720" rIns="45720" anchor="t">
             <a:spAutoFit/>
           </a:bodyPr>
           <a:lstStyle/>
@@ -7252,6 +7159,7 @@
           <a:lstStyle/>
           <a:p>
             <a:pPr algn="ctr"/>
+            <a:endParaRPr/>
           </a:p>
         </p:txBody>
       </p:sp>
@@ -7296,6 +7204,7 @@
           <a:lstStyle/>
           <a:p>
             <a:pPr algn="ctr"/>
+            <a:endParaRPr/>
           </a:p>
         </p:txBody>
       </p:sp>
@@ -7316,7 +7225,7 @@
           <a:noFill/>
         </p:spPr>
         <p:txBody>
-          <a:bodyPr wrap="square" anchor="t" lIns="45720" rIns="45720">
+          <a:bodyPr wrap="square" lIns="45720" rIns="45720" anchor="t">
             <a:spAutoFit/>
           </a:bodyPr>
           <a:lstStyle/>
@@ -7355,7 +7264,7 @@
           <a:noFill/>
         </p:spPr>
         <p:txBody>
-          <a:bodyPr wrap="square" anchor="t" lIns="45720" rIns="45720">
+          <a:bodyPr wrap="square" lIns="45720" rIns="45720" anchor="t">
             <a:spAutoFit/>
           </a:bodyPr>
           <a:lstStyle/>
@@ -7386,7 +7295,7 @@
 </file>
 
 <file path=ppt/slides/slide12.xml><?xml version="1.0" encoding="utf-8"?>
-<p:sld xmlns:a="http://schemas.openxmlformats.org/drawingml/2006/main" xmlns:p="http://schemas.openxmlformats.org/presentationml/2006/main" xmlns:r="http://schemas.openxmlformats.org/officeDocument/2006/relationships">
+<p:sld xmlns:a="http://schemas.openxmlformats.org/drawingml/2006/main" xmlns:r="http://schemas.openxmlformats.org/officeDocument/2006/relationships" xmlns:p="http://schemas.openxmlformats.org/presentationml/2006/main">
   <p:cSld>
     <p:bg>
       <p:bgPr>
@@ -7402,7 +7311,14 @@
         <p:cNvGrpSpPr/>
         <p:nvPr/>
       </p:nvGrpSpPr>
-      <p:grpSpPr/>
+      <p:grpSpPr>
+        <a:xfrm>
+          <a:off x="0" y="0"/>
+          <a:ext cx="0" cy="0"/>
+          <a:chOff x="0" y="0"/>
+          <a:chExt cx="0" cy="0"/>
+        </a:xfrm>
+      </p:grpSpPr>
       <p:sp>
         <p:nvSpPr>
           <p:cNvPr id="2" name="Rectangle 1"/>
@@ -7444,6 +7360,7 @@
           <a:lstStyle/>
           <a:p>
             <a:pPr algn="ctr"/>
+            <a:endParaRPr/>
           </a:p>
         </p:txBody>
       </p:sp>
@@ -7488,6 +7405,7 @@
           <a:lstStyle/>
           <a:p>
             <a:pPr algn="ctr"/>
+            <a:endParaRPr/>
           </a:p>
         </p:txBody>
       </p:sp>
@@ -7508,7 +7426,7 @@
           <a:noFill/>
         </p:spPr>
         <p:txBody>
-          <a:bodyPr wrap="square" anchor="ctr" lIns="45720" rIns="45720">
+          <a:bodyPr wrap="square" lIns="45720" rIns="45720" anchor="ctr">
             <a:spAutoFit/>
           </a:bodyPr>
           <a:lstStyle/>
@@ -7547,7 +7465,7 @@
           <a:noFill/>
         </p:spPr>
         <p:txBody>
-          <a:bodyPr wrap="square" anchor="t" lIns="45720" rIns="45720">
+          <a:bodyPr wrap="square" lIns="45720" rIns="45720" anchor="t">
             <a:spAutoFit/>
           </a:bodyPr>
           <a:lstStyle/>
@@ -7578,7 +7496,7 @@
         <p:spPr>
           <a:xfrm>
             <a:off x="548640" y="6446520"/>
-            <a:ext cx="7315200" cy="274320"/>
+            <a:ext cx="7315200" cy="261610"/>
           </a:xfrm>
           <a:prstGeom prst="rect">
             <a:avLst/>
@@ -7586,7 +7504,7 @@
           <a:noFill/>
         </p:spPr>
         <p:txBody>
-          <a:bodyPr wrap="square" anchor="t" lIns="45720" rIns="45720">
+          <a:bodyPr wrap="square" lIns="45720" rIns="45720" anchor="t">
             <a:spAutoFit/>
           </a:bodyPr>
           <a:lstStyle/>
@@ -7597,13 +7515,31 @@
               </a:spcAft>
             </a:pPr>
             <a:r>
-              <a:rPr sz="1100" b="0">
+              <a:rPr sz="1100" b="0" dirty="0">
                 <a:solidFill>
                   <a:srgbClr val="64748B"/>
                 </a:solidFill>
                 <a:latin typeface="Segoe UI"/>
               </a:rPr>
-              <a:t>Rust → WebAssembly  |  Annual new-technology KPI 2026</a:t>
+              <a:t>Rust → </a:t>
+            </a:r>
+            <a:r>
+              <a:rPr sz="1100" b="0" dirty="0" err="1">
+                <a:solidFill>
+                  <a:srgbClr val="64748B"/>
+                </a:solidFill>
+                <a:latin typeface="Segoe UI"/>
+              </a:rPr>
+              <a:t>WebAssembly</a:t>
+            </a:r>
+            <a:r>
+              <a:rPr sz="1100" b="0" dirty="0">
+                <a:solidFill>
+                  <a:srgbClr val="64748B"/>
+                </a:solidFill>
+                <a:latin typeface="Segoe UI"/>
+              </a:rPr>
+              <a:t> </a:t>
             </a:r>
           </a:p>
         </p:txBody>
@@ -7625,7 +7561,7 @@
           <a:noFill/>
         </p:spPr>
         <p:txBody>
-          <a:bodyPr wrap="square" anchor="t" lIns="45720" rIns="45720">
+          <a:bodyPr wrap="square" lIns="45720" rIns="45720" anchor="t">
             <a:spAutoFit/>
           </a:bodyPr>
           <a:lstStyle/>
@@ -7688,6 +7624,7 @@
           <a:lstStyle/>
           <a:p>
             <a:pPr algn="ctr"/>
+            <a:endParaRPr/>
           </a:p>
         </p:txBody>
       </p:sp>
@@ -7732,6 +7669,7 @@
           <a:lstStyle/>
           <a:p>
             <a:pPr algn="ctr"/>
+            <a:endParaRPr/>
           </a:p>
         </p:txBody>
       </p:sp>
@@ -7752,7 +7690,7 @@
           <a:noFill/>
         </p:spPr>
         <p:txBody>
-          <a:bodyPr wrap="square" anchor="t" lIns="45720" rIns="45720">
+          <a:bodyPr wrap="square" lIns="45720" rIns="45720" anchor="t">
             <a:spAutoFit/>
           </a:bodyPr>
           <a:lstStyle/>
@@ -7938,6 +7876,7 @@
           <a:lstStyle/>
           <a:p>
             <a:pPr algn="ctr"/>
+            <a:endParaRPr/>
           </a:p>
         </p:txBody>
       </p:sp>
@@ -7982,6 +7921,7 @@
           <a:lstStyle/>
           <a:p>
             <a:pPr algn="ctr"/>
+            <a:endParaRPr/>
           </a:p>
         </p:txBody>
       </p:sp>
@@ -8002,7 +7942,7 @@
           <a:noFill/>
         </p:spPr>
         <p:txBody>
-          <a:bodyPr wrap="square" anchor="t" lIns="45720" rIns="45720">
+          <a:bodyPr wrap="square" lIns="45720" rIns="45720" anchor="t">
             <a:spAutoFit/>
           </a:bodyPr>
           <a:lstStyle/>
@@ -8156,7 +8096,7 @@
 </file>
 
 <file path=ppt/slides/slide13.xml><?xml version="1.0" encoding="utf-8"?>
-<p:sld xmlns:a="http://schemas.openxmlformats.org/drawingml/2006/main" xmlns:p="http://schemas.openxmlformats.org/presentationml/2006/main" xmlns:r="http://schemas.openxmlformats.org/officeDocument/2006/relationships">
+<p:sld xmlns:a="http://schemas.openxmlformats.org/drawingml/2006/main" xmlns:r="http://schemas.openxmlformats.org/officeDocument/2006/relationships" xmlns:p="http://schemas.openxmlformats.org/presentationml/2006/main">
   <p:cSld>
     <p:bg>
       <p:bgPr>
@@ -8172,7 +8112,14 @@
         <p:cNvGrpSpPr/>
         <p:nvPr/>
       </p:nvGrpSpPr>
-      <p:grpSpPr/>
+      <p:grpSpPr>
+        <a:xfrm>
+          <a:off x="0" y="0"/>
+          <a:ext cx="0" cy="0"/>
+          <a:chOff x="0" y="0"/>
+          <a:chExt cx="0" cy="0"/>
+        </a:xfrm>
+      </p:grpSpPr>
       <p:sp>
         <p:nvSpPr>
           <p:cNvPr id="2" name="Rectangle 1"/>
@@ -8214,6 +8161,7 @@
           <a:lstStyle/>
           <a:p>
             <a:pPr algn="ctr"/>
+            <a:endParaRPr/>
           </a:p>
         </p:txBody>
       </p:sp>
@@ -8258,6 +8206,7 @@
           <a:lstStyle/>
           <a:p>
             <a:pPr algn="ctr"/>
+            <a:endParaRPr/>
           </a:p>
         </p:txBody>
       </p:sp>
@@ -8278,7 +8227,7 @@
           <a:noFill/>
         </p:spPr>
         <p:txBody>
-          <a:bodyPr wrap="square" anchor="ctr" lIns="45720" rIns="45720">
+          <a:bodyPr wrap="square" lIns="45720" rIns="45720" anchor="ctr">
             <a:spAutoFit/>
           </a:bodyPr>
           <a:lstStyle/>
@@ -8317,7 +8266,7 @@
           <a:noFill/>
         </p:spPr>
         <p:txBody>
-          <a:bodyPr wrap="square" anchor="t" lIns="45720" rIns="45720">
+          <a:bodyPr wrap="square" lIns="45720" rIns="45720" anchor="t">
             <a:spAutoFit/>
           </a:bodyPr>
           <a:lstStyle/>
@@ -8348,7 +8297,7 @@
         <p:spPr>
           <a:xfrm>
             <a:off x="548640" y="6446520"/>
-            <a:ext cx="7315200" cy="274320"/>
+            <a:ext cx="7315200" cy="261610"/>
           </a:xfrm>
           <a:prstGeom prst="rect">
             <a:avLst/>
@@ -8356,7 +8305,7 @@
           <a:noFill/>
         </p:spPr>
         <p:txBody>
-          <a:bodyPr wrap="square" anchor="t" lIns="45720" rIns="45720">
+          <a:bodyPr wrap="square" lIns="45720" rIns="45720" anchor="t">
             <a:spAutoFit/>
           </a:bodyPr>
           <a:lstStyle/>
@@ -8367,13 +8316,31 @@
               </a:spcAft>
             </a:pPr>
             <a:r>
-              <a:rPr sz="1100" b="0">
+              <a:rPr sz="1100" b="0" dirty="0">
                 <a:solidFill>
                   <a:srgbClr val="64748B"/>
                 </a:solidFill>
                 <a:latin typeface="Segoe UI"/>
               </a:rPr>
-              <a:t>Rust → WebAssembly  |  Annual new-technology KPI 2026</a:t>
+              <a:t>Rust → </a:t>
+            </a:r>
+            <a:r>
+              <a:rPr sz="1100" b="0" dirty="0" err="1">
+                <a:solidFill>
+                  <a:srgbClr val="64748B"/>
+                </a:solidFill>
+                <a:latin typeface="Segoe UI"/>
+              </a:rPr>
+              <a:t>WebAssembly</a:t>
+            </a:r>
+            <a:r>
+              <a:rPr sz="1100" b="0" dirty="0">
+                <a:solidFill>
+                  <a:srgbClr val="64748B"/>
+                </a:solidFill>
+                <a:latin typeface="Segoe UI"/>
+              </a:rPr>
+              <a:t> </a:t>
             </a:r>
           </a:p>
         </p:txBody>
@@ -8395,7 +8362,7 @@
           <a:noFill/>
         </p:spPr>
         <p:txBody>
-          <a:bodyPr wrap="square" anchor="t" lIns="45720" rIns="45720">
+          <a:bodyPr wrap="square" lIns="45720" rIns="45720" anchor="t">
             <a:spAutoFit/>
           </a:bodyPr>
           <a:lstStyle/>
@@ -8458,6 +8425,7 @@
           <a:lstStyle/>
           <a:p>
             <a:pPr algn="ctr"/>
+            <a:endParaRPr/>
           </a:p>
         </p:txBody>
       </p:sp>
@@ -8502,6 +8470,7 @@
           <a:lstStyle/>
           <a:p>
             <a:pPr algn="ctr"/>
+            <a:endParaRPr/>
           </a:p>
         </p:txBody>
       </p:sp>
@@ -8522,7 +8491,7 @@
           <a:noFill/>
         </p:spPr>
         <p:txBody>
-          <a:bodyPr wrap="square" anchor="t" lIns="45720" rIns="45720">
+          <a:bodyPr wrap="square" lIns="45720" rIns="45720" anchor="t">
             <a:spAutoFit/>
           </a:bodyPr>
           <a:lstStyle/>
@@ -8561,7 +8530,7 @@
           <a:noFill/>
         </p:spPr>
         <p:txBody>
-          <a:bodyPr wrap="square" anchor="t" lIns="45720" rIns="45720">
+          <a:bodyPr wrap="square" lIns="45720" rIns="45720" anchor="t">
             <a:spAutoFit/>
           </a:bodyPr>
           <a:lstStyle/>
@@ -8624,6 +8593,7 @@
           <a:lstStyle/>
           <a:p>
             <a:pPr algn="ctr"/>
+            <a:endParaRPr/>
           </a:p>
         </p:txBody>
       </p:sp>
@@ -8668,6 +8638,7 @@
           <a:lstStyle/>
           <a:p>
             <a:pPr algn="ctr"/>
+            <a:endParaRPr/>
           </a:p>
         </p:txBody>
       </p:sp>
@@ -8688,7 +8659,7 @@
           <a:noFill/>
         </p:spPr>
         <p:txBody>
-          <a:bodyPr wrap="square" anchor="t" lIns="45720" rIns="45720">
+          <a:bodyPr wrap="square" lIns="45720" rIns="45720" anchor="t">
             <a:spAutoFit/>
           </a:bodyPr>
           <a:lstStyle/>
@@ -8727,7 +8698,7 @@
           <a:noFill/>
         </p:spPr>
         <p:txBody>
-          <a:bodyPr wrap="square" anchor="t" lIns="45720" rIns="45720">
+          <a:bodyPr wrap="square" lIns="45720" rIns="45720" anchor="t">
             <a:spAutoFit/>
           </a:bodyPr>
           <a:lstStyle/>
@@ -8790,6 +8761,7 @@
           <a:lstStyle/>
           <a:p>
             <a:pPr algn="ctr"/>
+            <a:endParaRPr/>
           </a:p>
         </p:txBody>
       </p:sp>
@@ -8834,6 +8806,7 @@
           <a:lstStyle/>
           <a:p>
             <a:pPr algn="ctr"/>
+            <a:endParaRPr/>
           </a:p>
         </p:txBody>
       </p:sp>
@@ -8854,7 +8827,7 @@
           <a:noFill/>
         </p:spPr>
         <p:txBody>
-          <a:bodyPr wrap="square" anchor="t" lIns="45720" rIns="45720">
+          <a:bodyPr wrap="square" lIns="45720" rIns="45720" anchor="t">
             <a:spAutoFit/>
           </a:bodyPr>
           <a:lstStyle/>
@@ -8893,7 +8866,7 @@
           <a:noFill/>
         </p:spPr>
         <p:txBody>
-          <a:bodyPr wrap="square" anchor="t" lIns="45720" rIns="45720">
+          <a:bodyPr wrap="square" lIns="45720" rIns="45720" anchor="t">
             <a:spAutoFit/>
           </a:bodyPr>
           <a:lstStyle/>
@@ -8956,6 +8929,7 @@
           <a:lstStyle/>
           <a:p>
             <a:pPr algn="ctr"/>
+            <a:endParaRPr/>
           </a:p>
         </p:txBody>
       </p:sp>
@@ -9000,6 +8974,7 @@
           <a:lstStyle/>
           <a:p>
             <a:pPr algn="ctr"/>
+            <a:endParaRPr/>
           </a:p>
         </p:txBody>
       </p:sp>
@@ -9020,7 +8995,7 @@
           <a:noFill/>
         </p:spPr>
         <p:txBody>
-          <a:bodyPr wrap="square" anchor="t" lIns="45720" rIns="45720">
+          <a:bodyPr wrap="square" lIns="45720" rIns="45720" anchor="t">
             <a:spAutoFit/>
           </a:bodyPr>
           <a:lstStyle/>
@@ -9059,7 +9034,7 @@
           <a:noFill/>
         </p:spPr>
         <p:txBody>
-          <a:bodyPr wrap="square" anchor="t" lIns="45720" rIns="45720">
+          <a:bodyPr wrap="square" lIns="45720" rIns="45720" anchor="t">
             <a:spAutoFit/>
           </a:bodyPr>
           <a:lstStyle/>
@@ -9122,6 +9097,7 @@
           <a:lstStyle/>
           <a:p>
             <a:pPr algn="ctr"/>
+            <a:endParaRPr/>
           </a:p>
         </p:txBody>
       </p:sp>
@@ -9142,7 +9118,7 @@
           <a:noFill/>
         </p:spPr>
         <p:txBody>
-          <a:bodyPr wrap="square" anchor="ctr" lIns="45720" rIns="45720">
+          <a:bodyPr wrap="square" lIns="45720" rIns="45720" anchor="ctr">
             <a:spAutoFit/>
           </a:bodyPr>
           <a:lstStyle/>
@@ -9173,7 +9149,7 @@
 </file>
 
 <file path=ppt/slides/slide14.xml><?xml version="1.0" encoding="utf-8"?>
-<p:sld xmlns:a="http://schemas.openxmlformats.org/drawingml/2006/main" xmlns:p="http://schemas.openxmlformats.org/presentationml/2006/main" xmlns:r="http://schemas.openxmlformats.org/officeDocument/2006/relationships">
+<p:sld xmlns:a="http://schemas.openxmlformats.org/drawingml/2006/main" xmlns:r="http://schemas.openxmlformats.org/officeDocument/2006/relationships" xmlns:p="http://schemas.openxmlformats.org/presentationml/2006/main">
   <p:cSld>
     <p:bg>
       <p:bgPr>
@@ -9189,7 +9165,14 @@
         <p:cNvGrpSpPr/>
         <p:nvPr/>
       </p:nvGrpSpPr>
-      <p:grpSpPr/>
+      <p:grpSpPr>
+        <a:xfrm>
+          <a:off x="0" y="0"/>
+          <a:ext cx="0" cy="0"/>
+          <a:chOff x="0" y="0"/>
+          <a:chExt cx="0" cy="0"/>
+        </a:xfrm>
+      </p:grpSpPr>
       <p:sp>
         <p:nvSpPr>
           <p:cNvPr id="2" name="Rectangle 1"/>
@@ -9231,6 +9214,7 @@
           <a:lstStyle/>
           <a:p>
             <a:pPr algn="ctr"/>
+            <a:endParaRPr/>
           </a:p>
         </p:txBody>
       </p:sp>
@@ -9251,7 +9235,7 @@
           <a:noFill/>
         </p:spPr>
         <p:txBody>
-          <a:bodyPr wrap="square" anchor="t" lIns="45720" rIns="45720">
+          <a:bodyPr wrap="square" lIns="45720" rIns="45720" anchor="t">
             <a:spAutoFit/>
           </a:bodyPr>
           <a:lstStyle/>
@@ -9413,7 +9397,7 @@
           <a:noFill/>
         </p:spPr>
         <p:txBody>
-          <a:bodyPr wrap="square" anchor="t" lIns="45720" rIns="45720">
+          <a:bodyPr wrap="square" lIns="45720" rIns="45720" anchor="t">
             <a:spAutoFit/>
           </a:bodyPr>
           <a:lstStyle/>
@@ -9502,6 +9486,7 @@
           <a:lstStyle/>
           <a:p>
             <a:pPr algn="ctr"/>
+            <a:endParaRPr/>
           </a:p>
         </p:txBody>
       </p:sp>
@@ -9546,6 +9531,7 @@
           <a:lstStyle/>
           <a:p>
             <a:pPr algn="ctr"/>
+            <a:endParaRPr/>
           </a:p>
         </p:txBody>
       </p:sp>
@@ -9566,7 +9552,7 @@
           <a:noFill/>
         </p:spPr>
         <p:txBody>
-          <a:bodyPr wrap="square" anchor="ctr" lIns="45720" rIns="45720">
+          <a:bodyPr wrap="square" lIns="45720" rIns="45720" anchor="ctr">
             <a:spAutoFit/>
           </a:bodyPr>
           <a:lstStyle/>
@@ -9583,7 +9569,7 @@
                 </a:solidFill>
                 <a:latin typeface="Segoe UI"/>
               </a:rPr>
-              <a:t>The KPI and how this work answers it</a:t>
+              <a:t>The problem: why not just handle it the traditional way?</a:t>
             </a:r>
           </a:p>
         </p:txBody>
@@ -9605,7 +9591,7 @@
           <a:noFill/>
         </p:spPr>
         <p:txBody>
-          <a:bodyPr wrap="square" anchor="t" lIns="45720" rIns="45720">
+          <a:bodyPr wrap="square" lIns="45720" rIns="45720" anchor="t">
             <a:spAutoFit/>
           </a:bodyPr>
           <a:lstStyle/>
@@ -9622,7 +9608,7 @@
                 </a:solidFill>
                 <a:latin typeface="Segoe UI"/>
               </a:rPr>
-              <a:t>Continuously research and master a new technology each year</a:t>
+              <a:t>Context: heavy file and image work in web apps today, and where it hurts</a:t>
             </a:r>
           </a:p>
         </p:txBody>
@@ -9636,7 +9622,7 @@
         <p:spPr>
           <a:xfrm>
             <a:off x="548640" y="6446520"/>
-            <a:ext cx="7315200" cy="274320"/>
+            <a:ext cx="7315200" cy="261610"/>
           </a:xfrm>
           <a:prstGeom prst="rect">
             <a:avLst/>
@@ -9644,7 +9630,7 @@
           <a:noFill/>
         </p:spPr>
         <p:txBody>
-          <a:bodyPr wrap="square" anchor="t" lIns="45720" rIns="45720">
+          <a:bodyPr wrap="square" lIns="45720" rIns="45720" anchor="t">
             <a:spAutoFit/>
           </a:bodyPr>
           <a:lstStyle/>
@@ -9655,13 +9641,31 @@
               </a:spcAft>
             </a:pPr>
             <a:r>
-              <a:rPr sz="1100" b="0">
+              <a:rPr sz="1100" b="0" dirty="0">
                 <a:solidFill>
                   <a:srgbClr val="64748B"/>
                 </a:solidFill>
                 <a:latin typeface="Segoe UI"/>
               </a:rPr>
-              <a:t>Rust → WebAssembly  |  Annual new-technology KPI 2026</a:t>
+              <a:t>Rust → </a:t>
+            </a:r>
+            <a:r>
+              <a:rPr sz="1100" b="0" dirty="0" err="1">
+                <a:solidFill>
+                  <a:srgbClr val="64748B"/>
+                </a:solidFill>
+                <a:latin typeface="Segoe UI"/>
+              </a:rPr>
+              <a:t>WebAssembly</a:t>
+            </a:r>
+            <a:r>
+              <a:rPr sz="1100" b="0" dirty="0">
+                <a:solidFill>
+                  <a:srgbClr val="64748B"/>
+                </a:solidFill>
+                <a:latin typeface="Segoe UI"/>
+              </a:rPr>
+              <a:t> </a:t>
             </a:r>
           </a:p>
         </p:txBody>
@@ -9683,7 +9687,7 @@
           <a:noFill/>
         </p:spPr>
         <p:txBody>
-          <a:bodyPr wrap="square" anchor="t" lIns="45720" rIns="45720">
+          <a:bodyPr wrap="square" lIns="45720" rIns="45720" anchor="t">
             <a:spAutoFit/>
           </a:bodyPr>
           <a:lstStyle/>
@@ -9707,14 +9711,53 @@
       </p:sp>
       <p:sp>
         <p:nvSpPr>
-          <p:cNvPr id="8" name="Rectangle 7"/>
+          <p:cNvPr id="8" name="TextBox 7"/>
+          <p:cNvSpPr txBox="1"/>
+          <p:nvPr/>
+        </p:nvSpPr>
+        <p:spPr>
+          <a:xfrm>
+            <a:off x="548640" y="1280160"/>
+            <a:ext cx="10972800" cy="365760"/>
+          </a:xfrm>
+          <a:prstGeom prst="rect">
+            <a:avLst/>
+          </a:prstGeom>
+          <a:noFill/>
+        </p:spPr>
+        <p:txBody>
+          <a:bodyPr wrap="square" anchor="t" lIns="45720" rIns="45720" tIns="27432" bIns="27432">
+            <a:spAutoFit/>
+          </a:bodyPr>
+          <a:lstStyle/>
+          <a:p>
+            <a:pPr algn="l">
+              <a:spcAft>
+                <a:spcPts val="400"/>
+              </a:spcAft>
+            </a:pPr>
+            <a:r>
+              <a:rPr sz="2000" b="1">
+                <a:solidFill>
+                  <a:srgbClr val="1E293B"/>
+                </a:solidFill>
+                <a:latin typeface="Segoe UI"/>
+              </a:rPr>
+              <a:t>How it is usually done: the work goes to a server</a:t>
+            </a:r>
+          </a:p>
+        </p:txBody>
+      </p:sp>
+      <p:sp>
+        <p:nvSpPr>
+          <p:cNvPr id="9" name="Rectangle 8"/>
           <p:cNvSpPr/>
           <p:nvPr/>
         </p:nvSpPr>
         <p:spPr>
           <a:xfrm>
-            <a:off x="548640" y="1463040"/>
-            <a:ext cx="5394960" cy="2377440"/>
+            <a:off x="548640" y="1737360"/>
+            <a:ext cx="2377440" cy="1097280"/>
           </a:xfrm>
           <a:prstGeom prst="rect">
             <a:avLst/>
@@ -9751,16 +9794,138 @@
       </p:sp>
       <p:sp>
         <p:nvSpPr>
-          <p:cNvPr id="9" name="Rectangle 8"/>
+          <p:cNvPr id="10" name="Rectangle 9"/>
           <p:cNvSpPr/>
           <p:nvPr/>
         </p:nvSpPr>
         <p:spPr>
           <a:xfrm>
-            <a:off x="548640" y="1463040"/>
-            <a:ext cx="82296" cy="2377440"/>
-          </a:xfrm>
-          <a:prstGeom prst="rect">
+            <a:off x="548640" y="1737360"/>
+            <a:ext cx="2377440" cy="64008"/>
+          </a:xfrm>
+          <a:prstGeom prst="rect">
+            <a:avLst/>
+          </a:prstGeom>
+          <a:solidFill>
+            <a:srgbClr val="5B6B86"/>
+          </a:solidFill>
+          <a:ln>
+            <a:noFill/>
+          </a:ln>
+          <a:effectLst/>
+        </p:spPr>
+        <p:style>
+          <a:lnRef idx="1">
+            <a:schemeClr val="accent1"/>
+          </a:lnRef>
+          <a:fillRef idx="3">
+            <a:schemeClr val="accent1"/>
+          </a:fillRef>
+          <a:effectRef idx="2">
+            <a:schemeClr val="accent1"/>
+          </a:effectRef>
+          <a:fontRef idx="minor">
+            <a:schemeClr val="lt1"/>
+          </a:fontRef>
+        </p:style>
+        <p:txBody>
+          <a:bodyPr rtlCol="0" anchor="ctr"/>
+          <a:lstStyle/>
+          <a:p>
+            <a:pPr algn="ctr"/>
+          </a:p>
+        </p:txBody>
+      </p:sp>
+      <p:sp>
+        <p:nvSpPr>
+          <p:cNvPr id="11" name="TextBox 10"/>
+          <p:cNvSpPr txBox="1"/>
+          <p:nvPr/>
+        </p:nvSpPr>
+        <p:spPr>
+          <a:xfrm>
+            <a:off x="640080" y="1874520"/>
+            <a:ext cx="2194560" cy="365760"/>
+          </a:xfrm>
+          <a:prstGeom prst="rect">
+            <a:avLst/>
+          </a:prstGeom>
+          <a:noFill/>
+        </p:spPr>
+        <p:txBody>
+          <a:bodyPr wrap="square" anchor="t" lIns="45720" rIns="45720" tIns="27432" bIns="27432">
+            <a:spAutoFit/>
+          </a:bodyPr>
+          <a:lstStyle/>
+          <a:p>
+            <a:pPr algn="ctr">
+              <a:spcAft>
+                <a:spcPts val="400"/>
+              </a:spcAft>
+            </a:pPr>
+            <a:r>
+              <a:rPr sz="1700" b="1">
+                <a:solidFill>
+                  <a:srgbClr val="5B6B86"/>
+                </a:solidFill>
+                <a:latin typeface="Segoe UI"/>
+              </a:rPr>
+              <a:t>User's browser</a:t>
+            </a:r>
+          </a:p>
+        </p:txBody>
+      </p:sp>
+      <p:sp>
+        <p:nvSpPr>
+          <p:cNvPr id="12" name="TextBox 11"/>
+          <p:cNvSpPr txBox="1"/>
+          <p:nvPr/>
+        </p:nvSpPr>
+        <p:spPr>
+          <a:xfrm>
+            <a:off x="640080" y="2286000"/>
+            <a:ext cx="2194560" cy="502920"/>
+          </a:xfrm>
+          <a:prstGeom prst="rect">
+            <a:avLst/>
+          </a:prstGeom>
+          <a:noFill/>
+        </p:spPr>
+        <p:txBody>
+          <a:bodyPr wrap="square" anchor="t" lIns="45720" rIns="45720" tIns="27432" bIns="27432">
+            <a:spAutoFit/>
+          </a:bodyPr>
+          <a:lstStyle/>
+          <a:p>
+            <a:pPr algn="ctr">
+              <a:spcAft>
+                <a:spcPts val="400"/>
+              </a:spcAft>
+            </a:pPr>
+            <a:r>
+              <a:rPr sz="1400" b="0">
+                <a:solidFill>
+                  <a:srgbClr val="1E293B"/>
+                </a:solidFill>
+                <a:latin typeface="Segoe UI"/>
+              </a:rPr>
+              <a:t>Picks a photo, CSV or Excel file</a:t>
+            </a:r>
+          </a:p>
+        </p:txBody>
+      </p:sp>
+      <p:sp>
+        <p:nvSpPr>
+          <p:cNvPr id="13" name="Right Arrow 12"/>
+          <p:cNvSpPr/>
+          <p:nvPr/>
+        </p:nvSpPr>
+        <p:spPr>
+          <a:xfrm>
+            <a:off x="2999232" y="2148840"/>
+            <a:ext cx="381304" cy="292608"/>
+          </a:xfrm>
+          <a:prstGeom prst="rightArrow">
             <a:avLst/>
           </a:prstGeom>
           <a:solidFill>
@@ -9795,124 +9960,14 @@
       </p:sp>
       <p:sp>
         <p:nvSpPr>
-          <p:cNvPr id="10" name="TextBox 9"/>
-          <p:cNvSpPr txBox="1"/>
-          <p:nvPr/>
-        </p:nvSpPr>
-        <p:spPr>
-          <a:xfrm>
-            <a:off x="777240" y="1572768"/>
-            <a:ext cx="5029200" cy="411480"/>
-          </a:xfrm>
-          <a:prstGeom prst="rect">
-            <a:avLst/>
-          </a:prstGeom>
-          <a:noFill/>
-        </p:spPr>
-        <p:txBody>
-          <a:bodyPr wrap="square" anchor="t" lIns="45720" rIns="45720">
-            <a:spAutoFit/>
-          </a:bodyPr>
-          <a:lstStyle/>
-          <a:p>
-            <a:pPr algn="l">
-              <a:spcAft>
-                <a:spcPts val="0"/>
-              </a:spcAft>
-            </a:pPr>
-            <a:r>
-              <a:rPr sz="1900" b="1">
-                <a:solidFill>
-                  <a:srgbClr val="64748B"/>
-                </a:solidFill>
-                <a:latin typeface="Segoe UI"/>
-              </a:rPr>
-              <a:t>The KPI</a:t>
-            </a:r>
-          </a:p>
-        </p:txBody>
-      </p:sp>
-      <p:sp>
-        <p:nvSpPr>
-          <p:cNvPr id="11" name="TextBox 10"/>
-          <p:cNvSpPr txBox="1"/>
-          <p:nvPr/>
-        </p:nvSpPr>
-        <p:spPr>
-          <a:xfrm>
-            <a:off x="777240" y="2029968"/>
-            <a:ext cx="5029200" cy="1737360"/>
-          </a:xfrm>
-          <a:prstGeom prst="rect">
-            <a:avLst/>
-          </a:prstGeom>
-          <a:noFill/>
-        </p:spPr>
-        <p:txBody>
-          <a:bodyPr wrap="square" anchor="t" lIns="45720" rIns="45720">
-            <a:spAutoFit/>
-          </a:bodyPr>
-          <a:lstStyle/>
-          <a:p>
-            <a:pPr algn="l">
-              <a:spcAft>
-                <a:spcPts val="400"/>
-              </a:spcAft>
-            </a:pPr>
-            <a:r>
-              <a:rPr sz="1600" b="0">
-                <a:solidFill>
-                  <a:srgbClr val="1E293B"/>
-                </a:solidFill>
-                <a:latin typeface="Segoe UI"/>
-              </a:rPr>
-              <a:t>Master at least one new technology beyond the skill standard, every year.</a:t>
-            </a:r>
-          </a:p>
-          <a:p>
-            <a:pPr algn="l">
-              <a:spcAft>
-                <a:spcPts val="400"/>
-              </a:spcAft>
-            </a:pPr>
-            <a:r>
-              <a:rPr sz="1600" b="0">
-                <a:solidFill>
-                  <a:srgbClr val="1E293B"/>
-                </a:solidFill>
-                <a:latin typeface="Segoe UI"/>
-              </a:rPr>
-              <a:t>Understand its advantages and disadvantages clearly.</a:t>
-            </a:r>
-          </a:p>
-          <a:p>
-            <a:pPr algn="l">
-              <a:spcAft>
-                <a:spcPts val="400"/>
-              </a:spcAft>
-            </a:pPr>
-            <a:r>
-              <a:rPr sz="1600" b="0">
-                <a:solidFill>
-                  <a:srgbClr val="1E293B"/>
-                </a:solidFill>
-                <a:latin typeface="Segoe UI"/>
-              </a:rPr>
-              <a:t>Develop personal skills; prove it with slides, a demo, code and a blog post.</a:t>
-            </a:r>
-          </a:p>
-        </p:txBody>
-      </p:sp>
-      <p:sp>
-        <p:nvSpPr>
-          <p:cNvPr id="12" name="Rectangle 11"/>
+          <p:cNvPr id="14" name="Rectangle 13"/>
           <p:cNvSpPr/>
           <p:nvPr/>
         </p:nvSpPr>
         <p:spPr>
           <a:xfrm>
-            <a:off x="6263640" y="1463040"/>
-            <a:ext cx="5394960" cy="2377440"/>
+            <a:off x="3453688" y="1737360"/>
+            <a:ext cx="2377440" cy="1097280"/>
           </a:xfrm>
           <a:prstGeom prst="rect">
             <a:avLst/>
@@ -9949,20 +10004,20 @@
       </p:sp>
       <p:sp>
         <p:nvSpPr>
-          <p:cNvPr id="13" name="Rectangle 12"/>
+          <p:cNvPr id="15" name="Rectangle 14"/>
           <p:cNvSpPr/>
           <p:nvPr/>
         </p:nvSpPr>
         <p:spPr>
           <a:xfrm>
-            <a:off x="6263640" y="1463040"/>
-            <a:ext cx="82296" cy="2377440"/>
+            <a:off x="3453688" y="1737360"/>
+            <a:ext cx="2377440" cy="64008"/>
           </a:xfrm>
           <a:prstGeom prst="rect">
             <a:avLst/>
           </a:prstGeom>
           <a:solidFill>
-            <a:srgbClr val="2F9E6F"/>
+            <a:srgbClr val="D9534F"/>
           </a:solidFill>
           <a:ln>
             <a:noFill/>
@@ -9993,14 +10048,14 @@
       </p:sp>
       <p:sp>
         <p:nvSpPr>
-          <p:cNvPr id="14" name="TextBox 13"/>
+          <p:cNvPr id="16" name="TextBox 15"/>
           <p:cNvSpPr txBox="1"/>
           <p:nvPr/>
         </p:nvSpPr>
         <p:spPr>
           <a:xfrm>
-            <a:off x="6492240" y="1572768"/>
-            <a:ext cx="5029200" cy="411480"/>
+            <a:off x="3545128" y="1874520"/>
+            <a:ext cx="2194560" cy="365760"/>
           </a:xfrm>
           <a:prstGeom prst="rect">
             <a:avLst/>
@@ -10008,148 +10063,121 @@
           <a:noFill/>
         </p:spPr>
         <p:txBody>
-          <a:bodyPr wrap="square" anchor="t" lIns="45720" rIns="45720">
+          <a:bodyPr wrap="square" anchor="t" lIns="45720" rIns="45720" tIns="27432" bIns="27432">
             <a:spAutoFit/>
           </a:bodyPr>
           <a:lstStyle/>
           <a:p>
-            <a:pPr algn="l">
-              <a:spcAft>
-                <a:spcPts val="0"/>
-              </a:spcAft>
-            </a:pPr>
-            <a:r>
-              <a:rPr sz="1900" b="1">
-                <a:solidFill>
-                  <a:srgbClr val="2F9E6F"/>
-                </a:solidFill>
-                <a:latin typeface="Segoe UI"/>
-              </a:rPr>
-              <a:t>My choice this year: Rust + WebAssembly</a:t>
-            </a:r>
-          </a:p>
-        </p:txBody>
-      </p:sp>
-      <p:sp>
-        <p:nvSpPr>
-          <p:cNvPr id="15" name="TextBox 14"/>
-          <p:cNvSpPr txBox="1"/>
-          <p:nvPr/>
-        </p:nvSpPr>
-        <p:spPr>
-          <a:xfrm>
-            <a:off x="6492240" y="2029968"/>
-            <a:ext cx="5029200" cy="1737360"/>
-          </a:xfrm>
-          <a:prstGeom prst="rect">
-            <a:avLst/>
-          </a:prstGeom>
-          <a:noFill/>
-        </p:spPr>
-        <p:txBody>
-          <a:bodyPr wrap="square" anchor="t" lIns="45720" rIns="45720">
-            <a:spAutoFit/>
-          </a:bodyPr>
-          <a:lstStyle/>
-          <a:p>
-            <a:pPr algn="l">
+            <a:pPr algn="ctr">
               <a:spcAft>
                 <a:spcPts val="400"/>
               </a:spcAft>
             </a:pPr>
             <a:r>
-              <a:rPr sz="1600" b="0">
-                <a:solidFill>
-                  <a:srgbClr val="1E293B"/>
-                </a:solidFill>
-                <a:latin typeface="Segoe UI"/>
-              </a:rPr>
-              <a:t>Outside my daily stack (C# / .NET / JavaScript).</a:t>
-            </a:r>
-          </a:p>
-          <a:p>
-            <a:pPr algn="l">
+              <a:rPr sz="1700" b="1">
+                <a:solidFill>
+                  <a:srgbClr val="D9534F"/>
+                </a:solidFill>
+                <a:latin typeface="Segoe UI"/>
+              </a:rPr>
+              <a:t>Upload</a:t>
+            </a:r>
+          </a:p>
+        </p:txBody>
+      </p:sp>
+      <p:sp>
+        <p:nvSpPr>
+          <p:cNvPr id="17" name="TextBox 16"/>
+          <p:cNvSpPr txBox="1"/>
+          <p:nvPr/>
+        </p:nvSpPr>
+        <p:spPr>
+          <a:xfrm>
+            <a:off x="3545128" y="2286000"/>
+            <a:ext cx="2194560" cy="502920"/>
+          </a:xfrm>
+          <a:prstGeom prst="rect">
+            <a:avLst/>
+          </a:prstGeom>
+          <a:noFill/>
+        </p:spPr>
+        <p:txBody>
+          <a:bodyPr wrap="square" anchor="t" lIns="45720" rIns="45720" tIns="27432" bIns="27432">
+            <a:spAutoFit/>
+          </a:bodyPr>
+          <a:lstStyle/>
+          <a:p>
+            <a:pPr algn="ctr">
               <a:spcAft>
                 <a:spcPts val="400"/>
               </a:spcAft>
             </a:pPr>
             <a:r>
-              <a:rPr sz="1600" b="0">
+              <a:rPr sz="1400" b="0">
                 <a:solidFill>
                   <a:srgbClr val="1E293B"/>
                 </a:solidFill>
                 <a:latin typeface="Segoe UI"/>
               </a:rPr>
-              <a:t>Directly relevant: heavy file and image work today runs on servers.</a:t>
-            </a:r>
-          </a:p>
-          <a:p>
-            <a:pPr algn="l">
-              <a:spcAft>
-                <a:spcPts val="400"/>
-              </a:spcAft>
-            </a:pPr>
-            <a:r>
-              <a:rPr sz="1600" b="0">
-                <a:solidFill>
-                  <a:srgbClr val="1E293B"/>
-                </a:solidFill>
-                <a:latin typeface="Segoe UI"/>
-              </a:rPr>
-              <a:t>Question to answer: when is it worth moving that work into the browser?</a:t>
-            </a:r>
-          </a:p>
-        </p:txBody>
-      </p:sp>
-      <p:sp>
-        <p:nvSpPr>
-          <p:cNvPr id="16" name="TextBox 15"/>
-          <p:cNvSpPr txBox="1"/>
-          <p:nvPr/>
-        </p:nvSpPr>
-        <p:spPr>
-          <a:xfrm>
-            <a:off x="548640" y="3931920"/>
-            <a:ext cx="10972800" cy="365760"/>
-          </a:xfrm>
-          <a:prstGeom prst="rect">
-            <a:avLst/>
-          </a:prstGeom>
-          <a:noFill/>
-        </p:spPr>
-        <p:txBody>
-          <a:bodyPr wrap="square" anchor="t" lIns="45720" rIns="45720">
-            <a:spAutoFit/>
-          </a:bodyPr>
-          <a:lstStyle/>
-          <a:p>
-            <a:pPr algn="l">
-              <a:spcAft>
-                <a:spcPts val="0"/>
-              </a:spcAft>
-            </a:pPr>
-            <a:r>
-              <a:rPr sz="2000" b="1">
-                <a:solidFill>
-                  <a:srgbClr val="1E293B"/>
-                </a:solidFill>
-                <a:latin typeface="Segoe UI"/>
-              </a:rPr>
-              <a:t>Expected outputs</a:t>
-            </a:r>
-          </a:p>
-        </p:txBody>
-      </p:sp>
-      <p:sp>
-        <p:nvSpPr>
-          <p:cNvPr id="17" name="Rectangle 16"/>
+              <a:t>File travels over the network</a:t>
+            </a:r>
+          </a:p>
+        </p:txBody>
+      </p:sp>
+      <p:sp>
+        <p:nvSpPr>
+          <p:cNvPr id="18" name="Right Arrow 17"/>
           <p:cNvSpPr/>
           <p:nvPr/>
         </p:nvSpPr>
         <p:spPr>
           <a:xfrm>
-            <a:off x="548640" y="4389120"/>
-            <a:ext cx="2651760" cy="1371600"/>
+            <a:off x="5904280" y="2148840"/>
+            <a:ext cx="381304" cy="292608"/>
+          </a:xfrm>
+          <a:prstGeom prst="rightArrow">
+            <a:avLst/>
+          </a:prstGeom>
+          <a:solidFill>
+            <a:srgbClr val="64748B"/>
+          </a:solidFill>
+          <a:ln>
+            <a:noFill/>
+          </a:ln>
+          <a:effectLst/>
+        </p:spPr>
+        <p:style>
+          <a:lnRef idx="1">
+            <a:schemeClr val="accent1"/>
+          </a:lnRef>
+          <a:fillRef idx="3">
+            <a:schemeClr val="accent1"/>
+          </a:fillRef>
+          <a:effectRef idx="2">
+            <a:schemeClr val="accent1"/>
+          </a:effectRef>
+          <a:fontRef idx="minor">
+            <a:schemeClr val="lt1"/>
+          </a:fontRef>
+        </p:style>
+        <p:txBody>
+          <a:bodyPr rtlCol="0" anchor="ctr"/>
+          <a:lstStyle/>
+          <a:p>
+            <a:pPr algn="ctr"/>
+          </a:p>
+        </p:txBody>
+      </p:sp>
+      <p:sp>
+        <p:nvSpPr>
+          <p:cNvPr id="19" name="Rectangle 18"/>
+          <p:cNvSpPr/>
+          <p:nvPr/>
+        </p:nvSpPr>
+        <p:spPr>
+          <a:xfrm>
+            <a:off x="6358736" y="1737360"/>
+            <a:ext cx="2377440" cy="1097280"/>
           </a:xfrm>
           <a:prstGeom prst="rect">
             <a:avLst/>
@@ -10186,20 +10214,20 @@
       </p:sp>
       <p:sp>
         <p:nvSpPr>
-          <p:cNvPr id="18" name="Rectangle 17"/>
+          <p:cNvPr id="20" name="Rectangle 19"/>
           <p:cNvSpPr/>
           <p:nvPr/>
         </p:nvSpPr>
         <p:spPr>
           <a:xfrm>
-            <a:off x="548640" y="4389120"/>
-            <a:ext cx="2651760" cy="73152"/>
+            <a:off x="6358736" y="1737360"/>
+            <a:ext cx="2377440" cy="64008"/>
           </a:xfrm>
           <a:prstGeom prst="rect">
             <a:avLst/>
           </a:prstGeom>
           <a:solidFill>
-            <a:srgbClr val="2F9E6F"/>
+            <a:srgbClr val="D9A21B"/>
           </a:solidFill>
           <a:ln>
             <a:noFill/>
@@ -10230,14 +10258,14 @@
       </p:sp>
       <p:sp>
         <p:nvSpPr>
-          <p:cNvPr id="19" name="TextBox 18"/>
+          <p:cNvPr id="21" name="TextBox 20"/>
           <p:cNvSpPr txBox="1"/>
           <p:nvPr/>
         </p:nvSpPr>
         <p:spPr>
           <a:xfrm>
-            <a:off x="685800" y="4572000"/>
-            <a:ext cx="2377440" cy="365760"/>
+            <a:off x="6450176" y="1874520"/>
+            <a:ext cx="2194560" cy="365760"/>
           </a:xfrm>
           <a:prstGeom prst="rect">
             <a:avLst/>
@@ -10245,38 +10273,38 @@
           <a:noFill/>
         </p:spPr>
         <p:txBody>
-          <a:bodyPr wrap="square" anchor="t" lIns="45720" rIns="45720">
+          <a:bodyPr wrap="square" anchor="t" lIns="45720" rIns="45720" tIns="27432" bIns="27432">
             <a:spAutoFit/>
           </a:bodyPr>
           <a:lstStyle/>
           <a:p>
-            <a:pPr algn="l">
+            <a:pPr algn="ctr">
               <a:spcAft>
-                <a:spcPts val="0"/>
+                <a:spcPts val="400"/>
               </a:spcAft>
             </a:pPr>
             <a:r>
-              <a:rPr sz="2000" b="1">
-                <a:solidFill>
-                  <a:srgbClr val="2F9E6F"/>
-                </a:solidFill>
-                <a:latin typeface="Segoe UI"/>
-              </a:rPr>
-              <a:t>✔  Slides</a:t>
-            </a:r>
-          </a:p>
-        </p:txBody>
-      </p:sp>
-      <p:sp>
-        <p:nvSpPr>
-          <p:cNvPr id="20" name="TextBox 19"/>
+              <a:rPr sz="1700" b="1">
+                <a:solidFill>
+                  <a:srgbClr val="D9A21B"/>
+                </a:solidFill>
+                <a:latin typeface="Segoe UI"/>
+              </a:rPr>
+              <a:t>Server</a:t>
+            </a:r>
+          </a:p>
+        </p:txBody>
+      </p:sp>
+      <p:sp>
+        <p:nvSpPr>
+          <p:cNvPr id="22" name="TextBox 21"/>
           <p:cNvSpPr txBox="1"/>
           <p:nvPr/>
         </p:nvSpPr>
         <p:spPr>
           <a:xfrm>
-            <a:off x="685800" y="5029200"/>
-            <a:ext cx="2377440" cy="640080"/>
+            <a:off x="6450176" y="2286000"/>
+            <a:ext cx="2194560" cy="502920"/>
           </a:xfrm>
           <a:prstGeom prst="rect">
             <a:avLst/>
@@ -10284,38 +10312,82 @@
           <a:noFill/>
         </p:spPr>
         <p:txBody>
-          <a:bodyPr wrap="square" anchor="t" lIns="45720" rIns="45720">
+          <a:bodyPr wrap="square" anchor="t" lIns="45720" rIns="45720" tIns="27432" bIns="27432">
             <a:spAutoFit/>
           </a:bodyPr>
           <a:lstStyle/>
           <a:p>
-            <a:pPr algn="l">
+            <a:pPr algn="ctr">
               <a:spcAft>
-                <a:spcPts val="0"/>
+                <a:spcPts val="400"/>
               </a:spcAft>
             </a:pPr>
             <a:r>
-              <a:rPr sz="1500" b="0">
+              <a:rPr sz="1400" b="0">
                 <a:solidFill>
                   <a:srgbClr val="1E293B"/>
                 </a:solidFill>
                 <a:latin typeface="Segoe UI"/>
               </a:rPr>
-              <a:t>this deck</a:t>
-            </a:r>
-          </a:p>
-        </p:txBody>
-      </p:sp>
-      <p:sp>
-        <p:nvSpPr>
-          <p:cNvPr id="21" name="Rectangle 20"/>
+              <a:t>Decode, process, encode, validate</a:t>
+            </a:r>
+          </a:p>
+        </p:txBody>
+      </p:sp>
+      <p:sp>
+        <p:nvSpPr>
+          <p:cNvPr id="23" name="Right Arrow 22"/>
           <p:cNvSpPr/>
           <p:nvPr/>
         </p:nvSpPr>
         <p:spPr>
           <a:xfrm>
-            <a:off x="3383280" y="4389120"/>
-            <a:ext cx="2651760" cy="1371600"/>
+            <a:off x="8809328" y="2148840"/>
+            <a:ext cx="381304" cy="292608"/>
+          </a:xfrm>
+          <a:prstGeom prst="rightArrow">
+            <a:avLst/>
+          </a:prstGeom>
+          <a:solidFill>
+            <a:srgbClr val="64748B"/>
+          </a:solidFill>
+          <a:ln>
+            <a:noFill/>
+          </a:ln>
+          <a:effectLst/>
+        </p:spPr>
+        <p:style>
+          <a:lnRef idx="1">
+            <a:schemeClr val="accent1"/>
+          </a:lnRef>
+          <a:fillRef idx="3">
+            <a:schemeClr val="accent1"/>
+          </a:fillRef>
+          <a:effectRef idx="2">
+            <a:schemeClr val="accent1"/>
+          </a:effectRef>
+          <a:fontRef idx="minor">
+            <a:schemeClr val="lt1"/>
+          </a:fontRef>
+        </p:style>
+        <p:txBody>
+          <a:bodyPr rtlCol="0" anchor="ctr"/>
+          <a:lstStyle/>
+          <a:p>
+            <a:pPr algn="ctr"/>
+          </a:p>
+        </p:txBody>
+      </p:sp>
+      <p:sp>
+        <p:nvSpPr>
+          <p:cNvPr id="24" name="Rectangle 23"/>
+          <p:cNvSpPr/>
+          <p:nvPr/>
+        </p:nvSpPr>
+        <p:spPr>
+          <a:xfrm>
+            <a:off x="9263784" y="1737360"/>
+            <a:ext cx="2377440" cy="1097280"/>
           </a:xfrm>
           <a:prstGeom prst="rect">
             <a:avLst/>
@@ -10352,20 +10424,20 @@
       </p:sp>
       <p:sp>
         <p:nvSpPr>
-          <p:cNvPr id="22" name="Rectangle 21"/>
+          <p:cNvPr id="25" name="Rectangle 24"/>
           <p:cNvSpPr/>
           <p:nvPr/>
         </p:nvSpPr>
         <p:spPr>
           <a:xfrm>
-            <a:off x="3383280" y="4389120"/>
-            <a:ext cx="2651760" cy="73152"/>
+            <a:off x="9263784" y="1737360"/>
+            <a:ext cx="2377440" cy="64008"/>
           </a:xfrm>
           <a:prstGeom prst="rect">
             <a:avLst/>
           </a:prstGeom>
           <a:solidFill>
-            <a:srgbClr val="2F9E6F"/>
+            <a:srgbClr val="D9534F"/>
           </a:solidFill>
           <a:ln>
             <a:noFill/>
@@ -10396,14 +10468,14 @@
       </p:sp>
       <p:sp>
         <p:nvSpPr>
-          <p:cNvPr id="23" name="TextBox 22"/>
+          <p:cNvPr id="26" name="TextBox 25"/>
           <p:cNvSpPr txBox="1"/>
           <p:nvPr/>
         </p:nvSpPr>
         <p:spPr>
           <a:xfrm>
-            <a:off x="3520440" y="4572000"/>
-            <a:ext cx="2377440" cy="365760"/>
+            <a:off x="9355224" y="1874520"/>
+            <a:ext cx="2194560" cy="365760"/>
           </a:xfrm>
           <a:prstGeom prst="rect">
             <a:avLst/>
@@ -10411,77 +10483,116 @@
           <a:noFill/>
         </p:spPr>
         <p:txBody>
-          <a:bodyPr wrap="square" anchor="t" lIns="45720" rIns="45720">
+          <a:bodyPr wrap="square" anchor="t" lIns="45720" rIns="45720" tIns="27432" bIns="27432">
             <a:spAutoFit/>
           </a:bodyPr>
           <a:lstStyle/>
           <a:p>
+            <a:pPr algn="ctr">
+              <a:spcAft>
+                <a:spcPts val="400"/>
+              </a:spcAft>
+            </a:pPr>
+            <a:r>
+              <a:rPr sz="1700" b="1">
+                <a:solidFill>
+                  <a:srgbClr val="D9534F"/>
+                </a:solidFill>
+                <a:latin typeface="Segoe UI"/>
+              </a:rPr>
+              <a:t>Download</a:t>
+            </a:r>
+          </a:p>
+        </p:txBody>
+      </p:sp>
+      <p:sp>
+        <p:nvSpPr>
+          <p:cNvPr id="27" name="TextBox 26"/>
+          <p:cNvSpPr txBox="1"/>
+          <p:nvPr/>
+        </p:nvSpPr>
+        <p:spPr>
+          <a:xfrm>
+            <a:off x="9355224" y="2286000"/>
+            <a:ext cx="2194560" cy="502920"/>
+          </a:xfrm>
+          <a:prstGeom prst="rect">
+            <a:avLst/>
+          </a:prstGeom>
+          <a:noFill/>
+        </p:spPr>
+        <p:txBody>
+          <a:bodyPr wrap="square" anchor="t" lIns="45720" rIns="45720" tIns="27432" bIns="27432">
+            <a:spAutoFit/>
+          </a:bodyPr>
+          <a:lstStyle/>
+          <a:p>
+            <a:pPr algn="ctr">
+              <a:spcAft>
+                <a:spcPts val="400"/>
+              </a:spcAft>
+            </a:pPr>
+            <a:r>
+              <a:rPr sz="1400" b="0">
+                <a:solidFill>
+                  <a:srgbClr val="1E293B"/>
+                </a:solidFill>
+                <a:latin typeface="Segoe UI"/>
+              </a:rPr>
+              <a:t>Result travels back to the user</a:t>
+            </a:r>
+          </a:p>
+        </p:txBody>
+      </p:sp>
+      <p:sp>
+        <p:nvSpPr>
+          <p:cNvPr id="28" name="TextBox 27"/>
+          <p:cNvSpPr txBox="1"/>
+          <p:nvPr/>
+        </p:nvSpPr>
+        <p:spPr>
+          <a:xfrm>
+            <a:off x="548640" y="3063240"/>
+            <a:ext cx="10972800" cy="365760"/>
+          </a:xfrm>
+          <a:prstGeom prst="rect">
+            <a:avLst/>
+          </a:prstGeom>
+          <a:noFill/>
+        </p:spPr>
+        <p:txBody>
+          <a:bodyPr wrap="square" anchor="t" lIns="45720" rIns="45720" tIns="27432" bIns="27432">
+            <a:spAutoFit/>
+          </a:bodyPr>
+          <a:lstStyle/>
+          <a:p>
             <a:pPr algn="l">
               <a:spcAft>
-                <a:spcPts val="0"/>
+                <a:spcPts val="400"/>
               </a:spcAft>
             </a:pPr>
             <a:r>
               <a:rPr sz="2000" b="1">
                 <a:solidFill>
-                  <a:srgbClr val="2F9E6F"/>
-                </a:solidFill>
-                <a:latin typeface="Segoe UI"/>
-              </a:rPr>
-              <a:t>✔  Demo</a:t>
-            </a:r>
-          </a:p>
-        </p:txBody>
-      </p:sp>
-      <p:sp>
-        <p:nvSpPr>
-          <p:cNvPr id="24" name="TextBox 23"/>
-          <p:cNvSpPr txBox="1"/>
-          <p:nvPr/>
-        </p:nvSpPr>
-        <p:spPr>
-          <a:xfrm>
-            <a:off x="3520440" y="5029200"/>
-            <a:ext cx="2377440" cy="640080"/>
-          </a:xfrm>
-          <a:prstGeom prst="rect">
-            <a:avLst/>
-          </a:prstGeom>
-          <a:noFill/>
-        </p:spPr>
-        <p:txBody>
-          <a:bodyPr wrap="square" anchor="t" lIns="45720" rIns="45720">
-            <a:spAutoFit/>
-          </a:bodyPr>
-          <a:lstStyle/>
-          <a:p>
-            <a:pPr algn="l">
-              <a:spcAft>
-                <a:spcPts val="0"/>
-              </a:spcAft>
-            </a:pPr>
-            <a:r>
-              <a:rPr sz="1500" b="0">
-                <a:solidFill>
                   <a:srgbClr val="1E293B"/>
                 </a:solidFill>
                 <a:latin typeface="Segoe UI"/>
               </a:rPr>
-              <a:t>split-screen app + recorded video</a:t>
-            </a:r>
-          </a:p>
-        </p:txBody>
-      </p:sp>
-      <p:sp>
-        <p:nvSpPr>
-          <p:cNvPr id="25" name="Rectangle 24"/>
+              <a:t>Where it hurts</a:t>
+            </a:r>
+          </a:p>
+        </p:txBody>
+      </p:sp>
+      <p:sp>
+        <p:nvSpPr>
+          <p:cNvPr id="29" name="Rectangle 28"/>
           <p:cNvSpPr/>
           <p:nvPr/>
         </p:nvSpPr>
         <p:spPr>
           <a:xfrm>
-            <a:off x="6217920" y="4389120"/>
-            <a:ext cx="2651760" cy="1371600"/>
+            <a:off x="548640" y="3520440"/>
+            <a:ext cx="2704338" cy="1920240"/>
           </a:xfrm>
           <a:prstGeom prst="rect">
             <a:avLst/>
@@ -10518,20 +10629,20 @@
       </p:sp>
       <p:sp>
         <p:nvSpPr>
-          <p:cNvPr id="26" name="Rectangle 25"/>
+          <p:cNvPr id="30" name="Rectangle 29"/>
           <p:cNvSpPr/>
           <p:nvPr/>
         </p:nvSpPr>
         <p:spPr>
           <a:xfrm>
-            <a:off x="6217920" y="4389120"/>
-            <a:ext cx="2651760" cy="73152"/>
+            <a:off x="548640" y="3520440"/>
+            <a:ext cx="82296" cy="1920240"/>
           </a:xfrm>
           <a:prstGeom prst="rect">
             <a:avLst/>
           </a:prstGeom>
           <a:solidFill>
-            <a:srgbClr val="2F9E6F"/>
+            <a:srgbClr val="D9534F"/>
           </a:solidFill>
           <a:ln>
             <a:noFill/>
@@ -10562,14 +10673,14 @@
       </p:sp>
       <p:sp>
         <p:nvSpPr>
-          <p:cNvPr id="27" name="TextBox 26"/>
+          <p:cNvPr id="31" name="TextBox 30"/>
           <p:cNvSpPr txBox="1"/>
           <p:nvPr/>
         </p:nvSpPr>
         <p:spPr>
           <a:xfrm>
-            <a:off x="6355080" y="4572000"/>
-            <a:ext cx="2377440" cy="365760"/>
+            <a:off x="749808" y="3611880"/>
+            <a:ext cx="2430018" cy="365760"/>
           </a:xfrm>
           <a:prstGeom prst="rect">
             <a:avLst/>
@@ -10577,38 +10688,38 @@
           <a:noFill/>
         </p:spPr>
         <p:txBody>
-          <a:bodyPr wrap="square" anchor="t" lIns="45720" rIns="45720">
+          <a:bodyPr wrap="square" anchor="t" lIns="45720" rIns="45720" tIns="27432" bIns="27432">
             <a:spAutoFit/>
           </a:bodyPr>
           <a:lstStyle/>
           <a:p>
             <a:pPr algn="l">
               <a:spcAft>
-                <a:spcPts val="0"/>
+                <a:spcPts val="400"/>
               </a:spcAft>
             </a:pPr>
             <a:r>
-              <a:rPr sz="2000" b="1">
-                <a:solidFill>
-                  <a:srgbClr val="2F9E6F"/>
-                </a:solidFill>
-                <a:latin typeface="Segoe UI"/>
-              </a:rPr>
-              <a:t>✔  Code sample</a:t>
-            </a:r>
-          </a:p>
-        </p:txBody>
-      </p:sp>
-      <p:sp>
-        <p:nvSpPr>
-          <p:cNvPr id="28" name="TextBox 27"/>
+              <a:rPr sz="1700" b="1">
+                <a:solidFill>
+                  <a:srgbClr val="D9534F"/>
+                </a:solidFill>
+                <a:latin typeface="Segoe UI"/>
+              </a:rPr>
+              <a:t>Network wait</a:t>
+            </a:r>
+          </a:p>
+        </p:txBody>
+      </p:sp>
+      <p:sp>
+        <p:nvSpPr>
+          <p:cNvPr id="32" name="TextBox 31"/>
           <p:cNvSpPr txBox="1"/>
           <p:nvPr/>
         </p:nvSpPr>
         <p:spPr>
           <a:xfrm>
-            <a:off x="6355080" y="5029200"/>
-            <a:ext cx="2377440" cy="640080"/>
+            <a:off x="749808" y="4023360"/>
+            <a:ext cx="2384298" cy="1371600"/>
           </a:xfrm>
           <a:prstGeom prst="rect">
             <a:avLst/>
@@ -10616,38 +10727,38 @@
           <a:noFill/>
         </p:spPr>
         <p:txBody>
-          <a:bodyPr wrap="square" anchor="t" lIns="45720" rIns="45720">
+          <a:bodyPr wrap="square" anchor="t" lIns="45720" rIns="45720" tIns="27432" bIns="27432">
             <a:spAutoFit/>
           </a:bodyPr>
           <a:lstStyle/>
           <a:p>
             <a:pPr algn="l">
               <a:spcAft>
-                <a:spcPts val="0"/>
+                <a:spcPts val="400"/>
               </a:spcAft>
             </a:pPr>
             <a:r>
-              <a:rPr sz="1500" b="0">
+              <a:rPr sz="1400" b="0">
                 <a:solidFill>
                   <a:srgbClr val="1E293B"/>
                 </a:solidFill>
                 <a:latin typeface="Segoe UI"/>
               </a:rPr>
-              <a:t>rust-core, web-ui, dotnet-api</a:t>
-            </a:r>
-          </a:p>
-        </p:txBody>
-      </p:sp>
-      <p:sp>
-        <p:nvSpPr>
-          <p:cNvPr id="29" name="Rectangle 28"/>
+              <a:t>Large files must be uploaded and the result downloaded before the user sees anything. Slow links make it worse.</a:t>
+            </a:r>
+          </a:p>
+        </p:txBody>
+      </p:sp>
+      <p:sp>
+        <p:nvSpPr>
+          <p:cNvPr id="33" name="Rectangle 32"/>
           <p:cNvSpPr/>
           <p:nvPr/>
         </p:nvSpPr>
         <p:spPr>
           <a:xfrm>
-            <a:off x="9052560" y="4389120"/>
-            <a:ext cx="2651760" cy="1371600"/>
+            <a:off x="3344418" y="3520440"/>
+            <a:ext cx="2704338" cy="1920240"/>
           </a:xfrm>
           <a:prstGeom prst="rect">
             <a:avLst/>
@@ -10684,14 +10795,14 @@
       </p:sp>
       <p:sp>
         <p:nvSpPr>
-          <p:cNvPr id="30" name="Rectangle 29"/>
+          <p:cNvPr id="34" name="Rectangle 33"/>
           <p:cNvSpPr/>
           <p:nvPr/>
         </p:nvSpPr>
         <p:spPr>
           <a:xfrm>
-            <a:off x="9052560" y="4389120"/>
-            <a:ext cx="2651760" cy="73152"/>
+            <a:off x="3344418" y="3520440"/>
+            <a:ext cx="82296" cy="1920240"/>
           </a:xfrm>
           <a:prstGeom prst="rect">
             <a:avLst/>
@@ -10728,14 +10839,14 @@
       </p:sp>
       <p:sp>
         <p:nvSpPr>
-          <p:cNvPr id="31" name="TextBox 30"/>
+          <p:cNvPr id="35" name="TextBox 34"/>
           <p:cNvSpPr txBox="1"/>
           <p:nvPr/>
         </p:nvSpPr>
         <p:spPr>
           <a:xfrm>
-            <a:off x="9189720" y="4572000"/>
-            <a:ext cx="2377440" cy="365760"/>
+            <a:off x="3545586" y="3611880"/>
+            <a:ext cx="2430018" cy="365760"/>
           </a:xfrm>
           <a:prstGeom prst="rect">
             <a:avLst/>
@@ -10743,38 +10854,38 @@
           <a:noFill/>
         </p:spPr>
         <p:txBody>
-          <a:bodyPr wrap="square" anchor="t" lIns="45720" rIns="45720">
+          <a:bodyPr wrap="square" anchor="t" lIns="45720" rIns="45720" tIns="27432" bIns="27432">
             <a:spAutoFit/>
           </a:bodyPr>
           <a:lstStyle/>
           <a:p>
             <a:pPr algn="l">
               <a:spcAft>
-                <a:spcPts val="0"/>
+                <a:spcPts val="400"/>
               </a:spcAft>
             </a:pPr>
             <a:r>
-              <a:rPr sz="2000" b="1">
+              <a:rPr sz="1700" b="1">
                 <a:solidFill>
                   <a:srgbClr val="D9A21B"/>
                 </a:solidFill>
                 <a:latin typeface="Segoe UI"/>
               </a:rPr>
-              <a:t>○  Blog post</a:t>
-            </a:r>
-          </a:p>
-        </p:txBody>
-      </p:sp>
-      <p:sp>
-        <p:nvSpPr>
-          <p:cNvPr id="32" name="TextBox 31"/>
+              <a:t>Server cost</a:t>
+            </a:r>
+          </a:p>
+        </p:txBody>
+      </p:sp>
+      <p:sp>
+        <p:nvSpPr>
+          <p:cNvPr id="36" name="TextBox 35"/>
           <p:cNvSpPr txBox="1"/>
           <p:nvPr/>
         </p:nvSpPr>
         <p:spPr>
           <a:xfrm>
-            <a:off x="9189720" y="5029200"/>
-            <a:ext cx="2377440" cy="640080"/>
+            <a:off x="3545586" y="4023360"/>
+            <a:ext cx="2384298" cy="1371600"/>
           </a:xfrm>
           <a:prstGeom prst="rect">
             <a:avLst/>
@@ -10782,24 +10893,439 @@
           <a:noFill/>
         </p:spPr>
         <p:txBody>
-          <a:bodyPr wrap="square" anchor="t" lIns="45720" rIns="45720">
+          <a:bodyPr wrap="square" anchor="t" lIns="45720" rIns="45720" tIns="27432" bIns="27432">
             <a:spAutoFit/>
           </a:bodyPr>
           <a:lstStyle/>
           <a:p>
             <a:pPr algn="l">
               <a:spcAft>
-                <a:spcPts val="0"/>
+                <a:spcPts val="400"/>
               </a:spcAft>
             </a:pPr>
             <a:r>
-              <a:rPr sz="1500" b="0">
+              <a:rPr sz="1400" b="0">
                 <a:solidFill>
                   <a:srgbClr val="1E293B"/>
                 </a:solidFill>
                 <a:latin typeface="Segoe UI"/>
               </a:rPr>
-              <a:t>planned next</a:t>
+              <a:t>Every user's CPU-heavy job runs on your servers, so cost and scaling effort grow with usage.</a:t>
+            </a:r>
+          </a:p>
+        </p:txBody>
+      </p:sp>
+      <p:sp>
+        <p:nvSpPr>
+          <p:cNvPr id="37" name="Rectangle 36"/>
+          <p:cNvSpPr/>
+          <p:nvPr/>
+        </p:nvSpPr>
+        <p:spPr>
+          <a:xfrm>
+            <a:off x="6140196" y="3520440"/>
+            <a:ext cx="2704338" cy="1920240"/>
+          </a:xfrm>
+          <a:prstGeom prst="rect">
+            <a:avLst/>
+          </a:prstGeom>
+          <a:solidFill>
+            <a:srgbClr val="FFFFFF"/>
+          </a:solidFill>
+          <a:ln>
+            <a:noFill/>
+          </a:ln>
+          <a:effectLst/>
+        </p:spPr>
+        <p:style>
+          <a:lnRef idx="1">
+            <a:schemeClr val="accent1"/>
+          </a:lnRef>
+          <a:fillRef idx="3">
+            <a:schemeClr val="accent1"/>
+          </a:fillRef>
+          <a:effectRef idx="2">
+            <a:schemeClr val="accent1"/>
+          </a:effectRef>
+          <a:fontRef idx="minor">
+            <a:schemeClr val="lt1"/>
+          </a:fontRef>
+        </p:style>
+        <p:txBody>
+          <a:bodyPr rtlCol="0" anchor="ctr"/>
+          <a:lstStyle/>
+          <a:p>
+            <a:pPr algn="ctr"/>
+          </a:p>
+        </p:txBody>
+      </p:sp>
+      <p:sp>
+        <p:nvSpPr>
+          <p:cNvPr id="38" name="Rectangle 37"/>
+          <p:cNvSpPr/>
+          <p:nvPr/>
+        </p:nvSpPr>
+        <p:spPr>
+          <a:xfrm>
+            <a:off x="6140196" y="3520440"/>
+            <a:ext cx="82296" cy="1920240"/>
+          </a:xfrm>
+          <a:prstGeom prst="rect">
+            <a:avLst/>
+          </a:prstGeom>
+          <a:solidFill>
+            <a:srgbClr val="5B6B86"/>
+          </a:solidFill>
+          <a:ln>
+            <a:noFill/>
+          </a:ln>
+          <a:effectLst/>
+        </p:spPr>
+        <p:style>
+          <a:lnRef idx="1">
+            <a:schemeClr val="accent1"/>
+          </a:lnRef>
+          <a:fillRef idx="3">
+            <a:schemeClr val="accent1"/>
+          </a:fillRef>
+          <a:effectRef idx="2">
+            <a:schemeClr val="accent1"/>
+          </a:effectRef>
+          <a:fontRef idx="minor">
+            <a:schemeClr val="lt1"/>
+          </a:fontRef>
+        </p:style>
+        <p:txBody>
+          <a:bodyPr rtlCol="0" anchor="ctr"/>
+          <a:lstStyle/>
+          <a:p>
+            <a:pPr algn="ctr"/>
+          </a:p>
+        </p:txBody>
+      </p:sp>
+      <p:sp>
+        <p:nvSpPr>
+          <p:cNvPr id="39" name="TextBox 38"/>
+          <p:cNvSpPr txBox="1"/>
+          <p:nvPr/>
+        </p:nvSpPr>
+        <p:spPr>
+          <a:xfrm>
+            <a:off x="6341364" y="3611880"/>
+            <a:ext cx="2430018" cy="365760"/>
+          </a:xfrm>
+          <a:prstGeom prst="rect">
+            <a:avLst/>
+          </a:prstGeom>
+          <a:noFill/>
+        </p:spPr>
+        <p:txBody>
+          <a:bodyPr wrap="square" anchor="t" lIns="45720" rIns="45720" tIns="27432" bIns="27432">
+            <a:spAutoFit/>
+          </a:bodyPr>
+          <a:lstStyle/>
+          <a:p>
+            <a:pPr algn="l">
+              <a:spcAft>
+                <a:spcPts val="400"/>
+              </a:spcAft>
+            </a:pPr>
+            <a:r>
+              <a:rPr sz="1700" b="1">
+                <a:solidFill>
+                  <a:srgbClr val="5B6B86"/>
+                </a:solidFill>
+                <a:latin typeface="Segoe UI"/>
+              </a:rPr>
+              <a:t>Privacy risk</a:t>
+            </a:r>
+          </a:p>
+        </p:txBody>
+      </p:sp>
+      <p:sp>
+        <p:nvSpPr>
+          <p:cNvPr id="40" name="TextBox 39"/>
+          <p:cNvSpPr txBox="1"/>
+          <p:nvPr/>
+        </p:nvSpPr>
+        <p:spPr>
+          <a:xfrm>
+            <a:off x="6341364" y="4023360"/>
+            <a:ext cx="2384298" cy="1371600"/>
+          </a:xfrm>
+          <a:prstGeom prst="rect">
+            <a:avLst/>
+          </a:prstGeom>
+          <a:noFill/>
+        </p:spPr>
+        <p:txBody>
+          <a:bodyPr wrap="square" anchor="t" lIns="45720" rIns="45720" tIns="27432" bIns="27432">
+            <a:spAutoFit/>
+          </a:bodyPr>
+          <a:lstStyle/>
+          <a:p>
+            <a:pPr algn="l">
+              <a:spcAft>
+                <a:spcPts val="400"/>
+              </a:spcAft>
+            </a:pPr>
+            <a:r>
+              <a:rPr sz="1400" b="0">
+                <a:solidFill>
+                  <a:srgbClr val="1E293B"/>
+                </a:solidFill>
+                <a:latin typeface="Segoe UI"/>
+              </a:rPr>
+              <a:t>Sensitive files leave the user's device just to be validated or resized.</a:t>
+            </a:r>
+          </a:p>
+        </p:txBody>
+      </p:sp>
+      <p:sp>
+        <p:nvSpPr>
+          <p:cNvPr id="41" name="Rectangle 40"/>
+          <p:cNvSpPr/>
+          <p:nvPr/>
+        </p:nvSpPr>
+        <p:spPr>
+          <a:xfrm>
+            <a:off x="8935974" y="3520440"/>
+            <a:ext cx="2704338" cy="1920240"/>
+          </a:xfrm>
+          <a:prstGeom prst="rect">
+            <a:avLst/>
+          </a:prstGeom>
+          <a:solidFill>
+            <a:srgbClr val="FFFFFF"/>
+          </a:solidFill>
+          <a:ln>
+            <a:noFill/>
+          </a:ln>
+          <a:effectLst/>
+        </p:spPr>
+        <p:style>
+          <a:lnRef idx="1">
+            <a:schemeClr val="accent1"/>
+          </a:lnRef>
+          <a:fillRef idx="3">
+            <a:schemeClr val="accent1"/>
+          </a:fillRef>
+          <a:effectRef idx="2">
+            <a:schemeClr val="accent1"/>
+          </a:effectRef>
+          <a:fontRef idx="minor">
+            <a:schemeClr val="lt1"/>
+          </a:fontRef>
+        </p:style>
+        <p:txBody>
+          <a:bodyPr rtlCol="0" anchor="ctr"/>
+          <a:lstStyle/>
+          <a:p>
+            <a:pPr algn="ctr"/>
+          </a:p>
+        </p:txBody>
+      </p:sp>
+      <p:sp>
+        <p:nvSpPr>
+          <p:cNvPr id="42" name="Rectangle 41"/>
+          <p:cNvSpPr/>
+          <p:nvPr/>
+        </p:nvSpPr>
+        <p:spPr>
+          <a:xfrm>
+            <a:off x="8935974" y="3520440"/>
+            <a:ext cx="82296" cy="1920240"/>
+          </a:xfrm>
+          <a:prstGeom prst="rect">
+            <a:avLst/>
+          </a:prstGeom>
+          <a:solidFill>
+            <a:srgbClr val="DE6B2F"/>
+          </a:solidFill>
+          <a:ln>
+            <a:noFill/>
+          </a:ln>
+          <a:effectLst/>
+        </p:spPr>
+        <p:style>
+          <a:lnRef idx="1">
+            <a:schemeClr val="accent1"/>
+          </a:lnRef>
+          <a:fillRef idx="3">
+            <a:schemeClr val="accent1"/>
+          </a:fillRef>
+          <a:effectRef idx="2">
+            <a:schemeClr val="accent1"/>
+          </a:effectRef>
+          <a:fontRef idx="minor">
+            <a:schemeClr val="lt1"/>
+          </a:fontRef>
+        </p:style>
+        <p:txBody>
+          <a:bodyPr rtlCol="0" anchor="ctr"/>
+          <a:lstStyle/>
+          <a:p>
+            <a:pPr algn="ctr"/>
+          </a:p>
+        </p:txBody>
+      </p:sp>
+      <p:sp>
+        <p:nvSpPr>
+          <p:cNvPr id="43" name="TextBox 42"/>
+          <p:cNvSpPr txBox="1"/>
+          <p:nvPr/>
+        </p:nvSpPr>
+        <p:spPr>
+          <a:xfrm>
+            <a:off x="9137142" y="3611880"/>
+            <a:ext cx="2430018" cy="365760"/>
+          </a:xfrm>
+          <a:prstGeom prst="rect">
+            <a:avLst/>
+          </a:prstGeom>
+          <a:noFill/>
+        </p:spPr>
+        <p:txBody>
+          <a:bodyPr wrap="square" anchor="t" lIns="45720" rIns="45720" tIns="27432" bIns="27432">
+            <a:spAutoFit/>
+          </a:bodyPr>
+          <a:lstStyle/>
+          <a:p>
+            <a:pPr algn="l">
+              <a:spcAft>
+                <a:spcPts val="400"/>
+              </a:spcAft>
+            </a:pPr>
+            <a:r>
+              <a:rPr sz="1700" b="1">
+                <a:solidFill>
+                  <a:srgbClr val="DE6B2F"/>
+                </a:solidFill>
+                <a:latin typeface="Segoe UI"/>
+              </a:rPr>
+              <a:t>JavaScript has limits</a:t>
+            </a:r>
+          </a:p>
+        </p:txBody>
+      </p:sp>
+      <p:sp>
+        <p:nvSpPr>
+          <p:cNvPr id="44" name="TextBox 43"/>
+          <p:cNvSpPr txBox="1"/>
+          <p:nvPr/>
+        </p:nvSpPr>
+        <p:spPr>
+          <a:xfrm>
+            <a:off x="9137142" y="4023360"/>
+            <a:ext cx="2384298" cy="1371600"/>
+          </a:xfrm>
+          <a:prstGeom prst="rect">
+            <a:avLst/>
+          </a:prstGeom>
+          <a:noFill/>
+        </p:spPr>
+        <p:txBody>
+          <a:bodyPr wrap="square" anchor="t" lIns="45720" rIns="45720" tIns="27432" bIns="27432">
+            <a:spAutoFit/>
+          </a:bodyPr>
+          <a:lstStyle/>
+          <a:p>
+            <a:pPr algn="l">
+              <a:spcAft>
+                <a:spcPts val="400"/>
+              </a:spcAft>
+            </a:pPr>
+            <a:r>
+              <a:rPr sz="1400" b="0">
+                <a:solidFill>
+                  <a:srgbClr val="1E293B"/>
+                </a:solidFill>
+                <a:latin typeface="Segoe UI"/>
+              </a:rPr>
+              <a:t>Fine for UI logic, but CPU-heavy loops are slower, and some formats (e.g. xlsx) lack good libraries.</a:t>
+            </a:r>
+          </a:p>
+        </p:txBody>
+      </p:sp>
+      <p:sp>
+        <p:nvSpPr>
+          <p:cNvPr id="45" name="Rectangle 44"/>
+          <p:cNvSpPr/>
+          <p:nvPr/>
+        </p:nvSpPr>
+        <p:spPr>
+          <a:xfrm>
+            <a:off x="548640" y="5669280"/>
+            <a:ext cx="11091672" cy="640080"/>
+          </a:xfrm>
+          <a:prstGeom prst="rect">
+            <a:avLst/>
+          </a:prstGeom>
+          <a:solidFill>
+            <a:srgbClr val="0F172A"/>
+          </a:solidFill>
+          <a:ln>
+            <a:noFill/>
+          </a:ln>
+          <a:effectLst/>
+        </p:spPr>
+        <p:style>
+          <a:lnRef idx="1">
+            <a:schemeClr val="accent1"/>
+          </a:lnRef>
+          <a:fillRef idx="3">
+            <a:schemeClr val="accent1"/>
+          </a:fillRef>
+          <a:effectRef idx="2">
+            <a:schemeClr val="accent1"/>
+          </a:effectRef>
+          <a:fontRef idx="minor">
+            <a:schemeClr val="lt1"/>
+          </a:fontRef>
+        </p:style>
+        <p:txBody>
+          <a:bodyPr rtlCol="0" anchor="ctr"/>
+          <a:lstStyle/>
+          <a:p>
+            <a:pPr algn="ctr"/>
+          </a:p>
+        </p:txBody>
+      </p:sp>
+      <p:sp>
+        <p:nvSpPr>
+          <p:cNvPr id="46" name="TextBox 45"/>
+          <p:cNvSpPr txBox="1"/>
+          <p:nvPr/>
+        </p:nvSpPr>
+        <p:spPr>
+          <a:xfrm>
+            <a:off x="731520" y="5669280"/>
+            <a:ext cx="10789920" cy="640080"/>
+          </a:xfrm>
+          <a:prstGeom prst="rect">
+            <a:avLst/>
+          </a:prstGeom>
+          <a:noFill/>
+        </p:spPr>
+        <p:txBody>
+          <a:bodyPr wrap="square" anchor="ctr" lIns="45720" rIns="45720" tIns="27432" bIns="27432">
+            <a:spAutoFit/>
+          </a:bodyPr>
+          <a:lstStyle/>
+          <a:p>
+            <a:pPr algn="l">
+              <a:spcAft>
+                <a:spcPts val="400"/>
+              </a:spcAft>
+            </a:pPr>
+            <a:r>
+              <a:rPr sz="1600" b="1">
+                <a:solidFill>
+                  <a:srgbClr val="FFFFFF"/>
+                </a:solidFill>
+                <a:latin typeface="Segoe UI"/>
+              </a:rPr>
+              <a:t>The question: can Rust compiled to WebAssembly run this work inside the browser, remove the round trip, and still be fast?</a:t>
             </a:r>
           </a:p>
         </p:txBody>
@@ -10813,7 +11339,7 @@
 </file>
 
 <file path=ppt/slides/slide3.xml><?xml version="1.0" encoding="utf-8"?>
-<p:sld xmlns:a="http://schemas.openxmlformats.org/drawingml/2006/main" xmlns:p="http://schemas.openxmlformats.org/presentationml/2006/main" xmlns:r="http://schemas.openxmlformats.org/officeDocument/2006/relationships">
+<p:sld xmlns:a="http://schemas.openxmlformats.org/drawingml/2006/main" xmlns:r="http://schemas.openxmlformats.org/officeDocument/2006/relationships" xmlns:p="http://schemas.openxmlformats.org/presentationml/2006/main">
   <p:cSld>
     <p:bg>
       <p:bgPr>
@@ -10829,7 +11355,14 @@
         <p:cNvGrpSpPr/>
         <p:nvPr/>
       </p:nvGrpSpPr>
-      <p:grpSpPr/>
+      <p:grpSpPr>
+        <a:xfrm>
+          <a:off x="0" y="0"/>
+          <a:ext cx="0" cy="0"/>
+          <a:chOff x="0" y="0"/>
+          <a:chExt cx="0" cy="0"/>
+        </a:xfrm>
+      </p:grpSpPr>
       <p:sp>
         <p:nvSpPr>
           <p:cNvPr id="2" name="Rectangle 1"/>
@@ -10871,6 +11404,7 @@
           <a:lstStyle/>
           <a:p>
             <a:pPr algn="ctr"/>
+            <a:endParaRPr/>
           </a:p>
         </p:txBody>
       </p:sp>
@@ -10915,6 +11449,7 @@
           <a:lstStyle/>
           <a:p>
             <a:pPr algn="ctr"/>
+            <a:endParaRPr/>
           </a:p>
         </p:txBody>
       </p:sp>
@@ -10935,7 +11470,7 @@
           <a:noFill/>
         </p:spPr>
         <p:txBody>
-          <a:bodyPr wrap="square" anchor="ctr" lIns="45720" rIns="45720">
+          <a:bodyPr wrap="square" lIns="45720" rIns="45720" anchor="ctr">
             <a:spAutoFit/>
           </a:bodyPr>
           <a:lstStyle/>
@@ -10974,7 +11509,7 @@
           <a:noFill/>
         </p:spPr>
         <p:txBody>
-          <a:bodyPr wrap="square" anchor="t" lIns="45720" rIns="45720">
+          <a:bodyPr wrap="square" lIns="45720" rIns="45720" anchor="t">
             <a:spAutoFit/>
           </a:bodyPr>
           <a:lstStyle/>
@@ -10991,7 +11526,7 @@
                 </a:solidFill>
                 <a:latin typeface="Segoe UI"/>
               </a:rPr>
-              <a:t>A compiled, memory-safe language running in a sandbox next to JavaScript</a:t>
+              <a:t>Write the heavy code in Rust, ship it to the browser as a small file that runs at near-native speed</a:t>
             </a:r>
           </a:p>
         </p:txBody>
@@ -11005,7 +11540,7 @@
         <p:spPr>
           <a:xfrm>
             <a:off x="548640" y="6446520"/>
-            <a:ext cx="7315200" cy="274320"/>
+            <a:ext cx="7315200" cy="261610"/>
           </a:xfrm>
           <a:prstGeom prst="rect">
             <a:avLst/>
@@ -11013,7 +11548,7 @@
           <a:noFill/>
         </p:spPr>
         <p:txBody>
-          <a:bodyPr wrap="square" anchor="t" lIns="45720" rIns="45720">
+          <a:bodyPr wrap="square" lIns="45720" rIns="45720" anchor="t">
             <a:spAutoFit/>
           </a:bodyPr>
           <a:lstStyle/>
@@ -11024,13 +11559,31 @@
               </a:spcAft>
             </a:pPr>
             <a:r>
-              <a:rPr sz="1100" b="0">
+              <a:rPr sz="1100" b="0" dirty="0">
                 <a:solidFill>
                   <a:srgbClr val="64748B"/>
                 </a:solidFill>
                 <a:latin typeface="Segoe UI"/>
               </a:rPr>
-              <a:t>Rust → WebAssembly  |  Annual new-technology KPI 2026</a:t>
+              <a:t>Rust → </a:t>
+            </a:r>
+            <a:r>
+              <a:rPr sz="1100" b="0" dirty="0" err="1">
+                <a:solidFill>
+                  <a:srgbClr val="64748B"/>
+                </a:solidFill>
+                <a:latin typeface="Segoe UI"/>
+              </a:rPr>
+              <a:t>WebAssembly</a:t>
+            </a:r>
+            <a:r>
+              <a:rPr sz="1100" b="0" dirty="0">
+                <a:solidFill>
+                  <a:srgbClr val="64748B"/>
+                </a:solidFill>
+                <a:latin typeface="Segoe UI"/>
+              </a:rPr>
+              <a:t> </a:t>
             </a:r>
           </a:p>
         </p:txBody>
@@ -11052,7 +11605,7 @@
           <a:noFill/>
         </p:spPr>
         <p:txBody>
-          <a:bodyPr wrap="square" anchor="t" lIns="45720" rIns="45720">
+          <a:bodyPr wrap="square" lIns="45720" rIns="45720" anchor="t">
             <a:spAutoFit/>
           </a:bodyPr>
           <a:lstStyle/>
@@ -11076,14 +11629,53 @@
       </p:sp>
       <p:sp>
         <p:nvSpPr>
-          <p:cNvPr id="8" name="Rectangle 7"/>
+          <p:cNvPr id="8" name="TextBox 7"/>
+          <p:cNvSpPr txBox="1"/>
+          <p:nvPr/>
+        </p:nvSpPr>
+        <p:spPr>
+          <a:xfrm>
+            <a:off x="548640" y="1234440"/>
+            <a:ext cx="11091672" cy="365760"/>
+          </a:xfrm>
+          <a:prstGeom prst="rect">
+            <a:avLst/>
+          </a:prstGeom>
+          <a:noFill/>
+        </p:spPr>
+        <p:txBody>
+          <a:bodyPr wrap="square" anchor="t" lIns="45720" rIns="45720" tIns="27432" bIns="27432">
+            <a:spAutoFit/>
+          </a:bodyPr>
+          <a:lstStyle/>
+          <a:p>
+            <a:pPr algn="l">
+              <a:spcAft>
+                <a:spcPts val="400"/>
+              </a:spcAft>
+            </a:pPr>
+            <a:r>
+              <a:rPr sz="2000" b="1">
+                <a:solidFill>
+                  <a:srgbClr val="1E293B"/>
+                </a:solidFill>
+                <a:latin typeface="Segoe UI"/>
+              </a:rPr>
+              <a:t>Two ingredients, in plain words</a:t>
+            </a:r>
+          </a:p>
+        </p:txBody>
+      </p:sp>
+      <p:sp>
+        <p:nvSpPr>
+          <p:cNvPr id="9" name="Rectangle 8"/>
           <p:cNvSpPr/>
           <p:nvPr/>
         </p:nvSpPr>
         <p:spPr>
           <a:xfrm>
-            <a:off x="548640" y="1554480"/>
-            <a:ext cx="2423160" cy="1737360"/>
+            <a:off x="548640" y="1691640"/>
+            <a:ext cx="3575304" cy="1572768"/>
           </a:xfrm>
           <a:prstGeom prst="rect">
             <a:avLst/>
@@ -11120,14 +11712,14 @@
       </p:sp>
       <p:sp>
         <p:nvSpPr>
-          <p:cNvPr id="9" name="Rectangle 8"/>
+          <p:cNvPr id="10" name="Rectangle 9"/>
           <p:cNvSpPr/>
           <p:nvPr/>
         </p:nvSpPr>
         <p:spPr>
           <a:xfrm>
-            <a:off x="548640" y="1554480"/>
-            <a:ext cx="2423160" cy="91440"/>
+            <a:off x="548640" y="1691640"/>
+            <a:ext cx="82296" cy="1572768"/>
           </a:xfrm>
           <a:prstGeom prst="rect">
             <a:avLst/>
@@ -11164,14 +11756,14 @@
       </p:sp>
       <p:sp>
         <p:nvSpPr>
-          <p:cNvPr id="10" name="TextBox 9"/>
+          <p:cNvPr id="11" name="TextBox 10"/>
           <p:cNvSpPr txBox="1"/>
           <p:nvPr/>
         </p:nvSpPr>
         <p:spPr>
           <a:xfrm>
-            <a:off x="640080" y="1737360"/>
-            <a:ext cx="2240280" cy="457200"/>
+            <a:off x="749808" y="1764792"/>
+            <a:ext cx="3300984" cy="365760"/>
           </a:xfrm>
           <a:prstGeom prst="rect">
             <a:avLst/>
@@ -11179,38 +11771,38 @@
           <a:noFill/>
         </p:spPr>
         <p:txBody>
-          <a:bodyPr wrap="square" anchor="t" lIns="45720" rIns="45720">
+          <a:bodyPr wrap="square" anchor="t" lIns="45720" rIns="45720" tIns="27432" bIns="27432">
             <a:spAutoFit/>
           </a:bodyPr>
           <a:lstStyle/>
           <a:p>
-            <a:pPr algn="ctr">
+            <a:pPr algn="l">
               <a:spcAft>
-                <a:spcPts val="0"/>
+                <a:spcPts val="400"/>
               </a:spcAft>
             </a:pPr>
             <a:r>
-              <a:rPr sz="2000" b="1">
+              <a:rPr sz="1900" b="1">
                 <a:solidFill>
                   <a:srgbClr val="DE6B2F"/>
                 </a:solidFill>
                 <a:latin typeface="Segoe UI"/>
               </a:rPr>
-              <a:t>Rust source</a:t>
-            </a:r>
-          </a:p>
-        </p:txBody>
-      </p:sp>
-      <p:sp>
-        <p:nvSpPr>
-          <p:cNvPr id="11" name="TextBox 10"/>
+              <a:t>Rust</a:t>
+            </a:r>
+          </a:p>
+        </p:txBody>
+      </p:sp>
+      <p:sp>
+        <p:nvSpPr>
+          <p:cNvPr id="12" name="TextBox 11"/>
           <p:cNvSpPr txBox="1"/>
           <p:nvPr/>
         </p:nvSpPr>
         <p:spPr>
           <a:xfrm>
-            <a:off x="640080" y="2286000"/>
-            <a:ext cx="2240280" cy="914400"/>
+            <a:off x="749808" y="2148840"/>
+            <a:ext cx="3300984" cy="274320"/>
           </a:xfrm>
           <a:prstGeom prst="rect">
             <a:avLst/>
@@ -11218,54 +11810,745 @@
           <a:noFill/>
         </p:spPr>
         <p:txBody>
-          <a:bodyPr wrap="square" anchor="t" lIns="45720" rIns="45720">
+          <a:bodyPr wrap="square" anchor="t" lIns="45720" rIns="45720" tIns="27432" bIns="27432">
             <a:spAutoFit/>
           </a:bodyPr>
           <a:lstStyle/>
           <a:p>
-            <a:pPr algn="ctr">
+            <a:pPr algn="l">
               <a:spcAft>
-                <a:spcPts val="0"/>
+                <a:spcPts val="400"/>
               </a:spcAft>
             </a:pPr>
             <a:r>
-              <a:rPr sz="1400" b="0">
-                <a:solidFill>
-                  <a:srgbClr val="1E293B"/>
-                </a:solidFill>
-                <a:latin typeface="Segoe UI"/>
-              </a:rPr>
-              <a:t>lib.rs, about 235 lines</a:t>
-            </a:r>
-          </a:p>
-          <a:p>
-            <a:pPr algn="ctr">
+              <a:rPr sz="1300" b="1">
+                <a:solidFill>
+                  <a:srgbClr val="64748B"/>
+                </a:solidFill>
+                <a:latin typeface="Segoe UI"/>
+              </a:rPr>
+              <a:t>A programming language</a:t>
+            </a:r>
+          </a:p>
+        </p:txBody>
+      </p:sp>
+      <p:sp>
+        <p:nvSpPr>
+          <p:cNvPr id="13" name="TextBox 12"/>
+          <p:cNvSpPr txBox="1"/>
+          <p:nvPr/>
+        </p:nvSpPr>
+        <p:spPr>
+          <a:xfrm>
+            <a:off x="749808" y="2441448"/>
+            <a:ext cx="3255264" cy="822960"/>
+          </a:xfrm>
+          <a:prstGeom prst="rect">
+            <a:avLst/>
+          </a:prstGeom>
+          <a:noFill/>
+        </p:spPr>
+        <p:txBody>
+          <a:bodyPr wrap="square" anchor="t" lIns="45720" rIns="45720" tIns="27432" bIns="27432">
+            <a:spAutoFit/>
+          </a:bodyPr>
+          <a:lstStyle/>
+          <a:p>
+            <a:pPr algn="l">
               <a:spcAft>
-                <a:spcPts val="0"/>
+                <a:spcPts val="400"/>
               </a:spcAft>
             </a:pPr>
             <a:r>
-              <a:rPr sz="1400" b="0">
+              <a:rPr sz="1300" b="0">
                 <a:solidFill>
                   <a:srgbClr val="1E293B"/>
                 </a:solidFill>
                 <a:latin typeface="Segoe UI"/>
               </a:rPr>
-              <a:t>serde, csv, calamine</a:t>
-            </a:r>
-          </a:p>
-        </p:txBody>
-      </p:sp>
-      <p:sp>
-        <p:nvSpPr>
-          <p:cNvPr id="12" name="Right Arrow 11"/>
+              <a:t>Very fast, like C or C++, but it prevents whole classes of memory bugs. Used where speed and safety both matter.</a:t>
+            </a:r>
+          </a:p>
+        </p:txBody>
+      </p:sp>
+      <p:sp>
+        <p:nvSpPr>
+          <p:cNvPr id="14" name="Rectangle 13"/>
           <p:cNvSpPr/>
           <p:nvPr/>
         </p:nvSpPr>
         <p:spPr>
           <a:xfrm>
-            <a:off x="3017520" y="2240280"/>
-            <a:ext cx="365760" cy="320040"/>
+            <a:off x="4306824" y="1691640"/>
+            <a:ext cx="3575304" cy="1572768"/>
+          </a:xfrm>
+          <a:prstGeom prst="rect">
+            <a:avLst/>
+          </a:prstGeom>
+          <a:solidFill>
+            <a:srgbClr val="FFFFFF"/>
+          </a:solidFill>
+          <a:ln>
+            <a:noFill/>
+          </a:ln>
+          <a:effectLst/>
+        </p:spPr>
+        <p:style>
+          <a:lnRef idx="1">
+            <a:schemeClr val="accent1"/>
+          </a:lnRef>
+          <a:fillRef idx="3">
+            <a:schemeClr val="accent1"/>
+          </a:fillRef>
+          <a:effectRef idx="2">
+            <a:schemeClr val="accent1"/>
+          </a:effectRef>
+          <a:fontRef idx="minor">
+            <a:schemeClr val="lt1"/>
+          </a:fontRef>
+        </p:style>
+        <p:txBody>
+          <a:bodyPr rtlCol="0" anchor="ctr"/>
+          <a:lstStyle/>
+          <a:p>
+            <a:pPr algn="ctr"/>
+          </a:p>
+        </p:txBody>
+      </p:sp>
+      <p:sp>
+        <p:nvSpPr>
+          <p:cNvPr id="15" name="Rectangle 14"/>
+          <p:cNvSpPr/>
+          <p:nvPr/>
+        </p:nvSpPr>
+        <p:spPr>
+          <a:xfrm>
+            <a:off x="4306824" y="1691640"/>
+            <a:ext cx="82296" cy="1572768"/>
+          </a:xfrm>
+          <a:prstGeom prst="rect">
+            <a:avLst/>
+          </a:prstGeom>
+          <a:solidFill>
+            <a:srgbClr val="2F9E6F"/>
+          </a:solidFill>
+          <a:ln>
+            <a:noFill/>
+          </a:ln>
+          <a:effectLst/>
+        </p:spPr>
+        <p:style>
+          <a:lnRef idx="1">
+            <a:schemeClr val="accent1"/>
+          </a:lnRef>
+          <a:fillRef idx="3">
+            <a:schemeClr val="accent1"/>
+          </a:fillRef>
+          <a:effectRef idx="2">
+            <a:schemeClr val="accent1"/>
+          </a:effectRef>
+          <a:fontRef idx="minor">
+            <a:schemeClr val="lt1"/>
+          </a:fontRef>
+        </p:style>
+        <p:txBody>
+          <a:bodyPr rtlCol="0" anchor="ctr"/>
+          <a:lstStyle/>
+          <a:p>
+            <a:pPr algn="ctr"/>
+          </a:p>
+        </p:txBody>
+      </p:sp>
+      <p:sp>
+        <p:nvSpPr>
+          <p:cNvPr id="16" name="TextBox 15"/>
+          <p:cNvSpPr txBox="1"/>
+          <p:nvPr/>
+        </p:nvSpPr>
+        <p:spPr>
+          <a:xfrm>
+            <a:off x="4507992" y="1764792"/>
+            <a:ext cx="3300984" cy="365760"/>
+          </a:xfrm>
+          <a:prstGeom prst="rect">
+            <a:avLst/>
+          </a:prstGeom>
+          <a:noFill/>
+        </p:spPr>
+        <p:txBody>
+          <a:bodyPr wrap="square" anchor="t" lIns="45720" rIns="45720" tIns="27432" bIns="27432">
+            <a:spAutoFit/>
+          </a:bodyPr>
+          <a:lstStyle/>
+          <a:p>
+            <a:pPr algn="l">
+              <a:spcAft>
+                <a:spcPts val="400"/>
+              </a:spcAft>
+            </a:pPr>
+            <a:r>
+              <a:rPr sz="1900" b="1">
+                <a:solidFill>
+                  <a:srgbClr val="2F9E6F"/>
+                </a:solidFill>
+                <a:latin typeface="Segoe UI"/>
+              </a:rPr>
+              <a:t>WebAssembly (WASM)</a:t>
+            </a:r>
+          </a:p>
+        </p:txBody>
+      </p:sp>
+      <p:sp>
+        <p:nvSpPr>
+          <p:cNvPr id="17" name="TextBox 16"/>
+          <p:cNvSpPr txBox="1"/>
+          <p:nvPr/>
+        </p:nvSpPr>
+        <p:spPr>
+          <a:xfrm>
+            <a:off x="4507992" y="2148840"/>
+            <a:ext cx="3300984" cy="274320"/>
+          </a:xfrm>
+          <a:prstGeom prst="rect">
+            <a:avLst/>
+          </a:prstGeom>
+          <a:noFill/>
+        </p:spPr>
+        <p:txBody>
+          <a:bodyPr wrap="square" anchor="t" lIns="45720" rIns="45720" tIns="27432" bIns="27432">
+            <a:spAutoFit/>
+          </a:bodyPr>
+          <a:lstStyle/>
+          <a:p>
+            <a:pPr algn="l">
+              <a:spcAft>
+                <a:spcPts val="400"/>
+              </a:spcAft>
+            </a:pPr>
+            <a:r>
+              <a:rPr sz="1300" b="1">
+                <a:solidFill>
+                  <a:srgbClr val="64748B"/>
+                </a:solidFill>
+                <a:latin typeface="Segoe UI"/>
+              </a:rPr>
+              <a:t>A file format browsers can run</a:t>
+            </a:r>
+          </a:p>
+        </p:txBody>
+      </p:sp>
+      <p:sp>
+        <p:nvSpPr>
+          <p:cNvPr id="18" name="TextBox 17"/>
+          <p:cNvSpPr txBox="1"/>
+          <p:nvPr/>
+        </p:nvSpPr>
+        <p:spPr>
+          <a:xfrm>
+            <a:off x="4507992" y="2441448"/>
+            <a:ext cx="3255264" cy="822960"/>
+          </a:xfrm>
+          <a:prstGeom prst="rect">
+            <a:avLst/>
+          </a:prstGeom>
+          <a:noFill/>
+        </p:spPr>
+        <p:txBody>
+          <a:bodyPr wrap="square" anchor="t" lIns="45720" rIns="45720" tIns="27432" bIns="27432">
+            <a:spAutoFit/>
+          </a:bodyPr>
+          <a:lstStyle/>
+          <a:p>
+            <a:pPr algn="l">
+              <a:spcAft>
+                <a:spcPts val="400"/>
+              </a:spcAft>
+            </a:pPr>
+            <a:r>
+              <a:rPr sz="1300" b="0">
+                <a:solidFill>
+                  <a:srgbClr val="1E293B"/>
+                </a:solidFill>
+                <a:latin typeface="Segoe UI"/>
+              </a:rPr>
+              <a:t>A compact, ready-to-run binary that every modern browser runs in a safe sandbox, right next to JavaScript.</a:t>
+            </a:r>
+          </a:p>
+        </p:txBody>
+      </p:sp>
+      <p:sp>
+        <p:nvSpPr>
+          <p:cNvPr id="19" name="Rectangle 18"/>
+          <p:cNvSpPr/>
+          <p:nvPr/>
+        </p:nvSpPr>
+        <p:spPr>
+          <a:xfrm>
+            <a:off x="8065008" y="1691640"/>
+            <a:ext cx="3575304" cy="1572768"/>
+          </a:xfrm>
+          <a:prstGeom prst="rect">
+            <a:avLst/>
+          </a:prstGeom>
+          <a:solidFill>
+            <a:srgbClr val="FFFFFF"/>
+          </a:solidFill>
+          <a:ln>
+            <a:noFill/>
+          </a:ln>
+          <a:effectLst/>
+        </p:spPr>
+        <p:style>
+          <a:lnRef idx="1">
+            <a:schemeClr val="accent1"/>
+          </a:lnRef>
+          <a:fillRef idx="3">
+            <a:schemeClr val="accent1"/>
+          </a:fillRef>
+          <a:effectRef idx="2">
+            <a:schemeClr val="accent1"/>
+          </a:effectRef>
+          <a:fontRef idx="minor">
+            <a:schemeClr val="lt1"/>
+          </a:fontRef>
+        </p:style>
+        <p:txBody>
+          <a:bodyPr rtlCol="0" anchor="ctr"/>
+          <a:lstStyle/>
+          <a:p>
+            <a:pPr algn="ctr"/>
+          </a:p>
+        </p:txBody>
+      </p:sp>
+      <p:sp>
+        <p:nvSpPr>
+          <p:cNvPr id="20" name="Rectangle 19"/>
+          <p:cNvSpPr/>
+          <p:nvPr/>
+        </p:nvSpPr>
+        <p:spPr>
+          <a:xfrm>
+            <a:off x="8065008" y="1691640"/>
+            <a:ext cx="82296" cy="1572768"/>
+          </a:xfrm>
+          <a:prstGeom prst="rect">
+            <a:avLst/>
+          </a:prstGeom>
+          <a:solidFill>
+            <a:srgbClr val="6B4FE8"/>
+          </a:solidFill>
+          <a:ln>
+            <a:noFill/>
+          </a:ln>
+          <a:effectLst/>
+        </p:spPr>
+        <p:style>
+          <a:lnRef idx="1">
+            <a:schemeClr val="accent1"/>
+          </a:lnRef>
+          <a:fillRef idx="3">
+            <a:schemeClr val="accent1"/>
+          </a:fillRef>
+          <a:effectRef idx="2">
+            <a:schemeClr val="accent1"/>
+          </a:effectRef>
+          <a:fontRef idx="minor">
+            <a:schemeClr val="lt1"/>
+          </a:fontRef>
+        </p:style>
+        <p:txBody>
+          <a:bodyPr rtlCol="0" anchor="ctr"/>
+          <a:lstStyle/>
+          <a:p>
+            <a:pPr algn="ctr"/>
+          </a:p>
+        </p:txBody>
+      </p:sp>
+      <p:sp>
+        <p:nvSpPr>
+          <p:cNvPr id="21" name="TextBox 20"/>
+          <p:cNvSpPr txBox="1"/>
+          <p:nvPr/>
+        </p:nvSpPr>
+        <p:spPr>
+          <a:xfrm>
+            <a:off x="8266176" y="1764792"/>
+            <a:ext cx="3300984" cy="365760"/>
+          </a:xfrm>
+          <a:prstGeom prst="rect">
+            <a:avLst/>
+          </a:prstGeom>
+          <a:noFill/>
+        </p:spPr>
+        <p:txBody>
+          <a:bodyPr wrap="square" anchor="t" lIns="45720" rIns="45720" tIns="27432" bIns="27432">
+            <a:spAutoFit/>
+          </a:bodyPr>
+          <a:lstStyle/>
+          <a:p>
+            <a:pPr algn="l">
+              <a:spcAft>
+                <a:spcPts val="400"/>
+              </a:spcAft>
+            </a:pPr>
+            <a:r>
+              <a:rPr sz="1900" b="1">
+                <a:solidFill>
+                  <a:srgbClr val="6B4FE8"/>
+                </a:solidFill>
+                <a:latin typeface="Segoe UI"/>
+              </a:rPr>
+              <a:t>Rust + WASM</a:t>
+            </a:r>
+          </a:p>
+        </p:txBody>
+      </p:sp>
+      <p:sp>
+        <p:nvSpPr>
+          <p:cNvPr id="22" name="TextBox 21"/>
+          <p:cNvSpPr txBox="1"/>
+          <p:nvPr/>
+        </p:nvSpPr>
+        <p:spPr>
+          <a:xfrm>
+            <a:off x="8266176" y="2148840"/>
+            <a:ext cx="3300984" cy="274320"/>
+          </a:xfrm>
+          <a:prstGeom prst="rect">
+            <a:avLst/>
+          </a:prstGeom>
+          <a:noFill/>
+        </p:spPr>
+        <p:txBody>
+          <a:bodyPr wrap="square" anchor="t" lIns="45720" rIns="45720" tIns="27432" bIns="27432">
+            <a:spAutoFit/>
+          </a:bodyPr>
+          <a:lstStyle/>
+          <a:p>
+            <a:pPr algn="l">
+              <a:spcAft>
+                <a:spcPts val="400"/>
+              </a:spcAft>
+            </a:pPr>
+            <a:r>
+              <a:rPr sz="1300" b="1">
+                <a:solidFill>
+                  <a:srgbClr val="64748B"/>
+                </a:solidFill>
+                <a:latin typeface="Segoe UI"/>
+              </a:rPr>
+              <a:t>Fast code, inside the browser</a:t>
+            </a:r>
+          </a:p>
+        </p:txBody>
+      </p:sp>
+      <p:sp>
+        <p:nvSpPr>
+          <p:cNvPr id="23" name="TextBox 22"/>
+          <p:cNvSpPr txBox="1"/>
+          <p:nvPr/>
+        </p:nvSpPr>
+        <p:spPr>
+          <a:xfrm>
+            <a:off x="8266176" y="2441448"/>
+            <a:ext cx="3255264" cy="822960"/>
+          </a:xfrm>
+          <a:prstGeom prst="rect">
+            <a:avLst/>
+          </a:prstGeom>
+          <a:noFill/>
+        </p:spPr>
+        <p:txBody>
+          <a:bodyPr wrap="square" anchor="t" lIns="45720" rIns="45720" tIns="27432" bIns="27432">
+            <a:spAutoFit/>
+          </a:bodyPr>
+          <a:lstStyle/>
+          <a:p>
+            <a:pPr algn="l">
+              <a:spcAft>
+                <a:spcPts val="400"/>
+              </a:spcAft>
+            </a:pPr>
+            <a:r>
+              <a:rPr sz="1300" b="0">
+                <a:solidFill>
+                  <a:srgbClr val="1E293B"/>
+                </a:solidFill>
+                <a:latin typeface="Segoe UI"/>
+              </a:rPr>
+              <a:t>Compile Rust into a .wasm file; JavaScript loads it and calls it like a normal function.</a:t>
+            </a:r>
+          </a:p>
+        </p:txBody>
+      </p:sp>
+      <p:sp>
+        <p:nvSpPr>
+          <p:cNvPr id="24" name="TextBox 23"/>
+          <p:cNvSpPr txBox="1"/>
+          <p:nvPr/>
+        </p:nvSpPr>
+        <p:spPr>
+          <a:xfrm>
+            <a:off x="548640" y="3337560"/>
+            <a:ext cx="11091672" cy="365760"/>
+          </a:xfrm>
+          <a:prstGeom prst="rect">
+            <a:avLst/>
+          </a:prstGeom>
+          <a:noFill/>
+        </p:spPr>
+        <p:txBody>
+          <a:bodyPr wrap="square" anchor="t" lIns="45720" rIns="45720" tIns="27432" bIns="27432">
+            <a:spAutoFit/>
+          </a:bodyPr>
+          <a:lstStyle/>
+          <a:p>
+            <a:pPr algn="l">
+              <a:spcAft>
+                <a:spcPts val="400"/>
+              </a:spcAft>
+            </a:pPr>
+            <a:r>
+              <a:rPr sz="2000" b="1">
+                <a:solidFill>
+                  <a:srgbClr val="1E293B"/>
+                </a:solidFill>
+                <a:latin typeface="Segoe UI"/>
+              </a:rPr>
+              <a:t>How it works, step by step</a:t>
+            </a:r>
+          </a:p>
+        </p:txBody>
+      </p:sp>
+      <p:sp>
+        <p:nvSpPr>
+          <p:cNvPr id="25" name="Rectangle 24"/>
+          <p:cNvSpPr/>
+          <p:nvPr/>
+        </p:nvSpPr>
+        <p:spPr>
+          <a:xfrm>
+            <a:off x="548640" y="3794760"/>
+            <a:ext cx="2464308" cy="1691640"/>
+          </a:xfrm>
+          <a:prstGeom prst="rect">
+            <a:avLst/>
+          </a:prstGeom>
+          <a:solidFill>
+            <a:srgbClr val="FFFFFF"/>
+          </a:solidFill>
+          <a:ln>
+            <a:noFill/>
+          </a:ln>
+          <a:effectLst/>
+        </p:spPr>
+        <p:style>
+          <a:lnRef idx="1">
+            <a:schemeClr val="accent1"/>
+          </a:lnRef>
+          <a:fillRef idx="3">
+            <a:schemeClr val="accent1"/>
+          </a:fillRef>
+          <a:effectRef idx="2">
+            <a:schemeClr val="accent1"/>
+          </a:effectRef>
+          <a:fontRef idx="minor">
+            <a:schemeClr val="lt1"/>
+          </a:fontRef>
+        </p:style>
+        <p:txBody>
+          <a:bodyPr rtlCol="0" anchor="ctr"/>
+          <a:lstStyle/>
+          <a:p>
+            <a:pPr algn="ctr"/>
+          </a:p>
+        </p:txBody>
+      </p:sp>
+      <p:sp>
+        <p:nvSpPr>
+          <p:cNvPr id="26" name="Rectangle 25"/>
+          <p:cNvSpPr/>
+          <p:nvPr/>
+        </p:nvSpPr>
+        <p:spPr>
+          <a:xfrm>
+            <a:off x="548640" y="3794760"/>
+            <a:ext cx="2464308" cy="64008"/>
+          </a:xfrm>
+          <a:prstGeom prst="rect">
+            <a:avLst/>
+          </a:prstGeom>
+          <a:solidFill>
+            <a:srgbClr val="DE6B2F"/>
+          </a:solidFill>
+          <a:ln>
+            <a:noFill/>
+          </a:ln>
+          <a:effectLst/>
+        </p:spPr>
+        <p:style>
+          <a:lnRef idx="1">
+            <a:schemeClr val="accent1"/>
+          </a:lnRef>
+          <a:fillRef idx="3">
+            <a:schemeClr val="accent1"/>
+          </a:fillRef>
+          <a:effectRef idx="2">
+            <a:schemeClr val="accent1"/>
+          </a:effectRef>
+          <a:fontRef idx="minor">
+            <a:schemeClr val="lt1"/>
+          </a:fontRef>
+        </p:style>
+        <p:txBody>
+          <a:bodyPr rtlCol="0" anchor="ctr"/>
+          <a:lstStyle/>
+          <a:p>
+            <a:pPr algn="ctr"/>
+          </a:p>
+        </p:txBody>
+      </p:sp>
+      <p:sp>
+        <p:nvSpPr>
+          <p:cNvPr id="27" name="Oval 26"/>
+          <p:cNvSpPr/>
+          <p:nvPr/>
+        </p:nvSpPr>
+        <p:spPr>
+          <a:xfrm>
+            <a:off x="685800" y="3977640"/>
+            <a:ext cx="384048" cy="384048"/>
+          </a:xfrm>
+          <a:prstGeom prst="ellipse">
+            <a:avLst/>
+          </a:prstGeom>
+          <a:solidFill>
+            <a:srgbClr val="DE6B2F"/>
+          </a:solidFill>
+          <a:ln>
+            <a:noFill/>
+          </a:ln>
+          <a:effectLst/>
+        </p:spPr>
+        <p:style>
+          <a:lnRef idx="1">
+            <a:schemeClr val="accent1"/>
+          </a:lnRef>
+          <a:fillRef idx="3">
+            <a:schemeClr val="accent1"/>
+          </a:fillRef>
+          <a:effectRef idx="2">
+            <a:schemeClr val="accent1"/>
+          </a:effectRef>
+          <a:fontRef idx="minor">
+            <a:schemeClr val="lt1"/>
+          </a:fontRef>
+        </p:style>
+        <p:txBody>
+          <a:bodyPr rtlCol="0" anchor="ctr" lIns="0" rIns="0" tIns="0" bIns="0"/>
+          <a:lstStyle/>
+          <a:p>
+            <a:pPr algn="ctr"/>
+            <a:r>
+              <a:rPr sz="1500" b="1">
+                <a:solidFill>
+                  <a:srgbClr val="FFFFFF"/>
+                </a:solidFill>
+                <a:latin typeface="Segoe UI"/>
+              </a:rPr>
+              <a:t>1</a:t>
+            </a:r>
+          </a:p>
+        </p:txBody>
+      </p:sp>
+      <p:sp>
+        <p:nvSpPr>
+          <p:cNvPr id="28" name="TextBox 27"/>
+          <p:cNvSpPr txBox="1"/>
+          <p:nvPr/>
+        </p:nvSpPr>
+        <p:spPr>
+          <a:xfrm>
+            <a:off x="1143000" y="3977640"/>
+            <a:ext cx="1824228" cy="384048"/>
+          </a:xfrm>
+          <a:prstGeom prst="rect">
+            <a:avLst/>
+          </a:prstGeom>
+          <a:noFill/>
+        </p:spPr>
+        <p:txBody>
+          <a:bodyPr wrap="square" anchor="ctr" lIns="45720" rIns="45720" tIns="27432" bIns="27432">
+            <a:spAutoFit/>
+          </a:bodyPr>
+          <a:lstStyle/>
+          <a:p>
+            <a:pPr algn="l">
+              <a:spcAft>
+                <a:spcPts val="400"/>
+              </a:spcAft>
+            </a:pPr>
+            <a:r>
+              <a:rPr sz="1700" b="1">
+                <a:solidFill>
+                  <a:srgbClr val="DE6B2F"/>
+                </a:solidFill>
+                <a:latin typeface="Segoe UI"/>
+              </a:rPr>
+              <a:t>Write</a:t>
+            </a:r>
+          </a:p>
+        </p:txBody>
+      </p:sp>
+      <p:sp>
+        <p:nvSpPr>
+          <p:cNvPr id="29" name="TextBox 28"/>
+          <p:cNvSpPr txBox="1"/>
+          <p:nvPr/>
+        </p:nvSpPr>
+        <p:spPr>
+          <a:xfrm>
+            <a:off x="658368" y="4453128"/>
+            <a:ext cx="2263140" cy="822960"/>
+          </a:xfrm>
+          <a:prstGeom prst="rect">
+            <a:avLst/>
+          </a:prstGeom>
+          <a:noFill/>
+        </p:spPr>
+        <p:txBody>
+          <a:bodyPr wrap="square" anchor="t" lIns="45720" rIns="45720" tIns="27432" bIns="27432">
+            <a:spAutoFit/>
+          </a:bodyPr>
+          <a:lstStyle/>
+          <a:p>
+            <a:pPr algn="l">
+              <a:spcAft>
+                <a:spcPts val="400"/>
+              </a:spcAft>
+            </a:pPr>
+            <a:r>
+              <a:rPr sz="1300" b="0">
+                <a:solidFill>
+                  <a:srgbClr val="1E293B"/>
+                </a:solidFill>
+                <a:latin typeface="Segoe UI"/>
+              </a:rPr>
+              <a:t>The logic (resize an image, validate a CSV) is written once in Rust: about 235 lines here.</a:t>
+            </a:r>
+          </a:p>
+        </p:txBody>
+      </p:sp>
+      <p:sp>
+        <p:nvSpPr>
+          <p:cNvPr id="30" name="Right Arrow 29"/>
+          <p:cNvSpPr/>
+          <p:nvPr/>
+        </p:nvSpPr>
+        <p:spPr>
+          <a:xfrm>
+            <a:off x="3067812" y="4389120"/>
+            <a:ext cx="301752" cy="274320"/>
           </a:xfrm>
           <a:prstGeom prst="rightArrow">
             <a:avLst/>
@@ -11302,14 +12585,14 @@
       </p:sp>
       <p:sp>
         <p:nvSpPr>
-          <p:cNvPr id="13" name="Rectangle 12"/>
+          <p:cNvPr id="31" name="Rectangle 30"/>
           <p:cNvSpPr/>
           <p:nvPr/>
         </p:nvSpPr>
         <p:spPr>
           <a:xfrm>
-            <a:off x="3429000" y="1554480"/>
-            <a:ext cx="2423160" cy="1737360"/>
+            <a:off x="3424428" y="3794760"/>
+            <a:ext cx="2464308" cy="1691640"/>
           </a:xfrm>
           <a:prstGeom prst="rect">
             <a:avLst/>
@@ -11346,16 +12629,191 @@
       </p:sp>
       <p:sp>
         <p:nvSpPr>
-          <p:cNvPr id="14" name="Rectangle 13"/>
+          <p:cNvPr id="32" name="Rectangle 31"/>
           <p:cNvSpPr/>
           <p:nvPr/>
         </p:nvSpPr>
         <p:spPr>
           <a:xfrm>
-            <a:off x="3429000" y="1554480"/>
-            <a:ext cx="2423160" cy="91440"/>
-          </a:xfrm>
-          <a:prstGeom prst="rect">
+            <a:off x="3424428" y="3794760"/>
+            <a:ext cx="2464308" cy="64008"/>
+          </a:xfrm>
+          <a:prstGeom prst="rect">
+            <a:avLst/>
+          </a:prstGeom>
+          <a:solidFill>
+            <a:srgbClr val="5B6B86"/>
+          </a:solidFill>
+          <a:ln>
+            <a:noFill/>
+          </a:ln>
+          <a:effectLst/>
+        </p:spPr>
+        <p:style>
+          <a:lnRef idx="1">
+            <a:schemeClr val="accent1"/>
+          </a:lnRef>
+          <a:fillRef idx="3">
+            <a:schemeClr val="accent1"/>
+          </a:fillRef>
+          <a:effectRef idx="2">
+            <a:schemeClr val="accent1"/>
+          </a:effectRef>
+          <a:fontRef idx="minor">
+            <a:schemeClr val="lt1"/>
+          </a:fontRef>
+        </p:style>
+        <p:txBody>
+          <a:bodyPr rtlCol="0" anchor="ctr"/>
+          <a:lstStyle/>
+          <a:p>
+            <a:pPr algn="ctr"/>
+          </a:p>
+        </p:txBody>
+      </p:sp>
+      <p:sp>
+        <p:nvSpPr>
+          <p:cNvPr id="33" name="Oval 32"/>
+          <p:cNvSpPr/>
+          <p:nvPr/>
+        </p:nvSpPr>
+        <p:spPr>
+          <a:xfrm>
+            <a:off x="3561588" y="3977640"/>
+            <a:ext cx="384048" cy="384048"/>
+          </a:xfrm>
+          <a:prstGeom prst="ellipse">
+            <a:avLst/>
+          </a:prstGeom>
+          <a:solidFill>
+            <a:srgbClr val="5B6B86"/>
+          </a:solidFill>
+          <a:ln>
+            <a:noFill/>
+          </a:ln>
+          <a:effectLst/>
+        </p:spPr>
+        <p:style>
+          <a:lnRef idx="1">
+            <a:schemeClr val="accent1"/>
+          </a:lnRef>
+          <a:fillRef idx="3">
+            <a:schemeClr val="accent1"/>
+          </a:fillRef>
+          <a:effectRef idx="2">
+            <a:schemeClr val="accent1"/>
+          </a:effectRef>
+          <a:fontRef idx="minor">
+            <a:schemeClr val="lt1"/>
+          </a:fontRef>
+        </p:style>
+        <p:txBody>
+          <a:bodyPr rtlCol="0" anchor="ctr" lIns="0" rIns="0" tIns="0" bIns="0"/>
+          <a:lstStyle/>
+          <a:p>
+            <a:pPr algn="ctr"/>
+            <a:r>
+              <a:rPr sz="1500" b="1">
+                <a:solidFill>
+                  <a:srgbClr val="FFFFFF"/>
+                </a:solidFill>
+                <a:latin typeface="Segoe UI"/>
+              </a:rPr>
+              <a:t>2</a:t>
+            </a:r>
+          </a:p>
+        </p:txBody>
+      </p:sp>
+      <p:sp>
+        <p:nvSpPr>
+          <p:cNvPr id="34" name="TextBox 33"/>
+          <p:cNvSpPr txBox="1"/>
+          <p:nvPr/>
+        </p:nvSpPr>
+        <p:spPr>
+          <a:xfrm>
+            <a:off x="4018788" y="3977640"/>
+            <a:ext cx="1824228" cy="384048"/>
+          </a:xfrm>
+          <a:prstGeom prst="rect">
+            <a:avLst/>
+          </a:prstGeom>
+          <a:noFill/>
+        </p:spPr>
+        <p:txBody>
+          <a:bodyPr wrap="square" anchor="ctr" lIns="45720" rIns="45720" tIns="27432" bIns="27432">
+            <a:spAutoFit/>
+          </a:bodyPr>
+          <a:lstStyle/>
+          <a:p>
+            <a:pPr algn="l">
+              <a:spcAft>
+                <a:spcPts val="400"/>
+              </a:spcAft>
+            </a:pPr>
+            <a:r>
+              <a:rPr sz="1700" b="1">
+                <a:solidFill>
+                  <a:srgbClr val="5B6B86"/>
+                </a:solidFill>
+                <a:latin typeface="Segoe UI"/>
+              </a:rPr>
+              <a:t>Compile</a:t>
+            </a:r>
+          </a:p>
+        </p:txBody>
+      </p:sp>
+      <p:sp>
+        <p:nvSpPr>
+          <p:cNvPr id="35" name="TextBox 34"/>
+          <p:cNvSpPr txBox="1"/>
+          <p:nvPr/>
+        </p:nvSpPr>
+        <p:spPr>
+          <a:xfrm>
+            <a:off x="3534156" y="4453128"/>
+            <a:ext cx="2263140" cy="822960"/>
+          </a:xfrm>
+          <a:prstGeom prst="rect">
+            <a:avLst/>
+          </a:prstGeom>
+          <a:noFill/>
+        </p:spPr>
+        <p:txBody>
+          <a:bodyPr wrap="square" anchor="t" lIns="45720" rIns="45720" tIns="27432" bIns="27432">
+            <a:spAutoFit/>
+          </a:bodyPr>
+          <a:lstStyle/>
+          <a:p>
+            <a:pPr algn="l">
+              <a:spcAft>
+                <a:spcPts val="400"/>
+              </a:spcAft>
+            </a:pPr>
+            <a:r>
+              <a:rPr sz="1300" b="0">
+                <a:solidFill>
+                  <a:srgbClr val="1E293B"/>
+                </a:solidFill>
+                <a:latin typeface="Segoe UI"/>
+              </a:rPr>
+              <a:t>A build tool turns it into one .wasm file: 539 KB, compiled by the browser in 30 ms.</a:t>
+            </a:r>
+          </a:p>
+        </p:txBody>
+      </p:sp>
+      <p:sp>
+        <p:nvSpPr>
+          <p:cNvPr id="36" name="Right Arrow 35"/>
+          <p:cNvSpPr/>
+          <p:nvPr/>
+        </p:nvSpPr>
+        <p:spPr>
+          <a:xfrm>
+            <a:off x="5943600" y="4389120"/>
+            <a:ext cx="301752" cy="274320"/>
+          </a:xfrm>
+          <a:prstGeom prst="rightArrow">
             <a:avLst/>
           </a:prstGeom>
           <a:solidFill>
@@ -11390,14 +12848,155 @@
       </p:sp>
       <p:sp>
         <p:nvSpPr>
-          <p:cNvPr id="15" name="TextBox 14"/>
+          <p:cNvPr id="37" name="Rectangle 36"/>
+          <p:cNvSpPr/>
+          <p:nvPr/>
+        </p:nvSpPr>
+        <p:spPr>
+          <a:xfrm>
+            <a:off x="6300216" y="3794760"/>
+            <a:ext cx="2464308" cy="1691640"/>
+          </a:xfrm>
+          <a:prstGeom prst="rect">
+            <a:avLst/>
+          </a:prstGeom>
+          <a:solidFill>
+            <a:srgbClr val="FFFFFF"/>
+          </a:solidFill>
+          <a:ln>
+            <a:noFill/>
+          </a:ln>
+          <a:effectLst/>
+        </p:spPr>
+        <p:style>
+          <a:lnRef idx="1">
+            <a:schemeClr val="accent1"/>
+          </a:lnRef>
+          <a:fillRef idx="3">
+            <a:schemeClr val="accent1"/>
+          </a:fillRef>
+          <a:effectRef idx="2">
+            <a:schemeClr val="accent1"/>
+          </a:effectRef>
+          <a:fontRef idx="minor">
+            <a:schemeClr val="lt1"/>
+          </a:fontRef>
+        </p:style>
+        <p:txBody>
+          <a:bodyPr rtlCol="0" anchor="ctr"/>
+          <a:lstStyle/>
+          <a:p>
+            <a:pPr algn="ctr"/>
+          </a:p>
+        </p:txBody>
+      </p:sp>
+      <p:sp>
+        <p:nvSpPr>
+          <p:cNvPr id="38" name="Rectangle 37"/>
+          <p:cNvSpPr/>
+          <p:nvPr/>
+        </p:nvSpPr>
+        <p:spPr>
+          <a:xfrm>
+            <a:off x="6300216" y="3794760"/>
+            <a:ext cx="2464308" cy="64008"/>
+          </a:xfrm>
+          <a:prstGeom prst="rect">
+            <a:avLst/>
+          </a:prstGeom>
+          <a:solidFill>
+            <a:srgbClr val="2F9E6F"/>
+          </a:solidFill>
+          <a:ln>
+            <a:noFill/>
+          </a:ln>
+          <a:effectLst/>
+        </p:spPr>
+        <p:style>
+          <a:lnRef idx="1">
+            <a:schemeClr val="accent1"/>
+          </a:lnRef>
+          <a:fillRef idx="3">
+            <a:schemeClr val="accent1"/>
+          </a:fillRef>
+          <a:effectRef idx="2">
+            <a:schemeClr val="accent1"/>
+          </a:effectRef>
+          <a:fontRef idx="minor">
+            <a:schemeClr val="lt1"/>
+          </a:fontRef>
+        </p:style>
+        <p:txBody>
+          <a:bodyPr rtlCol="0" anchor="ctr"/>
+          <a:lstStyle/>
+          <a:p>
+            <a:pPr algn="ctr"/>
+          </a:p>
+        </p:txBody>
+      </p:sp>
+      <p:sp>
+        <p:nvSpPr>
+          <p:cNvPr id="39" name="Oval 38"/>
+          <p:cNvSpPr/>
+          <p:nvPr/>
+        </p:nvSpPr>
+        <p:spPr>
+          <a:xfrm>
+            <a:off x="6437376" y="3977640"/>
+            <a:ext cx="384048" cy="384048"/>
+          </a:xfrm>
+          <a:prstGeom prst="ellipse">
+            <a:avLst/>
+          </a:prstGeom>
+          <a:solidFill>
+            <a:srgbClr val="2F9E6F"/>
+          </a:solidFill>
+          <a:ln>
+            <a:noFill/>
+          </a:ln>
+          <a:effectLst/>
+        </p:spPr>
+        <p:style>
+          <a:lnRef idx="1">
+            <a:schemeClr val="accent1"/>
+          </a:lnRef>
+          <a:fillRef idx="3">
+            <a:schemeClr val="accent1"/>
+          </a:fillRef>
+          <a:effectRef idx="2">
+            <a:schemeClr val="accent1"/>
+          </a:effectRef>
+          <a:fontRef idx="minor">
+            <a:schemeClr val="lt1"/>
+          </a:fontRef>
+        </p:style>
+        <p:txBody>
+          <a:bodyPr rtlCol="0" anchor="ctr" lIns="0" rIns="0" tIns="0" bIns="0"/>
+          <a:lstStyle/>
+          <a:p>
+            <a:pPr algn="ctr"/>
+            <a:r>
+              <a:rPr sz="1500" b="1">
+                <a:solidFill>
+                  <a:srgbClr val="FFFFFF"/>
+                </a:solidFill>
+                <a:latin typeface="Segoe UI"/>
+              </a:rPr>
+              <a:t>3</a:t>
+            </a:r>
+          </a:p>
+        </p:txBody>
+      </p:sp>
+      <p:sp>
+        <p:nvSpPr>
+          <p:cNvPr id="40" name="TextBox 39"/>
           <p:cNvSpPr txBox="1"/>
           <p:nvPr/>
         </p:nvSpPr>
         <p:spPr>
           <a:xfrm>
-            <a:off x="3520440" y="1737360"/>
-            <a:ext cx="2240280" cy="457200"/>
+            <a:off x="6894576" y="3977640"/>
+            <a:ext cx="1824228" cy="384048"/>
           </a:xfrm>
           <a:prstGeom prst="rect">
             <a:avLst/>
@@ -11405,38 +13004,38 @@
           <a:noFill/>
         </p:spPr>
         <p:txBody>
-          <a:bodyPr wrap="square" anchor="t" lIns="45720" rIns="45720">
+          <a:bodyPr wrap="square" anchor="ctr" lIns="45720" rIns="45720" tIns="27432" bIns="27432">
             <a:spAutoFit/>
           </a:bodyPr>
           <a:lstStyle/>
           <a:p>
-            <a:pPr algn="ctr">
+            <a:pPr algn="l">
               <a:spcAft>
-                <a:spcPts val="0"/>
+                <a:spcPts val="400"/>
               </a:spcAft>
             </a:pPr>
             <a:r>
-              <a:rPr sz="2000" b="1">
-                <a:solidFill>
-                  <a:srgbClr val="64748B"/>
-                </a:solidFill>
-                <a:latin typeface="Segoe UI"/>
-              </a:rPr>
-              <a:t>wasm-pack</a:t>
-            </a:r>
-          </a:p>
-        </p:txBody>
-      </p:sp>
-      <p:sp>
-        <p:nvSpPr>
-          <p:cNvPr id="16" name="TextBox 15"/>
+              <a:rPr sz="1700" b="1">
+                <a:solidFill>
+                  <a:srgbClr val="2F9E6F"/>
+                </a:solidFill>
+                <a:latin typeface="Segoe UI"/>
+              </a:rPr>
+              <a:t>Load</a:t>
+            </a:r>
+          </a:p>
+        </p:txBody>
+      </p:sp>
+      <p:sp>
+        <p:nvSpPr>
+          <p:cNvPr id="41" name="TextBox 40"/>
           <p:cNvSpPr txBox="1"/>
           <p:nvPr/>
         </p:nvSpPr>
         <p:spPr>
           <a:xfrm>
-            <a:off x="3520440" y="2286000"/>
-            <a:ext cx="2240280" cy="914400"/>
+            <a:off x="6409944" y="4453128"/>
+            <a:ext cx="2263140" cy="822960"/>
           </a:xfrm>
           <a:prstGeom prst="rect">
             <a:avLst/>
@@ -11444,54 +13043,38 @@
           <a:noFill/>
         </p:spPr>
         <p:txBody>
-          <a:bodyPr wrap="square" anchor="t" lIns="45720" rIns="45720">
+          <a:bodyPr wrap="square" anchor="t" lIns="45720" rIns="45720" tIns="27432" bIns="27432">
             <a:spAutoFit/>
           </a:bodyPr>
           <a:lstStyle/>
           <a:p>
-            <a:pPr algn="ctr">
+            <a:pPr algn="l">
               <a:spcAft>
-                <a:spcPts val="0"/>
+                <a:spcPts val="400"/>
               </a:spcAft>
             </a:pPr>
             <a:r>
-              <a:rPr sz="1400" b="0">
+              <a:rPr sz="1300" b="0">
                 <a:solidFill>
                   <a:srgbClr val="1E293B"/>
                 </a:solidFill>
                 <a:latin typeface="Segoe UI"/>
               </a:rPr>
-              <a:t>wasm-bindgen generates</a:t>
-            </a:r>
-          </a:p>
-          <a:p>
-            <a:pPr algn="ctr">
-              <a:spcAft>
-                <a:spcPts val="0"/>
-              </a:spcAft>
-            </a:pPr>
-            <a:r>
-              <a:rPr sz="1400" b="0">
-                <a:solidFill>
-                  <a:srgbClr val="1E293B"/>
-                </a:solidFill>
-                <a:latin typeface="Segoe UI"/>
-              </a:rPr>
-              <a:t>JS glue + TypeScript types</a:t>
-            </a:r>
-          </a:p>
-        </p:txBody>
-      </p:sp>
-      <p:sp>
-        <p:nvSpPr>
-          <p:cNvPr id="17" name="Right Arrow 16"/>
+              <a:t>The web page downloads the file and loads it in the background, so the screen never freezes.</a:t>
+            </a:r>
+          </a:p>
+        </p:txBody>
+      </p:sp>
+      <p:sp>
+        <p:nvSpPr>
+          <p:cNvPr id="42" name="Right Arrow 41"/>
           <p:cNvSpPr/>
           <p:nvPr/>
         </p:nvSpPr>
         <p:spPr>
           <a:xfrm>
-            <a:off x="5897880" y="2240280"/>
-            <a:ext cx="365760" cy="320040"/>
+            <a:off x="8819388" y="4389120"/>
+            <a:ext cx="301752" cy="274320"/>
           </a:xfrm>
           <a:prstGeom prst="rightArrow">
             <a:avLst/>
@@ -11528,14 +13111,14 @@
       </p:sp>
       <p:sp>
         <p:nvSpPr>
-          <p:cNvPr id="18" name="Rectangle 17"/>
+          <p:cNvPr id="43" name="Rectangle 42"/>
           <p:cNvSpPr/>
           <p:nvPr/>
         </p:nvSpPr>
         <p:spPr>
           <a:xfrm>
-            <a:off x="6309359" y="1554480"/>
-            <a:ext cx="2423160" cy="1737360"/>
+            <a:off x="9176004" y="3794760"/>
+            <a:ext cx="2464308" cy="1691640"/>
           </a:xfrm>
           <a:prstGeom prst="rect">
             <a:avLst/>
@@ -11572,20 +13155,20 @@
       </p:sp>
       <p:sp>
         <p:nvSpPr>
-          <p:cNvPr id="19" name="Rectangle 18"/>
+          <p:cNvPr id="44" name="Rectangle 43"/>
           <p:cNvSpPr/>
           <p:nvPr/>
         </p:nvSpPr>
         <p:spPr>
           <a:xfrm>
-            <a:off x="6309359" y="1554480"/>
-            <a:ext cx="2423160" cy="91440"/>
+            <a:off x="9176004" y="3794760"/>
+            <a:ext cx="2464308" cy="64008"/>
           </a:xfrm>
           <a:prstGeom prst="rect">
             <a:avLst/>
           </a:prstGeom>
           <a:solidFill>
-            <a:srgbClr val="2F9E6F"/>
+            <a:srgbClr val="6B4FE8"/>
           </a:solidFill>
           <a:ln>
             <a:noFill/>
@@ -11616,114 +13199,20 @@
       </p:sp>
       <p:sp>
         <p:nvSpPr>
-          <p:cNvPr id="20" name="TextBox 19"/>
-          <p:cNvSpPr txBox="1"/>
-          <p:nvPr/>
-        </p:nvSpPr>
-        <p:spPr>
-          <a:xfrm>
-            <a:off x="6400799" y="1737360"/>
-            <a:ext cx="2240280" cy="457200"/>
-          </a:xfrm>
-          <a:prstGeom prst="rect">
-            <a:avLst/>
-          </a:prstGeom>
-          <a:noFill/>
-        </p:spPr>
-        <p:txBody>
-          <a:bodyPr wrap="square" anchor="t" lIns="45720" rIns="45720">
-            <a:spAutoFit/>
-          </a:bodyPr>
-          <a:lstStyle/>
-          <a:p>
-            <a:pPr algn="ctr">
-              <a:spcAft>
-                <a:spcPts val="0"/>
-              </a:spcAft>
-            </a:pPr>
-            <a:r>
-              <a:rPr sz="2000" b="1">
-                <a:solidFill>
-                  <a:srgbClr val="2F9E6F"/>
-                </a:solidFill>
-                <a:latin typeface="Segoe UI"/>
-              </a:rPr>
-              <a:t>.wasm module</a:t>
-            </a:r>
-          </a:p>
-        </p:txBody>
-      </p:sp>
-      <p:sp>
-        <p:nvSpPr>
-          <p:cNvPr id="21" name="TextBox 20"/>
-          <p:cNvSpPr txBox="1"/>
-          <p:nvPr/>
-        </p:nvSpPr>
-        <p:spPr>
-          <a:xfrm>
-            <a:off x="6400799" y="2286000"/>
-            <a:ext cx="2240280" cy="914400"/>
-          </a:xfrm>
-          <a:prstGeom prst="rect">
-            <a:avLst/>
-          </a:prstGeom>
-          <a:noFill/>
-        </p:spPr>
-        <p:txBody>
-          <a:bodyPr wrap="square" anchor="t" lIns="45720" rIns="45720">
-            <a:spAutoFit/>
-          </a:bodyPr>
-          <a:lstStyle/>
-          <a:p>
-            <a:pPr algn="ctr">
-              <a:spcAft>
-                <a:spcPts val="0"/>
-              </a:spcAft>
-            </a:pPr>
-            <a:r>
-              <a:rPr sz="1400" b="0">
-                <a:solidFill>
-                  <a:srgbClr val="1E293B"/>
-                </a:solidFill>
-                <a:latin typeface="Segoe UI"/>
-              </a:rPr>
-              <a:t>539 KB, no wasm-opt yet</a:t>
-            </a:r>
-          </a:p>
-          <a:p>
-            <a:pPr algn="ctr">
-              <a:spcAft>
-                <a:spcPts val="0"/>
-              </a:spcAft>
-            </a:pPr>
-            <a:r>
-              <a:rPr sz="1400" b="0">
-                <a:solidFill>
-                  <a:srgbClr val="1E293B"/>
-                </a:solidFill>
-                <a:latin typeface="Segoe UI"/>
-              </a:rPr>
-              <a:t>compiled in 30 ms</a:t>
-            </a:r>
-          </a:p>
-        </p:txBody>
-      </p:sp>
-      <p:sp>
-        <p:nvSpPr>
-          <p:cNvPr id="22" name="Right Arrow 21"/>
+          <p:cNvPr id="45" name="Oval 44"/>
           <p:cNvSpPr/>
           <p:nvPr/>
         </p:nvSpPr>
         <p:spPr>
           <a:xfrm>
-            <a:off x="8778239" y="2240280"/>
-            <a:ext cx="365760" cy="320040"/>
-          </a:xfrm>
-          <a:prstGeom prst="rightArrow">
+            <a:off x="9313164" y="3977640"/>
+            <a:ext cx="384048" cy="384048"/>
+          </a:xfrm>
+          <a:prstGeom prst="ellipse">
             <a:avLst/>
           </a:prstGeom>
           <a:solidFill>
-            <a:srgbClr val="64748B"/>
+            <a:srgbClr val="6B4FE8"/>
           </a:solidFill>
           <a:ln>
             <a:noFill/>
@@ -11745,29 +13234,116 @@
           </a:fontRef>
         </p:style>
         <p:txBody>
-          <a:bodyPr rtlCol="0" anchor="ctr"/>
+          <a:bodyPr rtlCol="0" anchor="ctr" lIns="0" rIns="0" tIns="0" bIns="0"/>
           <a:lstStyle/>
           <a:p>
             <a:pPr algn="ctr"/>
-          </a:p>
-        </p:txBody>
-      </p:sp>
-      <p:sp>
-        <p:nvSpPr>
-          <p:cNvPr id="23" name="Rectangle 22"/>
+            <a:r>
+              <a:rPr sz="1500" b="1">
+                <a:solidFill>
+                  <a:srgbClr val="FFFFFF"/>
+                </a:solidFill>
+                <a:latin typeface="Segoe UI"/>
+              </a:rPr>
+              <a:t>4</a:t>
+            </a:r>
+          </a:p>
+        </p:txBody>
+      </p:sp>
+      <p:sp>
+        <p:nvSpPr>
+          <p:cNvPr id="46" name="TextBox 45"/>
+          <p:cNvSpPr txBox="1"/>
+          <p:nvPr/>
+        </p:nvSpPr>
+        <p:spPr>
+          <a:xfrm>
+            <a:off x="9770364" y="3977640"/>
+            <a:ext cx="1824228" cy="384048"/>
+          </a:xfrm>
+          <a:prstGeom prst="rect">
+            <a:avLst/>
+          </a:prstGeom>
+          <a:noFill/>
+        </p:spPr>
+        <p:txBody>
+          <a:bodyPr wrap="square" anchor="ctr" lIns="45720" rIns="45720" tIns="27432" bIns="27432">
+            <a:spAutoFit/>
+          </a:bodyPr>
+          <a:lstStyle/>
+          <a:p>
+            <a:pPr algn="l">
+              <a:spcAft>
+                <a:spcPts val="400"/>
+              </a:spcAft>
+            </a:pPr>
+            <a:r>
+              <a:rPr sz="1700" b="1">
+                <a:solidFill>
+                  <a:srgbClr val="6B4FE8"/>
+                </a:solidFill>
+                <a:latin typeface="Segoe UI"/>
+              </a:rPr>
+              <a:t>Run</a:t>
+            </a:r>
+          </a:p>
+        </p:txBody>
+      </p:sp>
+      <p:sp>
+        <p:nvSpPr>
+          <p:cNvPr id="47" name="TextBox 46"/>
+          <p:cNvSpPr txBox="1"/>
+          <p:nvPr/>
+        </p:nvSpPr>
+        <p:spPr>
+          <a:xfrm>
+            <a:off x="9285732" y="4453128"/>
+            <a:ext cx="2263140" cy="822960"/>
+          </a:xfrm>
+          <a:prstGeom prst="rect">
+            <a:avLst/>
+          </a:prstGeom>
+          <a:noFill/>
+        </p:spPr>
+        <p:txBody>
+          <a:bodyPr wrap="square" anchor="t" lIns="45720" rIns="45720" tIns="27432" bIns="27432">
+            <a:spAutoFit/>
+          </a:bodyPr>
+          <a:lstStyle/>
+          <a:p>
+            <a:pPr algn="l">
+              <a:spcAft>
+                <a:spcPts val="400"/>
+              </a:spcAft>
+            </a:pPr>
+            <a:r>
+              <a:rPr sz="1300" b="0">
+                <a:solidFill>
+                  <a:srgbClr val="1E293B"/>
+                </a:solidFill>
+                <a:latin typeface="Segoe UI"/>
+              </a:rPr>
+              <a:t>JavaScript hands the file to Rust and gets the result back. Nothing is uploaded to a server.</a:t>
+            </a:r>
+          </a:p>
+        </p:txBody>
+      </p:sp>
+      <p:sp>
+        <p:nvSpPr>
+          <p:cNvPr id="48" name="Rectangle 47"/>
           <p:cNvSpPr/>
           <p:nvPr/>
         </p:nvSpPr>
         <p:spPr>
           <a:xfrm>
-            <a:off x="9189719" y="1554480"/>
-            <a:ext cx="2423160" cy="1737360"/>
+            <a:off x="548640" y="5623560"/>
+            <a:ext cx="11091672" cy="640080"/>
           </a:xfrm>
           <a:prstGeom prst="rect">
             <a:avLst/>
           </a:prstGeom>
           <a:solidFill>
-            <a:srgbClr val="FFFFFF"/>
+            <a:srgbClr val="0F172A"/>
           </a:solidFill>
           <a:ln>
             <a:noFill/>
@@ -11798,58 +13374,14 @@
       </p:sp>
       <p:sp>
         <p:nvSpPr>
-          <p:cNvPr id="24" name="Rectangle 23"/>
-          <p:cNvSpPr/>
-          <p:nvPr/>
-        </p:nvSpPr>
-        <p:spPr>
-          <a:xfrm>
-            <a:off x="9189719" y="1554480"/>
-            <a:ext cx="2423160" cy="91440"/>
-          </a:xfrm>
-          <a:prstGeom prst="rect">
-            <a:avLst/>
-          </a:prstGeom>
-          <a:solidFill>
-            <a:srgbClr val="654FF0"/>
-          </a:solidFill>
-          <a:ln>
-            <a:noFill/>
-          </a:ln>
-          <a:effectLst/>
-        </p:spPr>
-        <p:style>
-          <a:lnRef idx="1">
-            <a:schemeClr val="accent1"/>
-          </a:lnRef>
-          <a:fillRef idx="3">
-            <a:schemeClr val="accent1"/>
-          </a:fillRef>
-          <a:effectRef idx="2">
-            <a:schemeClr val="accent1"/>
-          </a:effectRef>
-          <a:fontRef idx="minor">
-            <a:schemeClr val="lt1"/>
-          </a:fontRef>
-        </p:style>
-        <p:txBody>
-          <a:bodyPr rtlCol="0" anchor="ctr"/>
-          <a:lstStyle/>
-          <a:p>
-            <a:pPr algn="ctr"/>
-          </a:p>
-        </p:txBody>
-      </p:sp>
-      <p:sp>
-        <p:nvSpPr>
-          <p:cNvPr id="25" name="TextBox 24"/>
+          <p:cNvPr id="49" name="TextBox 48"/>
           <p:cNvSpPr txBox="1"/>
           <p:nvPr/>
         </p:nvSpPr>
         <p:spPr>
           <a:xfrm>
-            <a:off x="9281159" y="1737360"/>
-            <a:ext cx="2240280" cy="457200"/>
+            <a:off x="731520" y="5623560"/>
+            <a:ext cx="10725912" cy="640080"/>
           </a:xfrm>
           <a:prstGeom prst="rect">
             <a:avLst/>
@@ -11857,238 +13389,24 @@
           <a:noFill/>
         </p:spPr>
         <p:txBody>
-          <a:bodyPr wrap="square" anchor="t" lIns="45720" rIns="45720">
+          <a:bodyPr wrap="square" anchor="ctr" lIns="45720" rIns="45720" tIns="27432" bIns="27432">
             <a:spAutoFit/>
           </a:bodyPr>
           <a:lstStyle/>
           <a:p>
-            <a:pPr algn="ctr">
+            <a:pPr algn="l">
               <a:spcAft>
-                <a:spcPts val="0"/>
+                <a:spcPts val="400"/>
               </a:spcAft>
             </a:pPr>
             <a:r>
-              <a:rPr sz="2000" b="1">
-                <a:solidFill>
-                  <a:srgbClr val="654FF0"/>
-                </a:solidFill>
-                <a:latin typeface="Segoe UI"/>
-              </a:rPr>
-              <a:t>Web Worker</a:t>
-            </a:r>
-          </a:p>
-        </p:txBody>
-      </p:sp>
-      <p:sp>
-        <p:nvSpPr>
-          <p:cNvPr id="26" name="TextBox 25"/>
-          <p:cNvSpPr txBox="1"/>
-          <p:nvPr/>
-        </p:nvSpPr>
-        <p:spPr>
-          <a:xfrm>
-            <a:off x="9281159" y="2286000"/>
-            <a:ext cx="2240280" cy="914400"/>
-          </a:xfrm>
-          <a:prstGeom prst="rect">
-            <a:avLst/>
-          </a:prstGeom>
-          <a:noFill/>
-        </p:spPr>
-        <p:txBody>
-          <a:bodyPr wrap="square" anchor="t" lIns="45720" rIns="45720">
-            <a:spAutoFit/>
-          </a:bodyPr>
-          <a:lstStyle/>
-          <a:p>
-            <a:pPr algn="ctr">
-              <a:spcAft>
-                <a:spcPts val="0"/>
-              </a:spcAft>
-            </a:pPr>
-            <a:r>
-              <a:rPr sz="1400" b="0">
-                <a:solidFill>
-                  <a:srgbClr val="1E293B"/>
-                </a:solidFill>
-                <a:latin typeface="Segoe UI"/>
-              </a:rPr>
-              <a:t>Calls Rust from JS;</a:t>
-            </a:r>
-          </a:p>
-          <a:p>
-            <a:pPr algn="ctr">
-              <a:spcAft>
-                <a:spcPts val="0"/>
-              </a:spcAft>
-            </a:pPr>
-            <a:r>
-              <a:rPr sz="1400" b="0">
-                <a:solidFill>
-                  <a:srgbClr val="1E293B"/>
-                </a:solidFill>
-                <a:latin typeface="Segoe UI"/>
-              </a:rPr>
-              <a:t>UI thread stays free</a:t>
-            </a:r>
-          </a:p>
-        </p:txBody>
-      </p:sp>
-      <p:sp>
-        <p:nvSpPr>
-          <p:cNvPr id="27" name="TextBox 26"/>
-          <p:cNvSpPr txBox="1"/>
-          <p:nvPr/>
-        </p:nvSpPr>
-        <p:spPr>
-          <a:xfrm>
-            <a:off x="548640" y="3657600"/>
-            <a:ext cx="11155680" cy="2651760"/>
-          </a:xfrm>
-          <a:prstGeom prst="rect">
-            <a:avLst/>
-          </a:prstGeom>
-          <a:noFill/>
-        </p:spPr>
-        <p:txBody>
-          <a:bodyPr wrap="square">
-            <a:spAutoFit/>
-          </a:bodyPr>
-          <a:lstStyle/>
-          <a:p>
-            <a:pPr>
-              <a:spcAft>
-                <a:spcPts val="800"/>
-              </a:spcAft>
-            </a:pPr>
-            <a:r>
-              <a:rPr sz="1300">
-                <a:solidFill>
-                  <a:srgbClr val="2F9E6F"/>
-                </a:solidFill>
-                <a:latin typeface="Segoe UI"/>
-              </a:rPr>
-              <a:t>■  </a:t>
-            </a:r>
-            <a:r>
-              <a:rPr sz="1900" b="1">
-                <a:solidFill>
-                  <a:srgbClr val="1E293B"/>
-                </a:solidFill>
-                <a:latin typeface="Segoe UI"/>
-              </a:rPr>
-              <a:t>Near-native speed: </a:t>
-            </a:r>
-            <a:r>
-              <a:rPr sz="1900">
-                <a:solidFill>
-                  <a:srgbClr val="1E293B"/>
-                </a:solidFill>
-                <a:latin typeface="Segoe UI"/>
-              </a:rPr>
-              <a:t>predictable performance, no garbage collector, SIMD-friendly code.</a:t>
-            </a:r>
-          </a:p>
-          <a:p>
-            <a:pPr>
-              <a:spcAft>
-                <a:spcPts val="800"/>
-              </a:spcAft>
-            </a:pPr>
-            <a:r>
-              <a:rPr sz="1300">
-                <a:solidFill>
-                  <a:srgbClr val="2F9E6F"/>
-                </a:solidFill>
-                <a:latin typeface="Segoe UI"/>
-              </a:rPr>
-              <a:t>■  </a:t>
-            </a:r>
-            <a:r>
-              <a:rPr sz="1900" b="1">
-                <a:solidFill>
-                  <a:srgbClr val="1E293B"/>
-                </a:solidFill>
-                <a:latin typeface="Segoe UI"/>
-              </a:rPr>
-              <a:t>Memory safety: </a:t>
-            </a:r>
-            <a:r>
-              <a:rPr sz="1900">
-                <a:solidFill>
-                  <a:srgbClr val="1E293B"/>
-                </a:solidFill>
-                <a:latin typeface="Segoe UI"/>
-              </a:rPr>
-              <a:t>Rust's ownership model prevents whole classes of bugs without a runtime.</a:t>
-            </a:r>
-          </a:p>
-          <a:p>
-            <a:pPr>
-              <a:spcAft>
-                <a:spcPts val="800"/>
-              </a:spcAft>
-            </a:pPr>
-            <a:r>
-              <a:rPr sz="1300">
-                <a:solidFill>
-                  <a:srgbClr val="2F9E6F"/>
-                </a:solidFill>
-                <a:latin typeface="Segoe UI"/>
-              </a:rPr>
-              <a:t>■  </a:t>
-            </a:r>
-            <a:r>
-              <a:rPr sz="1900" b="1">
-                <a:solidFill>
-                  <a:srgbClr val="1E293B"/>
-                </a:solidFill>
-                <a:latin typeface="Segoe UI"/>
-              </a:rPr>
-              <a:t>Runs on the client: </a:t>
-            </a:r>
-            <a:r>
-              <a:rPr sz="1900">
-                <a:solidFill>
-                  <a:srgbClr val="1E293B"/>
-                </a:solidFill>
-                <a:latin typeface="Segoe UI"/>
-              </a:rPr>
-              <a:t>data can be processed locally; nothing needs to be uploaded.</a:t>
-            </a:r>
-          </a:p>
-          <a:p>
-            <a:pPr>
-              <a:spcAft>
-                <a:spcPts val="800"/>
-              </a:spcAft>
-            </a:pPr>
-            <a:r>
-              <a:rPr sz="1300">
-                <a:solidFill>
-                  <a:srgbClr val="2F9E6F"/>
-                </a:solidFill>
-                <a:latin typeface="Segoe UI"/>
-              </a:rPr>
-              <a:t>■  </a:t>
-            </a:r>
-            <a:r>
-              <a:rPr sz="1900" b="1">
-                <a:solidFill>
-                  <a:srgbClr val="1E293B"/>
-                </a:solidFill>
-                <a:latin typeface="Segoe UI"/>
-              </a:rPr>
-              <a:t>Portable: </a:t>
-            </a:r>
-            <a:r>
-              <a:rPr sz="1900">
-                <a:solidFill>
-                  <a:srgbClr val="1E293B"/>
-                </a:solidFill>
-                <a:latin typeface="Segoe UI"/>
-              </a:rPr>
-              <a:t>the same Rust crate can also target servers, edge runtimes and WASI.</a:t>
+              <a:rPr sz="1500" b="1">
+                <a:solidFill>
+                  <a:srgbClr val="FFFFFF"/>
+                </a:solidFill>
+                <a:latin typeface="Segoe UI"/>
+              </a:rPr>
+              <a:t>In one line: JavaScript still runs the page; Rust + WASM is the fast engine it hands the heavy jobs to, so the work stays on the user's device.</a:t>
             </a:r>
           </a:p>
         </p:txBody>
@@ -12102,7 +13420,7 @@
 </file>
 
 <file path=ppt/slides/slide4.xml><?xml version="1.0" encoding="utf-8"?>
-<p:sld xmlns:a="http://schemas.openxmlformats.org/drawingml/2006/main" xmlns:p="http://schemas.openxmlformats.org/presentationml/2006/main" xmlns:r="http://schemas.openxmlformats.org/officeDocument/2006/relationships">
+<p:sld xmlns:a="http://schemas.openxmlformats.org/drawingml/2006/main" xmlns:r="http://schemas.openxmlformats.org/officeDocument/2006/relationships" xmlns:p="http://schemas.openxmlformats.org/presentationml/2006/main">
   <p:cSld>
     <p:bg>
       <p:bgPr>
@@ -12118,7 +13436,14 @@
         <p:cNvGrpSpPr/>
         <p:nvPr/>
       </p:nvGrpSpPr>
-      <p:grpSpPr/>
+      <p:grpSpPr>
+        <a:xfrm>
+          <a:off x="0" y="0"/>
+          <a:ext cx="0" cy="0"/>
+          <a:chOff x="0" y="0"/>
+          <a:chExt cx="0" cy="0"/>
+        </a:xfrm>
+      </p:grpSpPr>
       <p:sp>
         <p:nvSpPr>
           <p:cNvPr id="2" name="Rectangle 1"/>
@@ -12160,6 +13485,7 @@
           <a:lstStyle/>
           <a:p>
             <a:pPr algn="ctr"/>
+            <a:endParaRPr/>
           </a:p>
         </p:txBody>
       </p:sp>
@@ -12204,6 +13530,7 @@
           <a:lstStyle/>
           <a:p>
             <a:pPr algn="ctr"/>
+            <a:endParaRPr/>
           </a:p>
         </p:txBody>
       </p:sp>
@@ -12224,7 +13551,7 @@
           <a:noFill/>
         </p:spPr>
         <p:txBody>
-          <a:bodyPr wrap="square" anchor="ctr" lIns="45720" rIns="45720">
+          <a:bodyPr wrap="square" lIns="45720" rIns="45720" anchor="ctr">
             <a:spAutoFit/>
           </a:bodyPr>
           <a:lstStyle/>
@@ -12263,7 +13590,7 @@
           <a:noFill/>
         </p:spPr>
         <p:txBody>
-          <a:bodyPr wrap="square" anchor="t" lIns="45720" rIns="45720">
+          <a:bodyPr wrap="square" lIns="45720" rIns="45720" anchor="t">
             <a:spAutoFit/>
           </a:bodyPr>
           <a:lstStyle/>
@@ -12294,7 +13621,7 @@
         <p:spPr>
           <a:xfrm>
             <a:off x="548640" y="6446520"/>
-            <a:ext cx="7315200" cy="274320"/>
+            <a:ext cx="7315200" cy="261610"/>
           </a:xfrm>
           <a:prstGeom prst="rect">
             <a:avLst/>
@@ -12302,7 +13629,7 @@
           <a:noFill/>
         </p:spPr>
         <p:txBody>
-          <a:bodyPr wrap="square" anchor="t" lIns="45720" rIns="45720">
+          <a:bodyPr wrap="square" lIns="45720" rIns="45720" anchor="t">
             <a:spAutoFit/>
           </a:bodyPr>
           <a:lstStyle/>
@@ -12313,13 +13640,31 @@
               </a:spcAft>
             </a:pPr>
             <a:r>
-              <a:rPr sz="1100" b="0">
+              <a:rPr sz="1100" b="0" dirty="0">
                 <a:solidFill>
                   <a:srgbClr val="64748B"/>
                 </a:solidFill>
                 <a:latin typeface="Segoe UI"/>
               </a:rPr>
-              <a:t>Rust → WebAssembly  |  Annual new-technology KPI 2026</a:t>
+              <a:t>Rust → </a:t>
+            </a:r>
+            <a:r>
+              <a:rPr sz="1100" b="0" dirty="0" err="1">
+                <a:solidFill>
+                  <a:srgbClr val="64748B"/>
+                </a:solidFill>
+                <a:latin typeface="Segoe UI"/>
+              </a:rPr>
+              <a:t>WebAssembly</a:t>
+            </a:r>
+            <a:r>
+              <a:rPr sz="1100" b="0" dirty="0">
+                <a:solidFill>
+                  <a:srgbClr val="64748B"/>
+                </a:solidFill>
+                <a:latin typeface="Segoe UI"/>
+              </a:rPr>
+              <a:t> </a:t>
             </a:r>
           </a:p>
         </p:txBody>
@@ -12341,7 +13686,7 @@
           <a:noFill/>
         </p:spPr>
         <p:txBody>
-          <a:bodyPr wrap="square" anchor="t" lIns="45720" rIns="45720">
+          <a:bodyPr wrap="square" lIns="45720" rIns="45720" anchor="t">
             <a:spAutoFit/>
           </a:bodyPr>
           <a:lstStyle/>
@@ -12404,6 +13749,7 @@
           <a:lstStyle/>
           <a:p>
             <a:pPr algn="ctr"/>
+            <a:endParaRPr/>
           </a:p>
         </p:txBody>
       </p:sp>
@@ -12448,6 +13794,7 @@
           <a:lstStyle/>
           <a:p>
             <a:pPr algn="ctr"/>
+            <a:endParaRPr/>
           </a:p>
         </p:txBody>
       </p:sp>
@@ -12468,7 +13815,7 @@
           <a:noFill/>
         </p:spPr>
         <p:txBody>
-          <a:bodyPr wrap="square" anchor="t" lIns="45720" rIns="45720">
+          <a:bodyPr wrap="square" lIns="45720" rIns="45720" anchor="t">
             <a:spAutoFit/>
           </a:bodyPr>
           <a:lstStyle/>
@@ -12507,7 +13854,7 @@
           <a:noFill/>
         </p:spPr>
         <p:txBody>
-          <a:bodyPr wrap="square" anchor="t" lIns="45720" rIns="45720">
+          <a:bodyPr wrap="square" lIns="45720" rIns="45720" anchor="t">
             <a:spAutoFit/>
           </a:bodyPr>
           <a:lstStyle/>
@@ -12546,7 +13893,7 @@
           <a:noFill/>
         </p:spPr>
         <p:txBody>
-          <a:bodyPr wrap="square" anchor="t" lIns="45720" rIns="45720">
+          <a:bodyPr wrap="square" lIns="45720" rIns="45720" anchor="t">
             <a:spAutoFit/>
           </a:bodyPr>
           <a:lstStyle/>
@@ -12641,6 +13988,7 @@
           <a:lstStyle/>
           <a:p>
             <a:pPr algn="ctr"/>
+            <a:endParaRPr/>
           </a:p>
         </p:txBody>
       </p:sp>
@@ -12685,6 +14033,7 @@
           <a:lstStyle/>
           <a:p>
             <a:pPr algn="ctr"/>
+            <a:endParaRPr/>
           </a:p>
         </p:txBody>
       </p:sp>
@@ -12705,7 +14054,7 @@
           <a:noFill/>
         </p:spPr>
         <p:txBody>
-          <a:bodyPr wrap="square" anchor="t" lIns="45720" rIns="45720">
+          <a:bodyPr wrap="square" lIns="45720" rIns="45720" anchor="t">
             <a:spAutoFit/>
           </a:bodyPr>
           <a:lstStyle/>
@@ -12744,7 +14093,7 @@
           <a:noFill/>
         </p:spPr>
         <p:txBody>
-          <a:bodyPr wrap="square" anchor="t" lIns="45720" rIns="45720">
+          <a:bodyPr wrap="square" lIns="45720" rIns="45720" anchor="t">
             <a:spAutoFit/>
           </a:bodyPr>
           <a:lstStyle/>
@@ -12783,7 +14132,7 @@
           <a:noFill/>
         </p:spPr>
         <p:txBody>
-          <a:bodyPr wrap="square" anchor="t" lIns="45720" rIns="45720">
+          <a:bodyPr wrap="square" lIns="45720" rIns="45720" anchor="t">
             <a:spAutoFit/>
           </a:bodyPr>
           <a:lstStyle/>
@@ -12878,6 +14227,7 @@
           <a:lstStyle/>
           <a:p>
             <a:pPr algn="ctr"/>
+            <a:endParaRPr/>
           </a:p>
         </p:txBody>
       </p:sp>
@@ -12922,6 +14272,7 @@
           <a:lstStyle/>
           <a:p>
             <a:pPr algn="ctr"/>
+            <a:endParaRPr/>
           </a:p>
         </p:txBody>
       </p:sp>
@@ -12942,7 +14293,7 @@
           <a:noFill/>
         </p:spPr>
         <p:txBody>
-          <a:bodyPr wrap="square" anchor="t" lIns="45720" rIns="45720">
+          <a:bodyPr wrap="square" lIns="45720" rIns="45720" anchor="t">
             <a:spAutoFit/>
           </a:bodyPr>
           <a:lstStyle/>
@@ -12981,7 +14332,7 @@
           <a:noFill/>
         </p:spPr>
         <p:txBody>
-          <a:bodyPr wrap="square" anchor="t" lIns="45720" rIns="45720">
+          <a:bodyPr wrap="square" lIns="45720" rIns="45720" anchor="t">
             <a:spAutoFit/>
           </a:bodyPr>
           <a:lstStyle/>
@@ -13020,7 +14371,7 @@
           <a:noFill/>
         </p:spPr>
         <p:txBody>
-          <a:bodyPr wrap="square" anchor="t" lIns="45720" rIns="45720">
+          <a:bodyPr wrap="square" lIns="45720" rIns="45720" anchor="t">
             <a:spAutoFit/>
           </a:bodyPr>
           <a:lstStyle/>
@@ -13091,7 +14442,7 @@
           <a:noFill/>
         </p:spPr>
         <p:txBody>
-          <a:bodyPr wrap="square" anchor="t" lIns="45720" rIns="45720">
+          <a:bodyPr wrap="square" lIns="45720" rIns="45720" anchor="t">
             <a:spAutoFit/>
           </a:bodyPr>
           <a:lstStyle/>
@@ -13213,7 +14564,7 @@
 </file>
 
 <file path=ppt/slides/slide5.xml><?xml version="1.0" encoding="utf-8"?>
-<p:sld xmlns:a="http://schemas.openxmlformats.org/drawingml/2006/main" xmlns:p="http://schemas.openxmlformats.org/presentationml/2006/main" xmlns:r="http://schemas.openxmlformats.org/officeDocument/2006/relationships">
+<p:sld xmlns:a="http://schemas.openxmlformats.org/drawingml/2006/main" xmlns:r="http://schemas.openxmlformats.org/officeDocument/2006/relationships" xmlns:p="http://schemas.openxmlformats.org/presentationml/2006/main">
   <p:cSld>
     <p:bg>
       <p:bgPr>
@@ -13229,7 +14580,14 @@
         <p:cNvGrpSpPr/>
         <p:nvPr/>
       </p:nvGrpSpPr>
-      <p:grpSpPr/>
+      <p:grpSpPr>
+        <a:xfrm>
+          <a:off x="0" y="0"/>
+          <a:ext cx="0" cy="0"/>
+          <a:chOff x="0" y="0"/>
+          <a:chExt cx="0" cy="0"/>
+        </a:xfrm>
+      </p:grpSpPr>
       <p:sp>
         <p:nvSpPr>
           <p:cNvPr id="2" name="Rectangle 1"/>
@@ -13271,6 +14629,7 @@
           <a:lstStyle/>
           <a:p>
             <a:pPr algn="ctr"/>
+            <a:endParaRPr/>
           </a:p>
         </p:txBody>
       </p:sp>
@@ -13315,6 +14674,7 @@
           <a:lstStyle/>
           <a:p>
             <a:pPr algn="ctr"/>
+            <a:endParaRPr/>
           </a:p>
         </p:txBody>
       </p:sp>
@@ -13335,7 +14695,7 @@
           <a:noFill/>
         </p:spPr>
         <p:txBody>
-          <a:bodyPr wrap="square" anchor="ctr" lIns="45720" rIns="45720">
+          <a:bodyPr wrap="square" lIns="45720" rIns="45720" anchor="ctr">
             <a:spAutoFit/>
           </a:bodyPr>
           <a:lstStyle/>
@@ -13374,7 +14734,7 @@
           <a:noFill/>
         </p:spPr>
         <p:txBody>
-          <a:bodyPr wrap="square" anchor="t" lIns="45720" rIns="45720">
+          <a:bodyPr wrap="square" lIns="45720" rIns="45720" anchor="t">
             <a:spAutoFit/>
           </a:bodyPr>
           <a:lstStyle/>
@@ -13405,7 +14765,7 @@
         <p:spPr>
           <a:xfrm>
             <a:off x="548640" y="6446520"/>
-            <a:ext cx="7315200" cy="274320"/>
+            <a:ext cx="7315200" cy="261610"/>
           </a:xfrm>
           <a:prstGeom prst="rect">
             <a:avLst/>
@@ -13413,7 +14773,7 @@
           <a:noFill/>
         </p:spPr>
         <p:txBody>
-          <a:bodyPr wrap="square" anchor="t" lIns="45720" rIns="45720">
+          <a:bodyPr wrap="square" lIns="45720" rIns="45720" anchor="t">
             <a:spAutoFit/>
           </a:bodyPr>
           <a:lstStyle/>
@@ -13424,13 +14784,31 @@
               </a:spcAft>
             </a:pPr>
             <a:r>
-              <a:rPr sz="1100" b="0">
+              <a:rPr sz="1100" b="0" dirty="0">
                 <a:solidFill>
                   <a:srgbClr val="64748B"/>
                 </a:solidFill>
                 <a:latin typeface="Segoe UI"/>
               </a:rPr>
-              <a:t>Rust → WebAssembly  |  Annual new-technology KPI 2026</a:t>
+              <a:t>Rust → </a:t>
+            </a:r>
+            <a:r>
+              <a:rPr sz="1100" b="0" dirty="0" err="1">
+                <a:solidFill>
+                  <a:srgbClr val="64748B"/>
+                </a:solidFill>
+                <a:latin typeface="Segoe UI"/>
+              </a:rPr>
+              <a:t>WebAssembly</a:t>
+            </a:r>
+            <a:r>
+              <a:rPr sz="1100" b="0" dirty="0">
+                <a:solidFill>
+                  <a:srgbClr val="64748B"/>
+                </a:solidFill>
+                <a:latin typeface="Segoe UI"/>
+              </a:rPr>
+              <a:t> </a:t>
             </a:r>
           </a:p>
         </p:txBody>
@@ -13452,7 +14830,7 @@
           <a:noFill/>
         </p:spPr>
         <p:txBody>
-          <a:bodyPr wrap="square" anchor="t" lIns="45720" rIns="45720">
+          <a:bodyPr wrap="square" lIns="45720" rIns="45720" anchor="t">
             <a:spAutoFit/>
           </a:bodyPr>
           <a:lstStyle/>
@@ -13742,6 +15120,7 @@
           <a:lstStyle/>
           <a:p>
             <a:pPr algn="ctr"/>
+            <a:endParaRPr/>
           </a:p>
         </p:txBody>
       </p:sp>
@@ -13786,6 +15165,7 @@
           <a:lstStyle/>
           <a:p>
             <a:pPr algn="ctr"/>
+            <a:endParaRPr/>
           </a:p>
         </p:txBody>
       </p:sp>
@@ -13806,7 +15186,7 @@
           <a:noFill/>
         </p:spPr>
         <p:txBody>
-          <a:bodyPr wrap="square" anchor="t" lIns="45720" rIns="45720">
+          <a:bodyPr wrap="square" lIns="45720" rIns="45720" anchor="t">
             <a:spAutoFit/>
           </a:bodyPr>
           <a:lstStyle/>
@@ -13845,7 +15225,7 @@
           <a:noFill/>
         </p:spPr>
         <p:txBody>
-          <a:bodyPr wrap="square" anchor="t" lIns="45720" rIns="45720">
+          <a:bodyPr wrap="square" lIns="45720" rIns="45720" anchor="t">
             <a:spAutoFit/>
           </a:bodyPr>
           <a:lstStyle/>
@@ -13940,6 +15320,7 @@
           <a:lstStyle/>
           <a:p>
             <a:pPr algn="ctr"/>
+            <a:endParaRPr/>
           </a:p>
         </p:txBody>
       </p:sp>
@@ -13984,6 +15365,7 @@
           <a:lstStyle/>
           <a:p>
             <a:pPr algn="ctr"/>
+            <a:endParaRPr/>
           </a:p>
         </p:txBody>
       </p:sp>
@@ -14004,7 +15386,7 @@
           <a:noFill/>
         </p:spPr>
         <p:txBody>
-          <a:bodyPr wrap="square" anchor="t" lIns="45720" rIns="45720">
+          <a:bodyPr wrap="square" lIns="45720" rIns="45720" anchor="t">
             <a:spAutoFit/>
           </a:bodyPr>
           <a:lstStyle/>
@@ -14043,7 +15425,7 @@
           <a:noFill/>
         </p:spPr>
         <p:txBody>
-          <a:bodyPr wrap="square" anchor="t" lIns="45720" rIns="45720">
+          <a:bodyPr wrap="square" lIns="45720" rIns="45720" anchor="t">
             <a:spAutoFit/>
           </a:bodyPr>
           <a:lstStyle/>
@@ -14106,7 +15488,7 @@
 </file>
 
 <file path=ppt/slides/slide6.xml><?xml version="1.0" encoding="utf-8"?>
-<p:sld xmlns:a="http://schemas.openxmlformats.org/drawingml/2006/main" xmlns:p="http://schemas.openxmlformats.org/presentationml/2006/main" xmlns:r="http://schemas.openxmlformats.org/officeDocument/2006/relationships">
+<p:sld xmlns:a="http://schemas.openxmlformats.org/drawingml/2006/main" xmlns:r="http://schemas.openxmlformats.org/officeDocument/2006/relationships" xmlns:p="http://schemas.openxmlformats.org/presentationml/2006/main">
   <p:cSld>
     <p:bg>
       <p:bgPr>
@@ -14122,7 +15504,14 @@
         <p:cNvGrpSpPr/>
         <p:nvPr/>
       </p:nvGrpSpPr>
-      <p:grpSpPr/>
+      <p:grpSpPr>
+        <a:xfrm>
+          <a:off x="0" y="0"/>
+          <a:ext cx="0" cy="0"/>
+          <a:chOff x="0" y="0"/>
+          <a:chExt cx="0" cy="0"/>
+        </a:xfrm>
+      </p:grpSpPr>
       <p:sp>
         <p:nvSpPr>
           <p:cNvPr id="2" name="Rectangle 1"/>
@@ -14164,6 +15553,7 @@
           <a:lstStyle/>
           <a:p>
             <a:pPr algn="ctr"/>
+            <a:endParaRPr/>
           </a:p>
         </p:txBody>
       </p:sp>
@@ -14208,6 +15598,7 @@
           <a:lstStyle/>
           <a:p>
             <a:pPr algn="ctr"/>
+            <a:endParaRPr/>
           </a:p>
         </p:txBody>
       </p:sp>
@@ -14228,7 +15619,7 @@
           <a:noFill/>
         </p:spPr>
         <p:txBody>
-          <a:bodyPr wrap="square" anchor="ctr" lIns="45720" rIns="45720">
+          <a:bodyPr wrap="square" lIns="45720" rIns="45720" anchor="ctr">
             <a:spAutoFit/>
           </a:bodyPr>
           <a:lstStyle/>
@@ -14267,7 +15658,7 @@
           <a:noFill/>
         </p:spPr>
         <p:txBody>
-          <a:bodyPr wrap="square" anchor="t" lIns="45720" rIns="45720">
+          <a:bodyPr wrap="square" lIns="45720" rIns="45720" anchor="t">
             <a:spAutoFit/>
           </a:bodyPr>
           <a:lstStyle/>
@@ -14298,7 +15689,7 @@
         <p:spPr>
           <a:xfrm>
             <a:off x="548640" y="6446520"/>
-            <a:ext cx="7315200" cy="274320"/>
+            <a:ext cx="7315200" cy="261610"/>
           </a:xfrm>
           <a:prstGeom prst="rect">
             <a:avLst/>
@@ -14306,7 +15697,7 @@
           <a:noFill/>
         </p:spPr>
         <p:txBody>
-          <a:bodyPr wrap="square" anchor="t" lIns="45720" rIns="45720">
+          <a:bodyPr wrap="square" lIns="45720" rIns="45720" anchor="t">
             <a:spAutoFit/>
           </a:bodyPr>
           <a:lstStyle/>
@@ -14317,13 +15708,31 @@
               </a:spcAft>
             </a:pPr>
             <a:r>
-              <a:rPr sz="1100" b="0">
+              <a:rPr sz="1100" b="0" dirty="0">
                 <a:solidFill>
                   <a:srgbClr val="64748B"/>
                 </a:solidFill>
                 <a:latin typeface="Segoe UI"/>
               </a:rPr>
-              <a:t>Rust → WebAssembly  |  Annual new-technology KPI 2026</a:t>
+              <a:t>Rust → </a:t>
+            </a:r>
+            <a:r>
+              <a:rPr sz="1100" b="0" dirty="0" err="1">
+                <a:solidFill>
+                  <a:srgbClr val="64748B"/>
+                </a:solidFill>
+                <a:latin typeface="Segoe UI"/>
+              </a:rPr>
+              <a:t>WebAssembly</a:t>
+            </a:r>
+            <a:r>
+              <a:rPr sz="1100" b="0" dirty="0">
+                <a:solidFill>
+                  <a:srgbClr val="64748B"/>
+                </a:solidFill>
+                <a:latin typeface="Segoe UI"/>
+              </a:rPr>
+              <a:t> </a:t>
             </a:r>
           </a:p>
         </p:txBody>
@@ -14345,7 +15754,7 @@
           <a:noFill/>
         </p:spPr>
         <p:txBody>
-          <a:bodyPr wrap="square" anchor="t" lIns="45720" rIns="45720">
+          <a:bodyPr wrap="square" lIns="45720" rIns="45720" anchor="t">
             <a:spAutoFit/>
           </a:bodyPr>
           <a:lstStyle/>
@@ -14386,11 +15795,41 @@
                 <a:tableStyleId>{5C22544A-7EE6-4342-B048-85BDC9FD1C3A}</a:tableStyleId>
               </a:tblPr>
               <a:tblGrid>
-                <a:gridCol w="3291840"/>
-                <a:gridCol w="1920240"/>
-                <a:gridCol w="1920240"/>
-                <a:gridCol w="1920240"/>
-                <a:gridCol w="2103120"/>
+                <a:gridCol w="3291840">
+                  <a:extLst>
+                    <a:ext uri="{9D8B030D-6E8A-4147-A177-3AD203B41FA5}">
+                      <a16:colId xmlns:a16="http://schemas.microsoft.com/office/drawing/2014/main" val="20000"/>
+                    </a:ext>
+                  </a:extLst>
+                </a:gridCol>
+                <a:gridCol w="1920240">
+                  <a:extLst>
+                    <a:ext uri="{9D8B030D-6E8A-4147-A177-3AD203B41FA5}">
+                      <a16:colId xmlns:a16="http://schemas.microsoft.com/office/drawing/2014/main" val="20001"/>
+                    </a:ext>
+                  </a:extLst>
+                </a:gridCol>
+                <a:gridCol w="1920240">
+                  <a:extLst>
+                    <a:ext uri="{9D8B030D-6E8A-4147-A177-3AD203B41FA5}">
+                      <a16:colId xmlns:a16="http://schemas.microsoft.com/office/drawing/2014/main" val="20002"/>
+                    </a:ext>
+                  </a:extLst>
+                </a:gridCol>
+                <a:gridCol w="1920240">
+                  <a:extLst>
+                    <a:ext uri="{9D8B030D-6E8A-4147-A177-3AD203B41FA5}">
+                      <a16:colId xmlns:a16="http://schemas.microsoft.com/office/drawing/2014/main" val="20003"/>
+                    </a:ext>
+                  </a:extLst>
+                </a:gridCol>
+                <a:gridCol w="2103120">
+                  <a:extLst>
+                    <a:ext uri="{9D8B030D-6E8A-4147-A177-3AD203B41FA5}">
+                      <a16:colId xmlns:a16="http://schemas.microsoft.com/office/drawing/2014/main" val="20004"/>
+                    </a:ext>
+                  </a:extLst>
+                </a:gridCol>
               </a:tblGrid>
               <a:tr h="566928">
                 <a:tc>
@@ -14508,6 +15947,11 @@
                     </a:solidFill>
                   </a:tcPr>
                 </a:tc>
+                <a:extLst>
+                  <a:ext uri="{0D108BD9-81ED-4DB2-BD59-A6C34878D82A}">
+                    <a16:rowId xmlns:a16="http://schemas.microsoft.com/office/drawing/2014/main" val="10000"/>
+                  </a:ext>
+                </a:extLst>
               </a:tr>
               <a:tr h="566928">
                 <a:tc>
@@ -14625,6 +16069,11 @@
                     </a:solidFill>
                   </a:tcPr>
                 </a:tc>
+                <a:extLst>
+                  <a:ext uri="{0D108BD9-81ED-4DB2-BD59-A6C34878D82A}">
+                    <a16:rowId xmlns:a16="http://schemas.microsoft.com/office/drawing/2014/main" val="10001"/>
+                  </a:ext>
+                </a:extLst>
               </a:tr>
               <a:tr h="566928">
                 <a:tc>
@@ -14742,6 +16191,11 @@
                     </a:solidFill>
                   </a:tcPr>
                 </a:tc>
+                <a:extLst>
+                  <a:ext uri="{0D108BD9-81ED-4DB2-BD59-A6C34878D82A}">
+                    <a16:rowId xmlns:a16="http://schemas.microsoft.com/office/drawing/2014/main" val="10002"/>
+                  </a:ext>
+                </a:extLst>
               </a:tr>
               <a:tr h="566928">
                 <a:tc>
@@ -14859,6 +16313,11 @@
                     </a:solidFill>
                   </a:tcPr>
                 </a:tc>
+                <a:extLst>
+                  <a:ext uri="{0D108BD9-81ED-4DB2-BD59-A6C34878D82A}">
+                    <a16:rowId xmlns:a16="http://schemas.microsoft.com/office/drawing/2014/main" val="10003"/>
+                  </a:ext>
+                </a:extLst>
               </a:tr>
               <a:tr h="566928">
                 <a:tc>
@@ -14976,6 +16435,11 @@
                     </a:solidFill>
                   </a:tcPr>
                 </a:tc>
+                <a:extLst>
+                  <a:ext uri="{0D108BD9-81ED-4DB2-BD59-A6C34878D82A}">
+                    <a16:rowId xmlns:a16="http://schemas.microsoft.com/office/drawing/2014/main" val="10004"/>
+                  </a:ext>
+                </a:extLst>
               </a:tr>
               <a:tr h="566928">
                 <a:tc>
@@ -15093,6 +16557,11 @@
                     </a:solidFill>
                   </a:tcPr>
                 </a:tc>
+                <a:extLst>
+                  <a:ext uri="{0D108BD9-81ED-4DB2-BD59-A6C34878D82A}">
+                    <a16:rowId xmlns:a16="http://schemas.microsoft.com/office/drawing/2014/main" val="10005"/>
+                  </a:ext>
+                </a:extLst>
               </a:tr>
             </a:tbl>
           </a:graphicData>
@@ -15115,7 +16584,7 @@
           <a:noFill/>
         </p:spPr>
         <p:txBody>
-          <a:bodyPr wrap="square" anchor="t" lIns="45720" rIns="45720">
+          <a:bodyPr wrap="square" lIns="45720" rIns="45720" anchor="t">
             <a:spAutoFit/>
           </a:bodyPr>
           <a:lstStyle/>
@@ -15146,7 +16615,7 @@
 </file>
 
 <file path=ppt/slides/slide7.xml><?xml version="1.0" encoding="utf-8"?>
-<p:sld xmlns:a="http://schemas.openxmlformats.org/drawingml/2006/main" xmlns:p="http://schemas.openxmlformats.org/presentationml/2006/main" xmlns:r="http://schemas.openxmlformats.org/officeDocument/2006/relationships">
+<p:sld xmlns:a="http://schemas.openxmlformats.org/drawingml/2006/main" xmlns:r="http://schemas.openxmlformats.org/officeDocument/2006/relationships" xmlns:p="http://schemas.openxmlformats.org/presentationml/2006/main">
   <p:cSld>
     <p:bg>
       <p:bgPr>
@@ -15162,7 +16631,14 @@
         <p:cNvGrpSpPr/>
         <p:nvPr/>
       </p:nvGrpSpPr>
-      <p:grpSpPr/>
+      <p:grpSpPr>
+        <a:xfrm>
+          <a:off x="0" y="0"/>
+          <a:ext cx="0" cy="0"/>
+          <a:chOff x="0" y="0"/>
+          <a:chExt cx="0" cy="0"/>
+        </a:xfrm>
+      </p:grpSpPr>
       <p:sp>
         <p:nvSpPr>
           <p:cNvPr id="2" name="Rectangle 1"/>
@@ -15204,6 +16680,7 @@
           <a:lstStyle/>
           <a:p>
             <a:pPr algn="ctr"/>
+            <a:endParaRPr/>
           </a:p>
         </p:txBody>
       </p:sp>
@@ -15248,6 +16725,7 @@
           <a:lstStyle/>
           <a:p>
             <a:pPr algn="ctr"/>
+            <a:endParaRPr/>
           </a:p>
         </p:txBody>
       </p:sp>
@@ -15268,7 +16746,7 @@
           <a:noFill/>
         </p:spPr>
         <p:txBody>
-          <a:bodyPr wrap="square" anchor="ctr" lIns="45720" rIns="45720">
+          <a:bodyPr wrap="square" lIns="45720" rIns="45720" anchor="ctr">
             <a:spAutoFit/>
           </a:bodyPr>
           <a:lstStyle/>
@@ -15307,7 +16785,7 @@
           <a:noFill/>
         </p:spPr>
         <p:txBody>
-          <a:bodyPr wrap="square" anchor="t" lIns="45720" rIns="45720">
+          <a:bodyPr wrap="square" lIns="45720" rIns="45720" anchor="t">
             <a:spAutoFit/>
           </a:bodyPr>
           <a:lstStyle/>
@@ -15338,7 +16816,7 @@
         <p:spPr>
           <a:xfrm>
             <a:off x="548640" y="6446520"/>
-            <a:ext cx="7315200" cy="274320"/>
+            <a:ext cx="7315200" cy="261610"/>
           </a:xfrm>
           <a:prstGeom prst="rect">
             <a:avLst/>
@@ -15346,7 +16824,7 @@
           <a:noFill/>
         </p:spPr>
         <p:txBody>
-          <a:bodyPr wrap="square" anchor="t" lIns="45720" rIns="45720">
+          <a:bodyPr wrap="square" lIns="45720" rIns="45720" anchor="t">
             <a:spAutoFit/>
           </a:bodyPr>
           <a:lstStyle/>
@@ -15357,13 +16835,31 @@
               </a:spcAft>
             </a:pPr>
             <a:r>
-              <a:rPr sz="1100" b="0">
+              <a:rPr sz="1100" b="0" dirty="0">
                 <a:solidFill>
                   <a:srgbClr val="64748B"/>
                 </a:solidFill>
                 <a:latin typeface="Segoe UI"/>
               </a:rPr>
-              <a:t>Rust → WebAssembly  |  Annual new-technology KPI 2026</a:t>
+              <a:t>Rust → </a:t>
+            </a:r>
+            <a:r>
+              <a:rPr sz="1100" b="0" dirty="0" err="1">
+                <a:solidFill>
+                  <a:srgbClr val="64748B"/>
+                </a:solidFill>
+                <a:latin typeface="Segoe UI"/>
+              </a:rPr>
+              <a:t>WebAssembly</a:t>
+            </a:r>
+            <a:r>
+              <a:rPr sz="1100" b="0" dirty="0">
+                <a:solidFill>
+                  <a:srgbClr val="64748B"/>
+                </a:solidFill>
+                <a:latin typeface="Segoe UI"/>
+              </a:rPr>
+              <a:t> </a:t>
             </a:r>
           </a:p>
         </p:txBody>
@@ -15385,7 +16881,7 @@
           <a:noFill/>
         </p:spPr>
         <p:txBody>
-          <a:bodyPr wrap="square" anchor="t" lIns="45720" rIns="45720">
+          <a:bodyPr wrap="square" lIns="45720" rIns="45720" anchor="t">
             <a:spAutoFit/>
           </a:bodyPr>
           <a:lstStyle/>
@@ -15421,7 +16917,7 @@
         </p:xfrm>
         <a:graphic>
           <a:graphicData uri="http://schemas.openxmlformats.org/drawingml/2006/chart">
-            <c:chart xmlns:c="http://schemas.openxmlformats.org/drawingml/2006/chart" r:id="rId2"/>
+            <c:chart xmlns:c="http://schemas.openxmlformats.org/drawingml/2006/chart" xmlns:r="http://schemas.openxmlformats.org/officeDocument/2006/relationships" r:id="rId3"/>
           </a:graphicData>
         </a:graphic>
       </p:graphicFrame>
@@ -15466,6 +16962,7 @@
           <a:lstStyle/>
           <a:p>
             <a:pPr algn="ctr"/>
+            <a:endParaRPr/>
           </a:p>
         </p:txBody>
       </p:sp>
@@ -15510,6 +17007,7 @@
           <a:lstStyle/>
           <a:p>
             <a:pPr algn="ctr"/>
+            <a:endParaRPr/>
           </a:p>
         </p:txBody>
       </p:sp>
@@ -15530,7 +17028,7 @@
           <a:noFill/>
         </p:spPr>
         <p:txBody>
-          <a:bodyPr wrap="square" anchor="t" lIns="45720" rIns="45720">
+          <a:bodyPr wrap="square" lIns="45720" rIns="45720" anchor="t">
             <a:spAutoFit/>
           </a:bodyPr>
           <a:lstStyle/>
@@ -15569,7 +17067,7 @@
           <a:noFill/>
         </p:spPr>
         <p:txBody>
-          <a:bodyPr wrap="square" anchor="t" lIns="45720" rIns="45720">
+          <a:bodyPr wrap="square" lIns="45720" rIns="45720" anchor="t">
             <a:spAutoFit/>
           </a:bodyPr>
           <a:lstStyle/>
@@ -15632,6 +17130,7 @@
           <a:lstStyle/>
           <a:p>
             <a:pPr algn="ctr"/>
+            <a:endParaRPr/>
           </a:p>
         </p:txBody>
       </p:sp>
@@ -15676,6 +17175,7 @@
           <a:lstStyle/>
           <a:p>
             <a:pPr algn="ctr"/>
+            <a:endParaRPr/>
           </a:p>
         </p:txBody>
       </p:sp>
@@ -15696,7 +17196,7 @@
           <a:noFill/>
         </p:spPr>
         <p:txBody>
-          <a:bodyPr wrap="square" anchor="t" lIns="45720" rIns="45720">
+          <a:bodyPr wrap="square" lIns="45720" rIns="45720" anchor="t">
             <a:spAutoFit/>
           </a:bodyPr>
           <a:lstStyle/>
@@ -15735,7 +17235,7 @@
           <a:noFill/>
         </p:spPr>
         <p:txBody>
-          <a:bodyPr wrap="square" anchor="t" lIns="45720" rIns="45720">
+          <a:bodyPr wrap="square" lIns="45720" rIns="45720" anchor="t">
             <a:spAutoFit/>
           </a:bodyPr>
           <a:lstStyle/>
@@ -15798,6 +17298,7 @@
           <a:lstStyle/>
           <a:p>
             <a:pPr algn="ctr"/>
+            <a:endParaRPr/>
           </a:p>
         </p:txBody>
       </p:sp>
@@ -15842,6 +17343,7 @@
           <a:lstStyle/>
           <a:p>
             <a:pPr algn="ctr"/>
+            <a:endParaRPr/>
           </a:p>
         </p:txBody>
       </p:sp>
@@ -15862,7 +17364,7 @@
           <a:noFill/>
         </p:spPr>
         <p:txBody>
-          <a:bodyPr wrap="square" anchor="t" lIns="45720" rIns="45720">
+          <a:bodyPr wrap="square" lIns="45720" rIns="45720" anchor="t">
             <a:spAutoFit/>
           </a:bodyPr>
           <a:lstStyle/>
@@ -15901,7 +17403,7 @@
           <a:noFill/>
         </p:spPr>
         <p:txBody>
-          <a:bodyPr wrap="square" anchor="t" lIns="45720" rIns="45720">
+          <a:bodyPr wrap="square" lIns="45720" rIns="45720" anchor="t">
             <a:spAutoFit/>
           </a:bodyPr>
           <a:lstStyle/>
@@ -15932,7 +17434,7 @@
 </file>
 
 <file path=ppt/slides/slide8.xml><?xml version="1.0" encoding="utf-8"?>
-<p:sld xmlns:a="http://schemas.openxmlformats.org/drawingml/2006/main" xmlns:p="http://schemas.openxmlformats.org/presentationml/2006/main" xmlns:r="http://schemas.openxmlformats.org/officeDocument/2006/relationships">
+<p:sld xmlns:a="http://schemas.openxmlformats.org/drawingml/2006/main" xmlns:r="http://schemas.openxmlformats.org/officeDocument/2006/relationships" xmlns:p="http://schemas.openxmlformats.org/presentationml/2006/main">
   <p:cSld>
     <p:bg>
       <p:bgPr>
@@ -15948,7 +17450,14 @@
         <p:cNvGrpSpPr/>
         <p:nvPr/>
       </p:nvGrpSpPr>
-      <p:grpSpPr/>
+      <p:grpSpPr>
+        <a:xfrm>
+          <a:off x="0" y="0"/>
+          <a:ext cx="0" cy="0"/>
+          <a:chOff x="0" y="0"/>
+          <a:chExt cx="0" cy="0"/>
+        </a:xfrm>
+      </p:grpSpPr>
       <p:sp>
         <p:nvSpPr>
           <p:cNvPr id="2" name="Rectangle 1"/>
@@ -15990,6 +17499,7 @@
           <a:lstStyle/>
           <a:p>
             <a:pPr algn="ctr"/>
+            <a:endParaRPr/>
           </a:p>
         </p:txBody>
       </p:sp>
@@ -16034,6 +17544,7 @@
           <a:lstStyle/>
           <a:p>
             <a:pPr algn="ctr"/>
+            <a:endParaRPr/>
           </a:p>
         </p:txBody>
       </p:sp>
@@ -16054,7 +17565,7 @@
           <a:noFill/>
         </p:spPr>
         <p:txBody>
-          <a:bodyPr wrap="square" anchor="ctr" lIns="45720" rIns="45720">
+          <a:bodyPr wrap="square" lIns="45720" rIns="45720" anchor="ctr">
             <a:spAutoFit/>
           </a:bodyPr>
           <a:lstStyle/>
@@ -16093,7 +17604,7 @@
           <a:noFill/>
         </p:spPr>
         <p:txBody>
-          <a:bodyPr wrap="square" anchor="t" lIns="45720" rIns="45720">
+          <a:bodyPr wrap="square" lIns="45720" rIns="45720" anchor="t">
             <a:spAutoFit/>
           </a:bodyPr>
           <a:lstStyle/>
@@ -16124,7 +17635,7 @@
         <p:spPr>
           <a:xfrm>
             <a:off x="548640" y="6446520"/>
-            <a:ext cx="7315200" cy="274320"/>
+            <a:ext cx="7315200" cy="261610"/>
           </a:xfrm>
           <a:prstGeom prst="rect">
             <a:avLst/>
@@ -16132,7 +17643,7 @@
           <a:noFill/>
         </p:spPr>
         <p:txBody>
-          <a:bodyPr wrap="square" anchor="t" lIns="45720" rIns="45720">
+          <a:bodyPr wrap="square" lIns="45720" rIns="45720" anchor="t">
             <a:spAutoFit/>
           </a:bodyPr>
           <a:lstStyle/>
@@ -16143,13 +17654,31 @@
               </a:spcAft>
             </a:pPr>
             <a:r>
-              <a:rPr sz="1100" b="0">
+              <a:rPr sz="1100" b="0" dirty="0">
                 <a:solidFill>
                   <a:srgbClr val="64748B"/>
                 </a:solidFill>
                 <a:latin typeface="Segoe UI"/>
               </a:rPr>
-              <a:t>Rust → WebAssembly  |  Annual new-technology KPI 2026</a:t>
+              <a:t>Rust → </a:t>
+            </a:r>
+            <a:r>
+              <a:rPr sz="1100" b="0" dirty="0" err="1">
+                <a:solidFill>
+                  <a:srgbClr val="64748B"/>
+                </a:solidFill>
+                <a:latin typeface="Segoe UI"/>
+              </a:rPr>
+              <a:t>WebAssembly</a:t>
+            </a:r>
+            <a:r>
+              <a:rPr sz="1100" b="0" dirty="0">
+                <a:solidFill>
+                  <a:srgbClr val="64748B"/>
+                </a:solidFill>
+                <a:latin typeface="Segoe UI"/>
+              </a:rPr>
+              <a:t> </a:t>
             </a:r>
           </a:p>
         </p:txBody>
@@ -16171,7 +17700,7 @@
           <a:noFill/>
         </p:spPr>
         <p:txBody>
-          <a:bodyPr wrap="square" anchor="t" lIns="45720" rIns="45720">
+          <a:bodyPr wrap="square" lIns="45720" rIns="45720" anchor="t">
             <a:spAutoFit/>
           </a:bodyPr>
           <a:lstStyle/>
@@ -16234,6 +17763,7 @@
           <a:lstStyle/>
           <a:p>
             <a:pPr algn="ctr"/>
+            <a:endParaRPr/>
           </a:p>
         </p:txBody>
       </p:sp>
@@ -16246,7 +17776,7 @@
           <p:nvPr/>
         </p:nvPicPr>
         <p:blipFill>
-          <a:blip r:embed="rId2"/>
+          <a:blip r:embed="rId3"/>
           <a:stretch>
             <a:fillRect/>
           </a:stretch>
@@ -16278,7 +17808,7 @@
           <a:noFill/>
         </p:spPr>
         <p:txBody>
-          <a:bodyPr wrap="square" anchor="t" lIns="45720" rIns="45720">
+          <a:bodyPr wrap="square" lIns="45720" rIns="45720" anchor="t">
             <a:spAutoFit/>
           </a:bodyPr>
           <a:lstStyle/>
@@ -16341,6 +17871,7 @@
           <a:lstStyle/>
           <a:p>
             <a:pPr algn="ctr"/>
+            <a:endParaRPr/>
           </a:p>
         </p:txBody>
       </p:sp>
@@ -16353,7 +17884,7 @@
           <p:nvPr/>
         </p:nvPicPr>
         <p:blipFill>
-          <a:blip r:embed="rId3"/>
+          <a:blip r:embed="rId4"/>
           <a:stretch>
             <a:fillRect/>
           </a:stretch>
@@ -16385,7 +17916,7 @@
           <a:noFill/>
         </p:spPr>
         <p:txBody>
-          <a:bodyPr wrap="square" anchor="t" lIns="45720" rIns="45720">
+          <a:bodyPr wrap="square" lIns="45720" rIns="45720" anchor="t">
             <a:spAutoFit/>
           </a:bodyPr>
           <a:lstStyle/>
@@ -16507,7 +18038,7 @@
 </file>
 
 <file path=ppt/slides/slide9.xml><?xml version="1.0" encoding="utf-8"?>
-<p:sld xmlns:a="http://schemas.openxmlformats.org/drawingml/2006/main" xmlns:p="http://schemas.openxmlformats.org/presentationml/2006/main" xmlns:r="http://schemas.openxmlformats.org/officeDocument/2006/relationships">
+<p:sld xmlns:a="http://schemas.openxmlformats.org/drawingml/2006/main" xmlns:r="http://schemas.openxmlformats.org/officeDocument/2006/relationships" xmlns:p="http://schemas.openxmlformats.org/presentationml/2006/main">
   <p:cSld>
     <p:bg>
       <p:bgPr>
@@ -16523,7 +18054,14 @@
         <p:cNvGrpSpPr/>
         <p:nvPr/>
       </p:nvGrpSpPr>
-      <p:grpSpPr/>
+      <p:grpSpPr>
+        <a:xfrm>
+          <a:off x="0" y="0"/>
+          <a:ext cx="0" cy="0"/>
+          <a:chOff x="0" y="0"/>
+          <a:chExt cx="0" cy="0"/>
+        </a:xfrm>
+      </p:grpSpPr>
       <p:sp>
         <p:nvSpPr>
           <p:cNvPr id="2" name="Rectangle 1"/>
@@ -16565,6 +18103,7 @@
           <a:lstStyle/>
           <a:p>
             <a:pPr algn="ctr"/>
+            <a:endParaRPr/>
           </a:p>
         </p:txBody>
       </p:sp>
@@ -16609,6 +18148,7 @@
           <a:lstStyle/>
           <a:p>
             <a:pPr algn="ctr"/>
+            <a:endParaRPr/>
           </a:p>
         </p:txBody>
       </p:sp>
@@ -16629,7 +18169,7 @@
           <a:noFill/>
         </p:spPr>
         <p:txBody>
-          <a:bodyPr wrap="square" anchor="ctr" lIns="45720" rIns="45720">
+          <a:bodyPr wrap="square" lIns="45720" rIns="45720" anchor="ctr">
             <a:spAutoFit/>
           </a:bodyPr>
           <a:lstStyle/>
@@ -16668,7 +18208,7 @@
           <a:noFill/>
         </p:spPr>
         <p:txBody>
-          <a:bodyPr wrap="square" anchor="t" lIns="45720" rIns="45720">
+          <a:bodyPr wrap="square" lIns="45720" rIns="45720" anchor="t">
             <a:spAutoFit/>
           </a:bodyPr>
           <a:lstStyle/>
@@ -16699,7 +18239,7 @@
         <p:spPr>
           <a:xfrm>
             <a:off x="548640" y="6446520"/>
-            <a:ext cx="7315200" cy="274320"/>
+            <a:ext cx="7315200" cy="261610"/>
           </a:xfrm>
           <a:prstGeom prst="rect">
             <a:avLst/>
@@ -16707,7 +18247,7 @@
           <a:noFill/>
         </p:spPr>
         <p:txBody>
-          <a:bodyPr wrap="square" anchor="t" lIns="45720" rIns="45720">
+          <a:bodyPr wrap="square" lIns="45720" rIns="45720" anchor="t">
             <a:spAutoFit/>
           </a:bodyPr>
           <a:lstStyle/>
@@ -16718,13 +18258,31 @@
               </a:spcAft>
             </a:pPr>
             <a:r>
-              <a:rPr sz="1100" b="0">
+              <a:rPr sz="1100" b="0" dirty="0">
                 <a:solidFill>
                   <a:srgbClr val="64748B"/>
                 </a:solidFill>
                 <a:latin typeface="Segoe UI"/>
               </a:rPr>
-              <a:t>Rust → WebAssembly  |  Annual new-technology KPI 2026</a:t>
+              <a:t>Rust → </a:t>
+            </a:r>
+            <a:r>
+              <a:rPr sz="1100" b="0" dirty="0" err="1">
+                <a:solidFill>
+                  <a:srgbClr val="64748B"/>
+                </a:solidFill>
+                <a:latin typeface="Segoe UI"/>
+              </a:rPr>
+              <a:t>WebAssembly</a:t>
+            </a:r>
+            <a:r>
+              <a:rPr sz="1100" b="0" dirty="0">
+                <a:solidFill>
+                  <a:srgbClr val="64748B"/>
+                </a:solidFill>
+                <a:latin typeface="Segoe UI"/>
+              </a:rPr>
+              <a:t> </a:t>
             </a:r>
           </a:p>
         </p:txBody>
@@ -16746,7 +18304,7 @@
           <a:noFill/>
         </p:spPr>
         <p:txBody>
-          <a:bodyPr wrap="square" anchor="t" lIns="45720" rIns="45720">
+          <a:bodyPr wrap="square" lIns="45720" rIns="45720" anchor="t">
             <a:spAutoFit/>
           </a:bodyPr>
           <a:lstStyle/>
@@ -16777,16 +18335,16 @@
             <a:picLocks noChangeAspect="1"/>
           </p:cNvPicPr>
           <p:nvPr>
-            <a:videoFile r:link="rId3"/>
+            <a:videoFile r:link="rId2"/>
             <p:extLst>
               <p:ext uri="{DAA4B4D4-6D71-4841-9C94-3DE7FCFB9230}">
-                <p14:media xmlns:p14="http://schemas.microsoft.com/office/powerpoint/2010/main" r:embed="rId2"/>
+                <p14:media xmlns:p14="http://schemas.microsoft.com/office/powerpoint/2010/main" r:embed="rId1"/>
               </p:ext>
             </p:extLst>
           </p:nvPr>
         </p:nvPicPr>
         <p:blipFill>
-          <a:blip r:embed="rId4"/>
+          <a:blip r:embed="rId5"/>
           <a:stretch>
             <a:fillRect/>
           </a:stretch>
@@ -16818,7 +18376,7 @@
           <a:noFill/>
         </p:spPr>
         <p:txBody>
-          <a:bodyPr wrap="square" anchor="t" lIns="45720" rIns="45720">
+          <a:bodyPr wrap="square" lIns="45720" rIns="45720" anchor="t">
             <a:spAutoFit/>
           </a:bodyPr>
           <a:lstStyle/>
@@ -17201,44 +18759,44 @@
         <a:sysClr val="window" lastClr="FFFFFF"/>
       </a:lt1>
       <a:dk2>
-        <a:srgbClr val="1F497D"/>
+        <a:srgbClr val="44546A"/>
       </a:dk2>
       <a:lt2>
-        <a:srgbClr val="EEECE1"/>
+        <a:srgbClr val="E7E6E6"/>
       </a:lt2>
       <a:accent1>
-        <a:srgbClr val="4F81BD"/>
+        <a:srgbClr val="4472C4"/>
       </a:accent1>
       <a:accent2>
-        <a:srgbClr val="C0504D"/>
+        <a:srgbClr val="ED7D31"/>
       </a:accent2>
       <a:accent3>
-        <a:srgbClr val="9BBB59"/>
+        <a:srgbClr val="A5A5A5"/>
       </a:accent3>
       <a:accent4>
-        <a:srgbClr val="8064A2"/>
+        <a:srgbClr val="FFC000"/>
       </a:accent4>
       <a:accent5>
-        <a:srgbClr val="4BACC6"/>
+        <a:srgbClr val="5B9BD5"/>
       </a:accent5>
       <a:accent6>
-        <a:srgbClr val="F79646"/>
+        <a:srgbClr val="70AD47"/>
       </a:accent6>
       <a:hlink>
-        <a:srgbClr val="0000FF"/>
+        <a:srgbClr val="0563C1"/>
       </a:hlink>
       <a:folHlink>
-        <a:srgbClr val="800080"/>
+        <a:srgbClr val="954F72"/>
       </a:folHlink>
     </a:clrScheme>
     <a:fontScheme name="Office">
       <a:majorFont>
-        <a:latin typeface="Calibri"/>
+        <a:latin typeface="Calibri Light" panose="020F0302020204030204"/>
         <a:ea typeface=""/>
         <a:cs typeface=""/>
-        <a:font script="Jpan" typeface="ＭＳ Ｐゴシック"/>
+        <a:font script="Jpan" typeface="游ゴシック Light"/>
         <a:font script="Hang" typeface="맑은 고딕"/>
-        <a:font script="Hans" typeface="宋体"/>
+        <a:font script="Hans" typeface="等线 Light"/>
         <a:font script="Hant" typeface="新細明體"/>
         <a:font script="Arab" typeface="Times New Roman"/>
         <a:font script="Hebr" typeface="Times New Roman"/>
@@ -17266,14 +18824,31 @@
         <a:font script="Viet" typeface="Times New Roman"/>
         <a:font script="Uigh" typeface="Microsoft Uighur"/>
         <a:font script="Geor" typeface="Sylfaen"/>
+        <a:font script="Armn" typeface="Arial"/>
+        <a:font script="Bugi" typeface="Leelawadee UI"/>
+        <a:font script="Bopo" typeface="Microsoft JhengHei"/>
+        <a:font script="Java" typeface="Javanese Text"/>
+        <a:font script="Lisu" typeface="Segoe UI"/>
+        <a:font script="Mymr" typeface="Myanmar Text"/>
+        <a:font script="Nkoo" typeface="Ebrima"/>
+        <a:font script="Olck" typeface="Nirmala UI"/>
+        <a:font script="Osma" typeface="Ebrima"/>
+        <a:font script="Phag" typeface="Phagspa"/>
+        <a:font script="Syrn" typeface="Estrangelo Edessa"/>
+        <a:font script="Syrj" typeface="Estrangelo Edessa"/>
+        <a:font script="Syre" typeface="Estrangelo Edessa"/>
+        <a:font script="Sora" typeface="Nirmala UI"/>
+        <a:font script="Tale" typeface="Microsoft Tai Le"/>
+        <a:font script="Talu" typeface="Microsoft New Tai Lue"/>
+        <a:font script="Tfng" typeface="Ebrima"/>
       </a:majorFont>
       <a:minorFont>
-        <a:latin typeface="Calibri"/>
+        <a:latin typeface="Calibri" panose="020F0502020204030204"/>
         <a:ea typeface=""/>
         <a:cs typeface=""/>
-        <a:font script="Jpan" typeface="ＭＳ Ｐゴシック"/>
+        <a:font script="Jpan" typeface="游ゴシック"/>
         <a:font script="Hang" typeface="맑은 고딕"/>
-        <a:font script="Hans" typeface="宋体"/>
+        <a:font script="Hans" typeface="等线"/>
         <a:font script="Hant" typeface="新細明體"/>
         <a:font script="Arab" typeface="Arial"/>
         <a:font script="Hebr" typeface="Arial"/>
@@ -17301,6 +18876,23 @@
         <a:font script="Viet" typeface="Arial"/>
         <a:font script="Uigh" typeface="Microsoft Uighur"/>
         <a:font script="Geor" typeface="Sylfaen"/>
+        <a:font script="Armn" typeface="Arial"/>
+        <a:font script="Bugi" typeface="Leelawadee UI"/>
+        <a:font script="Bopo" typeface="Microsoft JhengHei"/>
+        <a:font script="Java" typeface="Javanese Text"/>
+        <a:font script="Lisu" typeface="Segoe UI"/>
+        <a:font script="Mymr" typeface="Myanmar Text"/>
+        <a:font script="Nkoo" typeface="Ebrima"/>
+        <a:font script="Olck" typeface="Nirmala UI"/>
+        <a:font script="Osma" typeface="Ebrima"/>
+        <a:font script="Phag" typeface="Phagspa"/>
+        <a:font script="Syrn" typeface="Estrangelo Edessa"/>
+        <a:font script="Syrj" typeface="Estrangelo Edessa"/>
+        <a:font script="Syre" typeface="Estrangelo Edessa"/>
+        <a:font script="Sora" typeface="Nirmala UI"/>
+        <a:font script="Tale" typeface="Microsoft Tai Le"/>
+        <a:font script="Talu" typeface="Microsoft New Tai Lue"/>
+        <a:font script="Tfng" typeface="Ebrima"/>
       </a:minorFont>
     </a:fontScheme>
     <a:fmtScheme name="Office">
@@ -17312,200 +18904,141 @@
           <a:gsLst>
             <a:gs pos="0">
               <a:schemeClr val="phClr">
-                <a:tint val="50000"/>
-                <a:satMod val="300000"/>
+                <a:lumMod val="110000"/>
+                <a:satMod val="105000"/>
+                <a:tint val="67000"/>
               </a:schemeClr>
             </a:gs>
-            <a:gs pos="35000">
+            <a:gs pos="50000">
               <a:schemeClr val="phClr">
-                <a:tint val="37000"/>
-                <a:satMod val="300000"/>
+                <a:lumMod val="105000"/>
+                <a:satMod val="103000"/>
+                <a:tint val="73000"/>
               </a:schemeClr>
             </a:gs>
             <a:gs pos="100000">
               <a:schemeClr val="phClr">
-                <a:tint val="15000"/>
-                <a:satMod val="350000"/>
+                <a:lumMod val="105000"/>
+                <a:satMod val="109000"/>
+                <a:tint val="81000"/>
               </a:schemeClr>
             </a:gs>
           </a:gsLst>
-          <a:lin ang="16200000" scaled="1"/>
+          <a:lin ang="5400000" scaled="0"/>
         </a:gradFill>
         <a:gradFill rotWithShape="1">
           <a:gsLst>
             <a:gs pos="0">
               <a:schemeClr val="phClr">
-                <a:tint val="100000"/>
+                <a:satMod val="103000"/>
+                <a:lumMod val="102000"/>
+                <a:tint val="94000"/>
+              </a:schemeClr>
+            </a:gs>
+            <a:gs pos="50000">
+              <a:schemeClr val="phClr">
+                <a:satMod val="110000"/>
+                <a:lumMod val="100000"/>
                 <a:shade val="100000"/>
-                <a:satMod val="130000"/>
               </a:schemeClr>
             </a:gs>
             <a:gs pos="100000">
               <a:schemeClr val="phClr">
-                <a:tint val="50000"/>
-                <a:shade val="100000"/>
-                <a:satMod val="350000"/>
+                <a:lumMod val="99000"/>
+                <a:satMod val="120000"/>
+                <a:shade val="78000"/>
               </a:schemeClr>
             </a:gs>
           </a:gsLst>
-          <a:lin ang="16200000" scaled="0"/>
+          <a:lin ang="5400000" scaled="0"/>
         </a:gradFill>
       </a:fillStyleLst>
       <a:lnStyleLst>
-        <a:ln w="9525" cap="flat" cmpd="sng" algn="ctr">
-          <a:solidFill>
-            <a:schemeClr val="phClr">
-              <a:shade val="95000"/>
-              <a:satMod val="105000"/>
-            </a:schemeClr>
-          </a:solidFill>
-          <a:prstDash val="solid"/>
-        </a:ln>
-        <a:ln w="25400" cap="flat" cmpd="sng" algn="ctr">
+        <a:ln w="6350" cap="flat" cmpd="sng" algn="ctr">
           <a:solidFill>
             <a:schemeClr val="phClr"/>
           </a:solidFill>
           <a:prstDash val="solid"/>
+          <a:miter lim="800000"/>
         </a:ln>
-        <a:ln w="38100" cap="flat" cmpd="sng" algn="ctr">
+        <a:ln w="12700" cap="flat" cmpd="sng" algn="ctr">
           <a:solidFill>
             <a:schemeClr val="phClr"/>
           </a:solidFill>
           <a:prstDash val="solid"/>
+          <a:miter lim="800000"/>
+        </a:ln>
+        <a:ln w="19050" cap="flat" cmpd="sng" algn="ctr">
+          <a:solidFill>
+            <a:schemeClr val="phClr"/>
+          </a:solidFill>
+          <a:prstDash val="solid"/>
+          <a:miter lim="800000"/>
         </a:ln>
       </a:lnStyleLst>
       <a:effectStyleLst>
         <a:effectStyle>
+          <a:effectLst/>
+        </a:effectStyle>
+        <a:effectStyle>
+          <a:effectLst/>
+        </a:effectStyle>
+        <a:effectStyle>
           <a:effectLst>
-            <a:outerShdw blurRad="40000" dist="20000" dir="5400000" rotWithShape="0">
+            <a:outerShdw blurRad="57150" dist="19050" dir="5400000" algn="ctr" rotWithShape="0">
               <a:srgbClr val="000000">
-                <a:alpha val="38000"/>
+                <a:alpha val="63000"/>
               </a:srgbClr>
             </a:outerShdw>
           </a:effectLst>
-        </a:effectStyle>
-        <a:effectStyle>
-          <a:effectLst>
-            <a:outerShdw blurRad="40000" dist="23000" dir="5400000" rotWithShape="0">
-              <a:srgbClr val="000000">
-                <a:alpha val="35000"/>
-              </a:srgbClr>
-            </a:outerShdw>
-          </a:effectLst>
-        </a:effectStyle>
-        <a:effectStyle>
-          <a:effectLst>
-            <a:outerShdw blurRad="40000" dist="23000" dir="5400000" rotWithShape="0">
-              <a:srgbClr val="000000">
-                <a:alpha val="35000"/>
-              </a:srgbClr>
-            </a:outerShdw>
-          </a:effectLst>
-          <a:scene3d>
-            <a:camera prst="orthographicFront">
-              <a:rot lat="0" lon="0" rev="0"/>
-            </a:camera>
-            <a:lightRig rig="threePt" dir="t">
-              <a:rot lat="0" lon="0" rev="1200000"/>
-            </a:lightRig>
-          </a:scene3d>
-          <a:sp3d>
-            <a:bevelT w="63500" h="25400"/>
-          </a:sp3d>
         </a:effectStyle>
       </a:effectStyleLst>
       <a:bgFillStyleLst>
         <a:solidFill>
           <a:schemeClr val="phClr"/>
         </a:solidFill>
+        <a:solidFill>
+          <a:schemeClr val="phClr">
+            <a:tint val="95000"/>
+            <a:satMod val="170000"/>
+          </a:schemeClr>
+        </a:solidFill>
         <a:gradFill rotWithShape="1">
           <a:gsLst>
             <a:gs pos="0">
               <a:schemeClr val="phClr">
-                <a:tint val="40000"/>
-                <a:satMod val="350000"/>
+                <a:tint val="93000"/>
+                <a:satMod val="150000"/>
+                <a:shade val="98000"/>
+                <a:lumMod val="102000"/>
               </a:schemeClr>
             </a:gs>
-            <a:gs pos="40000">
+            <a:gs pos="50000">
               <a:schemeClr val="phClr">
-                <a:tint val="45000"/>
-                <a:shade val="99000"/>
-                <a:satMod val="350000"/>
+                <a:tint val="98000"/>
+                <a:satMod val="130000"/>
+                <a:shade val="90000"/>
+                <a:lumMod val="103000"/>
               </a:schemeClr>
             </a:gs>
             <a:gs pos="100000">
               <a:schemeClr val="phClr">
-                <a:shade val="20000"/>
-                <a:satMod val="255000"/>
+                <a:shade val="63000"/>
+                <a:satMod val="120000"/>
               </a:schemeClr>
             </a:gs>
           </a:gsLst>
-          <a:path path="circle">
-            <a:fillToRect l="50000" t="-80000" r="50000" b="180000"/>
-          </a:path>
-        </a:gradFill>
-        <a:gradFill rotWithShape="1">
-          <a:gsLst>
-            <a:gs pos="0">
-              <a:schemeClr val="phClr">
-                <a:tint val="80000"/>
-                <a:satMod val="300000"/>
-              </a:schemeClr>
-            </a:gs>
-            <a:gs pos="100000">
-              <a:schemeClr val="phClr">
-                <a:shade val="30000"/>
-                <a:satMod val="200000"/>
-              </a:schemeClr>
-            </a:gs>
-          </a:gsLst>
-          <a:path path="circle">
-            <a:fillToRect l="50000" t="50000" r="50000" b="50000"/>
-          </a:path>
+          <a:lin ang="5400000" scaled="0"/>
         </a:gradFill>
       </a:bgFillStyleLst>
     </a:fmtScheme>
   </a:themeElements>
-  <a:objectDefaults>
-    <a:spDef>
-      <a:spPr/>
-      <a:bodyPr/>
-      <a:lstStyle/>
-      <a:style>
-        <a:lnRef idx="1">
-          <a:schemeClr val="accent1"/>
-        </a:lnRef>
-        <a:fillRef idx="3">
-          <a:schemeClr val="accent1"/>
-        </a:fillRef>
-        <a:effectRef idx="2">
-          <a:schemeClr val="accent1"/>
-        </a:effectRef>
-        <a:fontRef idx="minor">
-          <a:schemeClr val="lt1"/>
-        </a:fontRef>
-      </a:style>
-    </a:spDef>
-    <a:lnDef>
-      <a:spPr/>
-      <a:bodyPr/>
-      <a:lstStyle/>
-      <a:style>
-        <a:lnRef idx="2">
-          <a:schemeClr val="accent1"/>
-        </a:lnRef>
-        <a:fillRef idx="0">
-          <a:schemeClr val="accent1"/>
-        </a:fillRef>
-        <a:effectRef idx="1">
-          <a:schemeClr val="accent1"/>
-        </a:effectRef>
-        <a:fontRef idx="minor">
-          <a:schemeClr val="tx1"/>
-        </a:fontRef>
-      </a:style>
-    </a:lnDef>
-  </a:objectDefaults>
+  <a:objectDefaults/>
   <a:extraClrSchemeLst/>
+  <a:extLst>
+    <a:ext uri="{05A4C25C-085E-4340-85A3-A5531E510DB2}">
+      <thm15:themeFamily xmlns:thm15="http://schemas.microsoft.com/office/thememl/2012/main" name="Office Theme" id="{62F939B6-93AF-4DB8-9C6B-D6C7DFDC589F}" vid="{4A3C46E8-61CC-4603-A589-7422A47A8E4A}"/>
+    </a:ext>
+  </a:extLst>
 </a:theme>
 </file>